--- a/docs/content/05-teaching-resources/slides/core/19-professional-conduct-cpd-and-human-factors.pptx
+++ b/docs/content/05-teaching-resources/slides/core/19-professional-conduct-cpd-and-human-factors.pptx
@@ -14,6 +14,10 @@
     <p:sldId id="262" r:id="rId14"/>
     <p:sldId id="263" r:id="rId15"/>
     <p:sldId id="264" r:id="rId16"/>
+    <p:sldId id="265" r:id="rId17"/>
+    <p:sldId id="266" r:id="rId18"/>
+    <p:sldId id="267" r:id="rId19"/>
+    <p:sldId id="268" r:id="rId20"/>
   </p:sldIdLst>
   <p:sldSz cx="12191695" cy="6858000" type="screen4x3"/>
   <p:notesSz cx="6858000" cy="9144000"/>
@@ -510,7 +514,22 @@
           <a:lstStyle/>
           <a:p>
             <a:r>
-              <a:t>Give students a few minutes to answer on mini whiteboards or paper, then reveal the answers on the next slide.</a:t>
+              <a:t>Answers:</a:t>
+            </a:r>
+          </a:p>
+          <a:p>
+            <a:r>
+              <a:t>1. Ongoing professional learning throughout a career.</a:t>
+            </a:r>
+          </a:p>
+          <a:p>
+            <a:r>
+              <a:t>2. The Engineering Council.</a:t>
+            </a:r>
+          </a:p>
+          <a:p>
+            <a:r>
+              <a:t>3. EngTech, IEng or CEng.</a:t>
             </a:r>
           </a:p>
         </p:txBody>
@@ -580,7 +599,22 @@
           <a:lstStyle/>
           <a:p>
             <a:r>
-              <a:t>Talk through any answers the class found difficult.</a:t>
+              <a:t>Answers:</a:t>
+            </a:r>
+          </a:p>
+          <a:p>
+            <a:r>
+              <a:t>1. E.g. training, fatigue, workload, stress.</a:t>
+            </a:r>
+          </a:p>
+          <a:p>
+            <a:r>
+              <a:t>2. Designing so mistakes are impossible.</a:t>
+            </a:r>
+          </a:p>
+          <a:p>
+            <a:r>
+              <a:t>3. Poor layout, lighting or posture cause mistakes and injuries.</a:t>
             </a:r>
           </a:p>
         </p:txBody>
@@ -606,6 +640,146 @@
 </file>
 
 <file path=ppt/notesSlides/notesSlide3.xml><?xml version="1.0" encoding="utf-8"?>
+<p:notes xmlns:a="http://schemas.openxmlformats.org/drawingml/2006/main" xmlns:p="http://schemas.openxmlformats.org/presentationml/2006/main" xmlns:r="http://schemas.openxmlformats.org/officeDocument/2006/relationships">
+  <p:cSld>
+    <p:spTree>
+      <p:nvGrpSpPr>
+        <p:cNvPr id="1" name=""/>
+        <p:cNvGrpSpPr/>
+        <p:nvPr/>
+      </p:nvGrpSpPr>
+      <p:grpSpPr>
+        <a:xfrm>
+          <a:off x="0" y="0"/>
+          <a:ext cx="0" cy="0"/>
+          <a:chOff x="0" y="0"/>
+          <a:chExt cx="0" cy="0"/>
+        </a:xfrm>
+      </p:grpSpPr>
+      <p:sp>
+        <p:nvSpPr>
+          <p:cNvPr id="2" name="Slide Image Placeholder 1"/>
+          <p:cNvSpPr>
+            <a:spLocks noGrp="1"/>
+          </p:cNvSpPr>
+          <p:nvPr>
+            <p:ph type="sldImg" idx="2"/>
+          </p:nvPr>
+        </p:nvSpPr>
+        <p:spPr/>
+      </p:sp>
+      <p:sp>
+        <p:nvSpPr>
+          <p:cNvPr id="3" name="Notes Placeholder 2"/>
+          <p:cNvSpPr>
+            <a:spLocks noGrp="1"/>
+          </p:cNvSpPr>
+          <p:nvPr>
+            <p:ph type="body" idx="3" sz="quarter"/>
+          </p:nvPr>
+        </p:nvSpPr>
+        <p:spPr/>
+        <p:txBody>
+          <a:bodyPr/>
+          <a:lstStyle/>
+          <a:p>
+            <a:r>
+              <a:t>Give students a few minutes to answer on mini whiteboards or paper, then reveal the answers on the next slide.</a:t>
+            </a:r>
+          </a:p>
+        </p:txBody>
+      </p:sp>
+      <p:sp>
+        <p:nvSpPr>
+          <p:cNvPr id="4" name="Slide Number Placeholder 3"/>
+          <p:cNvSpPr>
+            <a:spLocks noGrp="1"/>
+          </p:cNvSpPr>
+          <p:nvPr>
+            <p:ph type="sldNum" idx="5" sz="quarter"/>
+          </p:nvPr>
+        </p:nvSpPr>
+        <p:spPr/>
+      </p:sp>
+    </p:spTree>
+  </p:cSld>
+  <p:clrMapOvr>
+    <a:masterClrMapping/>
+  </p:clrMapOvr>
+</p:notes>
+</file>
+
+<file path=ppt/notesSlides/notesSlide4.xml><?xml version="1.0" encoding="utf-8"?>
+<p:notes xmlns:a="http://schemas.openxmlformats.org/drawingml/2006/main" xmlns:p="http://schemas.openxmlformats.org/presentationml/2006/main" xmlns:r="http://schemas.openxmlformats.org/officeDocument/2006/relationships">
+  <p:cSld>
+    <p:spTree>
+      <p:nvGrpSpPr>
+        <p:cNvPr id="1" name=""/>
+        <p:cNvGrpSpPr/>
+        <p:nvPr/>
+      </p:nvGrpSpPr>
+      <p:grpSpPr>
+        <a:xfrm>
+          <a:off x="0" y="0"/>
+          <a:ext cx="0" cy="0"/>
+          <a:chOff x="0" y="0"/>
+          <a:chExt cx="0" cy="0"/>
+        </a:xfrm>
+      </p:grpSpPr>
+      <p:sp>
+        <p:nvSpPr>
+          <p:cNvPr id="2" name="Slide Image Placeholder 1"/>
+          <p:cNvSpPr>
+            <a:spLocks noGrp="1"/>
+          </p:cNvSpPr>
+          <p:nvPr>
+            <p:ph type="sldImg" idx="2"/>
+          </p:nvPr>
+        </p:nvSpPr>
+        <p:spPr/>
+      </p:sp>
+      <p:sp>
+        <p:nvSpPr>
+          <p:cNvPr id="3" name="Notes Placeholder 2"/>
+          <p:cNvSpPr>
+            <a:spLocks noGrp="1"/>
+          </p:cNvSpPr>
+          <p:nvPr>
+            <p:ph type="body" idx="3" sz="quarter"/>
+          </p:nvPr>
+        </p:nvSpPr>
+        <p:spPr/>
+        <p:txBody>
+          <a:bodyPr/>
+          <a:lstStyle/>
+          <a:p>
+            <a:r>
+              <a:t>Talk through any answers the class found difficult.</a:t>
+            </a:r>
+          </a:p>
+        </p:txBody>
+      </p:sp>
+      <p:sp>
+        <p:nvSpPr>
+          <p:cNvPr id="4" name="Slide Number Placeholder 3"/>
+          <p:cNvSpPr>
+            <a:spLocks noGrp="1"/>
+          </p:cNvSpPr>
+          <p:nvPr>
+            <p:ph type="sldNum" idx="5" sz="quarter"/>
+          </p:nvPr>
+        </p:nvSpPr>
+        <p:spPr/>
+      </p:sp>
+    </p:spTree>
+  </p:cSld>
+  <p:clrMapOvr>
+    <a:masterClrMapping/>
+  </p:clrMapOvr>
+</p:notes>
+</file>
+
+<file path=ppt/notesSlides/notesSlide5.xml><?xml version="1.0" encoding="utf-8"?>
 <p:notes xmlns:a="http://schemas.openxmlformats.org/drawingml/2006/main" xmlns:p="http://schemas.openxmlformats.org/presentationml/2006/main" xmlns:r="http://schemas.openxmlformats.org/officeDocument/2006/relationships">
   <p:cSld>
     <p:spTree>
@@ -3975,6 +4149,2355 @@
 </p:sld>
 </file>
 
+<file path=ppt/slides/slide10.xml><?xml version="1.0" encoding="utf-8"?>
+<p:sld xmlns:a="http://schemas.openxmlformats.org/drawingml/2006/main" xmlns:p="http://schemas.openxmlformats.org/presentationml/2006/main" xmlns:r="http://schemas.openxmlformats.org/officeDocument/2006/relationships">
+  <p:cSld>
+    <p:bg>
+      <p:bgPr>
+        <a:solidFill>
+          <a:srgbClr val="FFFFFF"/>
+        </a:solidFill>
+        <a:effectLst/>
+      </p:bgPr>
+    </p:bg>
+    <p:spTree>
+      <p:nvGrpSpPr>
+        <p:cNvPr id="1" name=""/>
+        <p:cNvGrpSpPr/>
+        <p:nvPr/>
+      </p:nvGrpSpPr>
+      <p:grpSpPr/>
+      <p:sp>
+        <p:nvSpPr>
+          <p:cNvPr id="2" name="TextBox 1"/>
+          <p:cNvSpPr txBox="1"/>
+          <p:nvPr/>
+        </p:nvSpPr>
+        <p:spPr>
+          <a:xfrm>
+            <a:off x="548640" y="320040"/>
+            <a:ext cx="11094415" cy="274320"/>
+          </a:xfrm>
+          <a:prstGeom prst="rect">
+            <a:avLst/>
+          </a:prstGeom>
+          <a:noFill/>
+        </p:spPr>
+        <p:txBody>
+          <a:bodyPr wrap="square" anchor="t" lIns="0" rIns="0" tIns="0" bIns="0"/>
+          <a:lstStyle/>
+          <a:p>
+            <a:pPr algn="l"/>
+            <a:r>
+              <a:rPr sz="1100" b="1" i="0">
+                <a:solidFill>
+                  <a:srgbClr val="54595D"/>
+                </a:solidFill>
+                <a:latin typeface="Calibri"/>
+              </a:rPr>
+              <a:t>ENGINEERING CORE  ·  Core topic 14</a:t>
+            </a:r>
+          </a:p>
+        </p:txBody>
+      </p:sp>
+      <p:sp>
+        <p:nvSpPr>
+          <p:cNvPr id="3" name="TextBox 2"/>
+          <p:cNvSpPr txBox="1"/>
+          <p:nvPr/>
+        </p:nvSpPr>
+        <p:spPr>
+          <a:xfrm>
+            <a:off x="548640" y="566928"/>
+            <a:ext cx="11094415" cy="822960"/>
+          </a:xfrm>
+          <a:prstGeom prst="rect">
+            <a:avLst/>
+          </a:prstGeom>
+          <a:noFill/>
+        </p:spPr>
+        <p:txBody>
+          <a:bodyPr wrap="square" anchor="ctr" lIns="0" rIns="0" tIns="0" bIns="0"/>
+          <a:lstStyle/>
+          <a:p>
+            <a:pPr algn="l"/>
+            <a:r>
+              <a:rPr sz="3200" b="1" i="0">
+                <a:solidFill>
+                  <a:srgbClr val="03306E"/>
+                </a:solidFill>
+                <a:latin typeface="Cambria"/>
+              </a:rPr>
+              <a:t>Check your understanding</a:t>
+            </a:r>
+          </a:p>
+        </p:txBody>
+      </p:sp>
+      <p:sp>
+        <p:nvSpPr>
+          <p:cNvPr id="4" name="TextBox 3"/>
+          <p:cNvSpPr txBox="1"/>
+          <p:nvPr/>
+        </p:nvSpPr>
+        <p:spPr>
+          <a:xfrm>
+            <a:off x="548640" y="6446520"/>
+            <a:ext cx="8229600" cy="274320"/>
+          </a:xfrm>
+          <a:prstGeom prst="rect">
+            <a:avLst/>
+          </a:prstGeom>
+          <a:noFill/>
+        </p:spPr>
+        <p:txBody>
+          <a:bodyPr wrap="square" anchor="t" lIns="0" rIns="0" tIns="0" bIns="0"/>
+          <a:lstStyle/>
+          <a:p>
+            <a:pPr algn="l"/>
+            <a:r>
+              <a:rPr sz="1000" b="0" i="0">
+                <a:solidFill>
+                  <a:srgbClr val="54595D"/>
+                </a:solidFill>
+                <a:latin typeface="Calibri"/>
+              </a:rPr>
+              <a:t>Design and Development for Engineering and Manufacturing T Level  ·  Professional Conduct, CPD and Human Factors</a:t>
+            </a:r>
+          </a:p>
+        </p:txBody>
+      </p:sp>
+      <p:sp>
+        <p:nvSpPr>
+          <p:cNvPr id="5" name="TextBox 4"/>
+          <p:cNvSpPr txBox="1"/>
+          <p:nvPr/>
+        </p:nvSpPr>
+        <p:spPr>
+          <a:xfrm>
+            <a:off x="10728655" y="6446520"/>
+            <a:ext cx="914400" cy="274320"/>
+          </a:xfrm>
+          <a:prstGeom prst="rect">
+            <a:avLst/>
+          </a:prstGeom>
+          <a:noFill/>
+        </p:spPr>
+        <p:txBody>
+          <a:bodyPr wrap="square" anchor="t" lIns="0" rIns="0" tIns="0" bIns="0"/>
+          <a:lstStyle/>
+          <a:p>
+            <a:pPr algn="r"/>
+            <a:r>
+              <a:rPr sz="1000" b="0" i="0">
+                <a:solidFill>
+                  <a:srgbClr val="54595D"/>
+                </a:solidFill>
+                <a:latin typeface="Calibri"/>
+              </a:rPr>
+              <a:t>10</a:t>
+            </a:r>
+          </a:p>
+        </p:txBody>
+      </p:sp>
+      <p:sp>
+        <p:nvSpPr>
+          <p:cNvPr id="6" name="Oval 5"/>
+          <p:cNvSpPr/>
+          <p:nvPr/>
+        </p:nvSpPr>
+        <p:spPr>
+          <a:xfrm>
+            <a:off x="548640" y="1618488"/>
+            <a:ext cx="411480" cy="411480"/>
+          </a:xfrm>
+          <a:prstGeom prst="ellipse">
+            <a:avLst/>
+          </a:prstGeom>
+          <a:solidFill>
+            <a:srgbClr val="F2B705"/>
+          </a:solidFill>
+          <a:ln>
+            <a:noFill/>
+          </a:ln>
+          <a:effectLst/>
+        </p:spPr>
+        <p:style>
+          <a:lnRef idx="1">
+            <a:schemeClr val="accent1"/>
+          </a:lnRef>
+          <a:fillRef idx="3">
+            <a:schemeClr val="accent1"/>
+          </a:fillRef>
+          <a:effectRef idx="2">
+            <a:schemeClr val="accent1"/>
+          </a:effectRef>
+          <a:fontRef idx="minor">
+            <a:schemeClr val="lt1"/>
+          </a:fontRef>
+        </p:style>
+        <p:txBody>
+          <a:bodyPr rtlCol="0" anchor="ctr" lIns="0" rIns="0" tIns="0" bIns="0"/>
+          <a:lstStyle/>
+          <a:p>
+            <a:pPr algn="ctr"/>
+            <a:r>
+              <a:rPr sz="1400" b="1">
+                <a:solidFill>
+                  <a:srgbClr val="202122"/>
+                </a:solidFill>
+                <a:latin typeface="Calibri"/>
+              </a:rPr>
+              <a:t>1</a:t>
+            </a:r>
+          </a:p>
+        </p:txBody>
+      </p:sp>
+      <p:sp>
+        <p:nvSpPr>
+          <p:cNvPr id="7" name="TextBox 6"/>
+          <p:cNvSpPr txBox="1"/>
+          <p:nvPr/>
+        </p:nvSpPr>
+        <p:spPr>
+          <a:xfrm>
+            <a:off x="1234440" y="1600200"/>
+            <a:ext cx="10408615" cy="1030986"/>
+          </a:xfrm>
+          <a:prstGeom prst="rect">
+            <a:avLst/>
+          </a:prstGeom>
+          <a:noFill/>
+        </p:spPr>
+        <p:txBody>
+          <a:bodyPr wrap="square" anchor="t" lIns="0" rIns="0" tIns="0" bIns="0"/>
+          <a:lstStyle/>
+          <a:p>
+            <a:pPr algn="l"/>
+            <a:r>
+              <a:rPr sz="2200" b="0" i="0">
+                <a:solidFill>
+                  <a:srgbClr val="202122"/>
+                </a:solidFill>
+                <a:latin typeface="Calibri"/>
+              </a:rPr>
+              <a:t>What is CPD?</a:t>
+            </a:r>
+          </a:p>
+        </p:txBody>
+      </p:sp>
+      <p:sp>
+        <p:nvSpPr>
+          <p:cNvPr id="8" name="Oval 7"/>
+          <p:cNvSpPr/>
+          <p:nvPr/>
+        </p:nvSpPr>
+        <p:spPr>
+          <a:xfrm>
+            <a:off x="548640" y="2814066"/>
+            <a:ext cx="411480" cy="411480"/>
+          </a:xfrm>
+          <a:prstGeom prst="ellipse">
+            <a:avLst/>
+          </a:prstGeom>
+          <a:solidFill>
+            <a:srgbClr val="F2B705"/>
+          </a:solidFill>
+          <a:ln>
+            <a:noFill/>
+          </a:ln>
+          <a:effectLst/>
+        </p:spPr>
+        <p:style>
+          <a:lnRef idx="1">
+            <a:schemeClr val="accent1"/>
+          </a:lnRef>
+          <a:fillRef idx="3">
+            <a:schemeClr val="accent1"/>
+          </a:fillRef>
+          <a:effectRef idx="2">
+            <a:schemeClr val="accent1"/>
+          </a:effectRef>
+          <a:fontRef idx="minor">
+            <a:schemeClr val="lt1"/>
+          </a:fontRef>
+        </p:style>
+        <p:txBody>
+          <a:bodyPr rtlCol="0" anchor="ctr" lIns="0" rIns="0" tIns="0" bIns="0"/>
+          <a:lstStyle/>
+          <a:p>
+            <a:pPr algn="ctr"/>
+            <a:r>
+              <a:rPr sz="1400" b="1">
+                <a:solidFill>
+                  <a:srgbClr val="202122"/>
+                </a:solidFill>
+                <a:latin typeface="Calibri"/>
+              </a:rPr>
+              <a:t>2</a:t>
+            </a:r>
+          </a:p>
+        </p:txBody>
+      </p:sp>
+      <p:sp>
+        <p:nvSpPr>
+          <p:cNvPr id="9" name="TextBox 8"/>
+          <p:cNvSpPr txBox="1"/>
+          <p:nvPr/>
+        </p:nvSpPr>
+        <p:spPr>
+          <a:xfrm>
+            <a:off x="1234440" y="2795778"/>
+            <a:ext cx="10408615" cy="1030986"/>
+          </a:xfrm>
+          <a:prstGeom prst="rect">
+            <a:avLst/>
+          </a:prstGeom>
+          <a:noFill/>
+        </p:spPr>
+        <p:txBody>
+          <a:bodyPr wrap="square" anchor="t" lIns="0" rIns="0" tIns="0" bIns="0"/>
+          <a:lstStyle/>
+          <a:p>
+            <a:pPr algn="l"/>
+            <a:r>
+              <a:rPr sz="2200" b="0" i="0">
+                <a:solidFill>
+                  <a:srgbClr val="202122"/>
+                </a:solidFill>
+                <a:latin typeface="Calibri"/>
+              </a:rPr>
+              <a:t>Who sets professional standards for engineers in the UK?</a:t>
+            </a:r>
+          </a:p>
+        </p:txBody>
+      </p:sp>
+      <p:sp>
+        <p:nvSpPr>
+          <p:cNvPr id="10" name="Oval 9"/>
+          <p:cNvSpPr/>
+          <p:nvPr/>
+        </p:nvSpPr>
+        <p:spPr>
+          <a:xfrm>
+            <a:off x="548640" y="4009644"/>
+            <a:ext cx="411480" cy="411480"/>
+          </a:xfrm>
+          <a:prstGeom prst="ellipse">
+            <a:avLst/>
+          </a:prstGeom>
+          <a:solidFill>
+            <a:srgbClr val="F2B705"/>
+          </a:solidFill>
+          <a:ln>
+            <a:noFill/>
+          </a:ln>
+          <a:effectLst/>
+        </p:spPr>
+        <p:style>
+          <a:lnRef idx="1">
+            <a:schemeClr val="accent1"/>
+          </a:lnRef>
+          <a:fillRef idx="3">
+            <a:schemeClr val="accent1"/>
+          </a:fillRef>
+          <a:effectRef idx="2">
+            <a:schemeClr val="accent1"/>
+          </a:effectRef>
+          <a:fontRef idx="minor">
+            <a:schemeClr val="lt1"/>
+          </a:fontRef>
+        </p:style>
+        <p:txBody>
+          <a:bodyPr rtlCol="0" anchor="ctr" lIns="0" rIns="0" tIns="0" bIns="0"/>
+          <a:lstStyle/>
+          <a:p>
+            <a:pPr algn="ctr"/>
+            <a:r>
+              <a:rPr sz="1400" b="1">
+                <a:solidFill>
+                  <a:srgbClr val="202122"/>
+                </a:solidFill>
+                <a:latin typeface="Calibri"/>
+              </a:rPr>
+              <a:t>3</a:t>
+            </a:r>
+          </a:p>
+        </p:txBody>
+      </p:sp>
+      <p:sp>
+        <p:nvSpPr>
+          <p:cNvPr id="11" name="TextBox 10"/>
+          <p:cNvSpPr txBox="1"/>
+          <p:nvPr/>
+        </p:nvSpPr>
+        <p:spPr>
+          <a:xfrm>
+            <a:off x="1234440" y="3991356"/>
+            <a:ext cx="10408615" cy="1030986"/>
+          </a:xfrm>
+          <a:prstGeom prst="rect">
+            <a:avLst/>
+          </a:prstGeom>
+          <a:noFill/>
+        </p:spPr>
+        <p:txBody>
+          <a:bodyPr wrap="square" anchor="t" lIns="0" rIns="0" tIns="0" bIns="0"/>
+          <a:lstStyle/>
+          <a:p>
+            <a:pPr algn="l"/>
+            <a:r>
+              <a:rPr sz="2200" b="0" i="0">
+                <a:solidFill>
+                  <a:srgbClr val="202122"/>
+                </a:solidFill>
+                <a:latin typeface="Calibri"/>
+              </a:rPr>
+              <a:t>Name two causes of human error.</a:t>
+            </a:r>
+          </a:p>
+        </p:txBody>
+      </p:sp>
+      <p:sp>
+        <p:nvSpPr>
+          <p:cNvPr id="12" name="Oval 11"/>
+          <p:cNvSpPr/>
+          <p:nvPr/>
+        </p:nvSpPr>
+        <p:spPr>
+          <a:xfrm>
+            <a:off x="548640" y="5205221"/>
+            <a:ext cx="411480" cy="411480"/>
+          </a:xfrm>
+          <a:prstGeom prst="ellipse">
+            <a:avLst/>
+          </a:prstGeom>
+          <a:solidFill>
+            <a:srgbClr val="F2B705"/>
+          </a:solidFill>
+          <a:ln>
+            <a:noFill/>
+          </a:ln>
+          <a:effectLst/>
+        </p:spPr>
+        <p:style>
+          <a:lnRef idx="1">
+            <a:schemeClr val="accent1"/>
+          </a:lnRef>
+          <a:fillRef idx="3">
+            <a:schemeClr val="accent1"/>
+          </a:fillRef>
+          <a:effectRef idx="2">
+            <a:schemeClr val="accent1"/>
+          </a:effectRef>
+          <a:fontRef idx="minor">
+            <a:schemeClr val="lt1"/>
+          </a:fontRef>
+        </p:style>
+        <p:txBody>
+          <a:bodyPr rtlCol="0" anchor="ctr" lIns="0" rIns="0" tIns="0" bIns="0"/>
+          <a:lstStyle/>
+          <a:p>
+            <a:pPr algn="ctr"/>
+            <a:r>
+              <a:rPr sz="1400" b="1">
+                <a:solidFill>
+                  <a:srgbClr val="202122"/>
+                </a:solidFill>
+                <a:latin typeface="Calibri"/>
+              </a:rPr>
+              <a:t>4</a:t>
+            </a:r>
+          </a:p>
+        </p:txBody>
+      </p:sp>
+      <p:sp>
+        <p:nvSpPr>
+          <p:cNvPr id="13" name="TextBox 12"/>
+          <p:cNvSpPr txBox="1"/>
+          <p:nvPr/>
+        </p:nvSpPr>
+        <p:spPr>
+          <a:xfrm>
+            <a:off x="1234440" y="5186933"/>
+            <a:ext cx="10408615" cy="1030986"/>
+          </a:xfrm>
+          <a:prstGeom prst="rect">
+            <a:avLst/>
+          </a:prstGeom>
+          <a:noFill/>
+        </p:spPr>
+        <p:txBody>
+          <a:bodyPr wrap="square" anchor="t" lIns="0" rIns="0" tIns="0" bIns="0"/>
+          <a:lstStyle/>
+          <a:p>
+            <a:pPr algn="l"/>
+            <a:r>
+              <a:rPr sz="2200" b="0" i="0">
+                <a:solidFill>
+                  <a:srgbClr val="202122"/>
+                </a:solidFill>
+                <a:latin typeface="Calibri"/>
+              </a:rPr>
+              <a:t>What is the purpose of a job description?</a:t>
+            </a:r>
+          </a:p>
+        </p:txBody>
+      </p:sp>
+    </p:spTree>
+  </p:cSld>
+  <p:clrMapOvr>
+    <a:masterClrMapping/>
+  </p:clrMapOvr>
+</p:sld>
+</file>
+
+<file path=ppt/slides/slide11.xml><?xml version="1.0" encoding="utf-8"?>
+<p:sld xmlns:a="http://schemas.openxmlformats.org/drawingml/2006/main" xmlns:p="http://schemas.openxmlformats.org/presentationml/2006/main" xmlns:r="http://schemas.openxmlformats.org/officeDocument/2006/relationships">
+  <p:cSld>
+    <p:bg>
+      <p:bgPr>
+        <a:solidFill>
+          <a:srgbClr val="FFFFFF"/>
+        </a:solidFill>
+        <a:effectLst/>
+      </p:bgPr>
+    </p:bg>
+    <p:spTree>
+      <p:nvGrpSpPr>
+        <p:cNvPr id="1" name=""/>
+        <p:cNvGrpSpPr/>
+        <p:nvPr/>
+      </p:nvGrpSpPr>
+      <p:grpSpPr/>
+      <p:sp>
+        <p:nvSpPr>
+          <p:cNvPr id="2" name="TextBox 1"/>
+          <p:cNvSpPr txBox="1"/>
+          <p:nvPr/>
+        </p:nvSpPr>
+        <p:spPr>
+          <a:xfrm>
+            <a:off x="548640" y="320040"/>
+            <a:ext cx="11094415" cy="274320"/>
+          </a:xfrm>
+          <a:prstGeom prst="rect">
+            <a:avLst/>
+          </a:prstGeom>
+          <a:noFill/>
+        </p:spPr>
+        <p:txBody>
+          <a:bodyPr wrap="square" anchor="t" lIns="0" rIns="0" tIns="0" bIns="0"/>
+          <a:lstStyle/>
+          <a:p>
+            <a:pPr algn="l"/>
+            <a:r>
+              <a:rPr sz="1100" b="1" i="0">
+                <a:solidFill>
+                  <a:srgbClr val="54595D"/>
+                </a:solidFill>
+                <a:latin typeface="Calibri"/>
+              </a:rPr>
+              <a:t>ENGINEERING CORE  ·  Core topic 14</a:t>
+            </a:r>
+          </a:p>
+        </p:txBody>
+      </p:sp>
+      <p:sp>
+        <p:nvSpPr>
+          <p:cNvPr id="3" name="TextBox 2"/>
+          <p:cNvSpPr txBox="1"/>
+          <p:nvPr/>
+        </p:nvSpPr>
+        <p:spPr>
+          <a:xfrm>
+            <a:off x="548640" y="566928"/>
+            <a:ext cx="11094415" cy="822960"/>
+          </a:xfrm>
+          <a:prstGeom prst="rect">
+            <a:avLst/>
+          </a:prstGeom>
+          <a:noFill/>
+        </p:spPr>
+        <p:txBody>
+          <a:bodyPr wrap="square" anchor="ctr" lIns="0" rIns="0" tIns="0" bIns="0"/>
+          <a:lstStyle/>
+          <a:p>
+            <a:pPr algn="l"/>
+            <a:r>
+              <a:rPr sz="3200" b="1" i="0">
+                <a:solidFill>
+                  <a:srgbClr val="03306E"/>
+                </a:solidFill>
+                <a:latin typeface="Cambria"/>
+              </a:rPr>
+              <a:t>Answers</a:t>
+            </a:r>
+          </a:p>
+        </p:txBody>
+      </p:sp>
+      <p:sp>
+        <p:nvSpPr>
+          <p:cNvPr id="4" name="TextBox 3"/>
+          <p:cNvSpPr txBox="1"/>
+          <p:nvPr/>
+        </p:nvSpPr>
+        <p:spPr>
+          <a:xfrm>
+            <a:off x="548640" y="6446520"/>
+            <a:ext cx="8229600" cy="274320"/>
+          </a:xfrm>
+          <a:prstGeom prst="rect">
+            <a:avLst/>
+          </a:prstGeom>
+          <a:noFill/>
+        </p:spPr>
+        <p:txBody>
+          <a:bodyPr wrap="square" anchor="t" lIns="0" rIns="0" tIns="0" bIns="0"/>
+          <a:lstStyle/>
+          <a:p>
+            <a:pPr algn="l"/>
+            <a:r>
+              <a:rPr sz="1000" b="0" i="0">
+                <a:solidFill>
+                  <a:srgbClr val="54595D"/>
+                </a:solidFill>
+                <a:latin typeface="Calibri"/>
+              </a:rPr>
+              <a:t>Design and Development for Engineering and Manufacturing T Level  ·  Professional Conduct, CPD and Human Factors</a:t>
+            </a:r>
+          </a:p>
+        </p:txBody>
+      </p:sp>
+      <p:sp>
+        <p:nvSpPr>
+          <p:cNvPr id="5" name="TextBox 4"/>
+          <p:cNvSpPr txBox="1"/>
+          <p:nvPr/>
+        </p:nvSpPr>
+        <p:spPr>
+          <a:xfrm>
+            <a:off x="10728655" y="6446520"/>
+            <a:ext cx="914400" cy="274320"/>
+          </a:xfrm>
+          <a:prstGeom prst="rect">
+            <a:avLst/>
+          </a:prstGeom>
+          <a:noFill/>
+        </p:spPr>
+        <p:txBody>
+          <a:bodyPr wrap="square" anchor="t" lIns="0" rIns="0" tIns="0" bIns="0"/>
+          <a:lstStyle/>
+          <a:p>
+            <a:pPr algn="r"/>
+            <a:r>
+              <a:rPr sz="1000" b="0" i="0">
+                <a:solidFill>
+                  <a:srgbClr val="54595D"/>
+                </a:solidFill>
+                <a:latin typeface="Calibri"/>
+              </a:rPr>
+              <a:t>11</a:t>
+            </a:r>
+          </a:p>
+        </p:txBody>
+      </p:sp>
+      <p:sp>
+        <p:nvSpPr>
+          <p:cNvPr id="6" name="Oval 5"/>
+          <p:cNvSpPr/>
+          <p:nvPr/>
+        </p:nvSpPr>
+        <p:spPr>
+          <a:xfrm>
+            <a:off x="548640" y="1618488"/>
+            <a:ext cx="411480" cy="411480"/>
+          </a:xfrm>
+          <a:prstGeom prst="ellipse">
+            <a:avLst/>
+          </a:prstGeom>
+          <a:solidFill>
+            <a:srgbClr val="F2B705"/>
+          </a:solidFill>
+          <a:ln>
+            <a:noFill/>
+          </a:ln>
+          <a:effectLst/>
+        </p:spPr>
+        <p:style>
+          <a:lnRef idx="1">
+            <a:schemeClr val="accent1"/>
+          </a:lnRef>
+          <a:fillRef idx="3">
+            <a:schemeClr val="accent1"/>
+          </a:fillRef>
+          <a:effectRef idx="2">
+            <a:schemeClr val="accent1"/>
+          </a:effectRef>
+          <a:fontRef idx="minor">
+            <a:schemeClr val="lt1"/>
+          </a:fontRef>
+        </p:style>
+        <p:txBody>
+          <a:bodyPr rtlCol="0" anchor="ctr" lIns="0" rIns="0" tIns="0" bIns="0"/>
+          <a:lstStyle/>
+          <a:p>
+            <a:pPr algn="ctr"/>
+            <a:r>
+              <a:rPr sz="1400" b="1">
+                <a:solidFill>
+                  <a:srgbClr val="202122"/>
+                </a:solidFill>
+                <a:latin typeface="Calibri"/>
+              </a:rPr>
+              <a:t>1</a:t>
+            </a:r>
+          </a:p>
+        </p:txBody>
+      </p:sp>
+      <p:sp>
+        <p:nvSpPr>
+          <p:cNvPr id="7" name="TextBox 6"/>
+          <p:cNvSpPr txBox="1"/>
+          <p:nvPr/>
+        </p:nvSpPr>
+        <p:spPr>
+          <a:xfrm>
+            <a:off x="1234440" y="1600200"/>
+            <a:ext cx="10408615" cy="1030986"/>
+          </a:xfrm>
+          <a:prstGeom prst="rect">
+            <a:avLst/>
+          </a:prstGeom>
+          <a:noFill/>
+        </p:spPr>
+        <p:txBody>
+          <a:bodyPr wrap="square" anchor="t" lIns="0" rIns="0" tIns="0" bIns="0"/>
+          <a:lstStyle/>
+          <a:p>
+            <a:pPr algn="l"/>
+            <a:r>
+              <a:rPr sz="1800" b="0" i="0">
+                <a:solidFill>
+                  <a:srgbClr val="54595D"/>
+                </a:solidFill>
+                <a:latin typeface="Calibri"/>
+              </a:rPr>
+              <a:t>What is CPD?</a:t>
+            </a:r>
+          </a:p>
+          <a:p>
+            <a:r>
+              <a:rPr sz="1800" b="1">
+                <a:solidFill>
+                  <a:srgbClr val="03306E"/>
+                </a:solidFill>
+                <a:latin typeface="Calibri"/>
+              </a:rPr>
+              <a:t>Continuous professional development: ongoing learning throughout a career.</a:t>
+            </a:r>
+          </a:p>
+        </p:txBody>
+      </p:sp>
+      <p:sp>
+        <p:nvSpPr>
+          <p:cNvPr id="8" name="Oval 7"/>
+          <p:cNvSpPr/>
+          <p:nvPr/>
+        </p:nvSpPr>
+        <p:spPr>
+          <a:xfrm>
+            <a:off x="548640" y="2814066"/>
+            <a:ext cx="411480" cy="411480"/>
+          </a:xfrm>
+          <a:prstGeom prst="ellipse">
+            <a:avLst/>
+          </a:prstGeom>
+          <a:solidFill>
+            <a:srgbClr val="F2B705"/>
+          </a:solidFill>
+          <a:ln>
+            <a:noFill/>
+          </a:ln>
+          <a:effectLst/>
+        </p:spPr>
+        <p:style>
+          <a:lnRef idx="1">
+            <a:schemeClr val="accent1"/>
+          </a:lnRef>
+          <a:fillRef idx="3">
+            <a:schemeClr val="accent1"/>
+          </a:fillRef>
+          <a:effectRef idx="2">
+            <a:schemeClr val="accent1"/>
+          </a:effectRef>
+          <a:fontRef idx="minor">
+            <a:schemeClr val="lt1"/>
+          </a:fontRef>
+        </p:style>
+        <p:txBody>
+          <a:bodyPr rtlCol="0" anchor="ctr" lIns="0" rIns="0" tIns="0" bIns="0"/>
+          <a:lstStyle/>
+          <a:p>
+            <a:pPr algn="ctr"/>
+            <a:r>
+              <a:rPr sz="1400" b="1">
+                <a:solidFill>
+                  <a:srgbClr val="202122"/>
+                </a:solidFill>
+                <a:latin typeface="Calibri"/>
+              </a:rPr>
+              <a:t>2</a:t>
+            </a:r>
+          </a:p>
+        </p:txBody>
+      </p:sp>
+      <p:sp>
+        <p:nvSpPr>
+          <p:cNvPr id="9" name="TextBox 8"/>
+          <p:cNvSpPr txBox="1"/>
+          <p:nvPr/>
+        </p:nvSpPr>
+        <p:spPr>
+          <a:xfrm>
+            <a:off x="1234440" y="2795778"/>
+            <a:ext cx="10408615" cy="1030986"/>
+          </a:xfrm>
+          <a:prstGeom prst="rect">
+            <a:avLst/>
+          </a:prstGeom>
+          <a:noFill/>
+        </p:spPr>
+        <p:txBody>
+          <a:bodyPr wrap="square" anchor="t" lIns="0" rIns="0" tIns="0" bIns="0"/>
+          <a:lstStyle/>
+          <a:p>
+            <a:pPr algn="l"/>
+            <a:r>
+              <a:rPr sz="1800" b="0" i="0">
+                <a:solidFill>
+                  <a:srgbClr val="54595D"/>
+                </a:solidFill>
+                <a:latin typeface="Calibri"/>
+              </a:rPr>
+              <a:t>Who sets professional standards for engineers in the UK?</a:t>
+            </a:r>
+          </a:p>
+          <a:p>
+            <a:r>
+              <a:rPr sz="1800" b="1">
+                <a:solidFill>
+                  <a:srgbClr val="03306E"/>
+                </a:solidFill>
+                <a:latin typeface="Calibri"/>
+              </a:rPr>
+              <a:t>The Engineering Council.</a:t>
+            </a:r>
+          </a:p>
+        </p:txBody>
+      </p:sp>
+      <p:sp>
+        <p:nvSpPr>
+          <p:cNvPr id="10" name="Oval 9"/>
+          <p:cNvSpPr/>
+          <p:nvPr/>
+        </p:nvSpPr>
+        <p:spPr>
+          <a:xfrm>
+            <a:off x="548640" y="4009644"/>
+            <a:ext cx="411480" cy="411480"/>
+          </a:xfrm>
+          <a:prstGeom prst="ellipse">
+            <a:avLst/>
+          </a:prstGeom>
+          <a:solidFill>
+            <a:srgbClr val="F2B705"/>
+          </a:solidFill>
+          <a:ln>
+            <a:noFill/>
+          </a:ln>
+          <a:effectLst/>
+        </p:spPr>
+        <p:style>
+          <a:lnRef idx="1">
+            <a:schemeClr val="accent1"/>
+          </a:lnRef>
+          <a:fillRef idx="3">
+            <a:schemeClr val="accent1"/>
+          </a:fillRef>
+          <a:effectRef idx="2">
+            <a:schemeClr val="accent1"/>
+          </a:effectRef>
+          <a:fontRef idx="minor">
+            <a:schemeClr val="lt1"/>
+          </a:fontRef>
+        </p:style>
+        <p:txBody>
+          <a:bodyPr rtlCol="0" anchor="ctr" lIns="0" rIns="0" tIns="0" bIns="0"/>
+          <a:lstStyle/>
+          <a:p>
+            <a:pPr algn="ctr"/>
+            <a:r>
+              <a:rPr sz="1400" b="1">
+                <a:solidFill>
+                  <a:srgbClr val="202122"/>
+                </a:solidFill>
+                <a:latin typeface="Calibri"/>
+              </a:rPr>
+              <a:t>3</a:t>
+            </a:r>
+          </a:p>
+        </p:txBody>
+      </p:sp>
+      <p:sp>
+        <p:nvSpPr>
+          <p:cNvPr id="11" name="TextBox 10"/>
+          <p:cNvSpPr txBox="1"/>
+          <p:nvPr/>
+        </p:nvSpPr>
+        <p:spPr>
+          <a:xfrm>
+            <a:off x="1234440" y="3991356"/>
+            <a:ext cx="10408615" cy="1030986"/>
+          </a:xfrm>
+          <a:prstGeom prst="rect">
+            <a:avLst/>
+          </a:prstGeom>
+          <a:noFill/>
+        </p:spPr>
+        <p:txBody>
+          <a:bodyPr wrap="square" anchor="t" lIns="0" rIns="0" tIns="0" bIns="0"/>
+          <a:lstStyle/>
+          <a:p>
+            <a:pPr algn="l"/>
+            <a:r>
+              <a:rPr sz="1800" b="0" i="0">
+                <a:solidFill>
+                  <a:srgbClr val="54595D"/>
+                </a:solidFill>
+                <a:latin typeface="Calibri"/>
+              </a:rPr>
+              <a:t>Name two causes of human error.</a:t>
+            </a:r>
+          </a:p>
+          <a:p>
+            <a:r>
+              <a:rPr sz="1800" b="1">
+                <a:solidFill>
+                  <a:srgbClr val="03306E"/>
+                </a:solidFill>
+                <a:latin typeface="Calibri"/>
+              </a:rPr>
+              <a:t>Any two of: insufficient training, fatigue, workload, stress.</a:t>
+            </a:r>
+          </a:p>
+        </p:txBody>
+      </p:sp>
+      <p:sp>
+        <p:nvSpPr>
+          <p:cNvPr id="12" name="Oval 11"/>
+          <p:cNvSpPr/>
+          <p:nvPr/>
+        </p:nvSpPr>
+        <p:spPr>
+          <a:xfrm>
+            <a:off x="548640" y="5205221"/>
+            <a:ext cx="411480" cy="411480"/>
+          </a:xfrm>
+          <a:prstGeom prst="ellipse">
+            <a:avLst/>
+          </a:prstGeom>
+          <a:solidFill>
+            <a:srgbClr val="F2B705"/>
+          </a:solidFill>
+          <a:ln>
+            <a:noFill/>
+          </a:ln>
+          <a:effectLst/>
+        </p:spPr>
+        <p:style>
+          <a:lnRef idx="1">
+            <a:schemeClr val="accent1"/>
+          </a:lnRef>
+          <a:fillRef idx="3">
+            <a:schemeClr val="accent1"/>
+          </a:fillRef>
+          <a:effectRef idx="2">
+            <a:schemeClr val="accent1"/>
+          </a:effectRef>
+          <a:fontRef idx="minor">
+            <a:schemeClr val="lt1"/>
+          </a:fontRef>
+        </p:style>
+        <p:txBody>
+          <a:bodyPr rtlCol="0" anchor="ctr" lIns="0" rIns="0" tIns="0" bIns="0"/>
+          <a:lstStyle/>
+          <a:p>
+            <a:pPr algn="ctr"/>
+            <a:r>
+              <a:rPr sz="1400" b="1">
+                <a:solidFill>
+                  <a:srgbClr val="202122"/>
+                </a:solidFill>
+                <a:latin typeface="Calibri"/>
+              </a:rPr>
+              <a:t>4</a:t>
+            </a:r>
+          </a:p>
+        </p:txBody>
+      </p:sp>
+      <p:sp>
+        <p:nvSpPr>
+          <p:cNvPr id="13" name="TextBox 12"/>
+          <p:cNvSpPr txBox="1"/>
+          <p:nvPr/>
+        </p:nvSpPr>
+        <p:spPr>
+          <a:xfrm>
+            <a:off x="1234440" y="5186933"/>
+            <a:ext cx="10408615" cy="1030986"/>
+          </a:xfrm>
+          <a:prstGeom prst="rect">
+            <a:avLst/>
+          </a:prstGeom>
+          <a:noFill/>
+        </p:spPr>
+        <p:txBody>
+          <a:bodyPr wrap="square" anchor="t" lIns="0" rIns="0" tIns="0" bIns="0"/>
+          <a:lstStyle/>
+          <a:p>
+            <a:pPr algn="l"/>
+            <a:r>
+              <a:rPr sz="1800" b="0" i="0">
+                <a:solidFill>
+                  <a:srgbClr val="54595D"/>
+                </a:solidFill>
+                <a:latin typeface="Calibri"/>
+              </a:rPr>
+              <a:t>What is the purpose of a job description?</a:t>
+            </a:r>
+          </a:p>
+          <a:p>
+            <a:r>
+              <a:rPr sz="1800" b="1">
+                <a:solidFill>
+                  <a:srgbClr val="03306E"/>
+                </a:solidFill>
+                <a:latin typeface="Calibri"/>
+              </a:rPr>
+              <a:t>To set out the role's duties and responsibilities.</a:t>
+            </a:r>
+          </a:p>
+        </p:txBody>
+      </p:sp>
+    </p:spTree>
+  </p:cSld>
+  <p:clrMapOvr>
+    <a:masterClrMapping/>
+  </p:clrMapOvr>
+</p:sld>
+</file>
+
+<file path=ppt/slides/slide12.xml><?xml version="1.0" encoding="utf-8"?>
+<p:sld xmlns:a="http://schemas.openxmlformats.org/drawingml/2006/main" xmlns:p="http://schemas.openxmlformats.org/presentationml/2006/main" xmlns:r="http://schemas.openxmlformats.org/officeDocument/2006/relationships">
+  <p:cSld>
+    <p:bg>
+      <p:bgPr>
+        <a:solidFill>
+          <a:srgbClr val="FFFFFF"/>
+        </a:solidFill>
+        <a:effectLst/>
+      </p:bgPr>
+    </p:bg>
+    <p:spTree>
+      <p:nvGrpSpPr>
+        <p:cNvPr id="1" name=""/>
+        <p:cNvGrpSpPr/>
+        <p:nvPr/>
+      </p:nvGrpSpPr>
+      <p:grpSpPr/>
+      <p:sp>
+        <p:nvSpPr>
+          <p:cNvPr id="2" name="TextBox 1"/>
+          <p:cNvSpPr txBox="1"/>
+          <p:nvPr/>
+        </p:nvSpPr>
+        <p:spPr>
+          <a:xfrm>
+            <a:off x="548640" y="320040"/>
+            <a:ext cx="11094415" cy="274320"/>
+          </a:xfrm>
+          <a:prstGeom prst="rect">
+            <a:avLst/>
+          </a:prstGeom>
+          <a:noFill/>
+        </p:spPr>
+        <p:txBody>
+          <a:bodyPr wrap="square" anchor="t" lIns="0" rIns="0" tIns="0" bIns="0"/>
+          <a:lstStyle/>
+          <a:p>
+            <a:pPr algn="l"/>
+            <a:r>
+              <a:rPr sz="1100" b="1" i="0">
+                <a:solidFill>
+                  <a:srgbClr val="54595D"/>
+                </a:solidFill>
+                <a:latin typeface="Calibri"/>
+              </a:rPr>
+              <a:t>ENGINEERING CORE  ·  Core topic 14</a:t>
+            </a:r>
+          </a:p>
+        </p:txBody>
+      </p:sp>
+      <p:sp>
+        <p:nvSpPr>
+          <p:cNvPr id="3" name="TextBox 2"/>
+          <p:cNvSpPr txBox="1"/>
+          <p:nvPr/>
+        </p:nvSpPr>
+        <p:spPr>
+          <a:xfrm>
+            <a:off x="548640" y="566928"/>
+            <a:ext cx="11094415" cy="822960"/>
+          </a:xfrm>
+          <a:prstGeom prst="rect">
+            <a:avLst/>
+          </a:prstGeom>
+          <a:noFill/>
+        </p:spPr>
+        <p:txBody>
+          <a:bodyPr wrap="square" anchor="ctr" lIns="0" rIns="0" tIns="0" bIns="0"/>
+          <a:lstStyle/>
+          <a:p>
+            <a:pPr algn="l"/>
+            <a:r>
+              <a:rPr sz="3200" b="1" i="0">
+                <a:solidFill>
+                  <a:srgbClr val="03306E"/>
+                </a:solidFill>
+                <a:latin typeface="Cambria"/>
+              </a:rPr>
+              <a:t>Activity: Error-proof the job</a:t>
+            </a:r>
+          </a:p>
+        </p:txBody>
+      </p:sp>
+      <p:sp>
+        <p:nvSpPr>
+          <p:cNvPr id="4" name="TextBox 3"/>
+          <p:cNvSpPr txBox="1"/>
+          <p:nvPr/>
+        </p:nvSpPr>
+        <p:spPr>
+          <a:xfrm>
+            <a:off x="548640" y="6446520"/>
+            <a:ext cx="8229600" cy="274320"/>
+          </a:xfrm>
+          <a:prstGeom prst="rect">
+            <a:avLst/>
+          </a:prstGeom>
+          <a:noFill/>
+        </p:spPr>
+        <p:txBody>
+          <a:bodyPr wrap="square" anchor="t" lIns="0" rIns="0" tIns="0" bIns="0"/>
+          <a:lstStyle/>
+          <a:p>
+            <a:pPr algn="l"/>
+            <a:r>
+              <a:rPr sz="1000" b="0" i="0">
+                <a:solidFill>
+                  <a:srgbClr val="54595D"/>
+                </a:solidFill>
+                <a:latin typeface="Calibri"/>
+              </a:rPr>
+              <a:t>Design and Development for Engineering and Manufacturing T Level  ·  Professional Conduct, CPD and Human Factors</a:t>
+            </a:r>
+          </a:p>
+        </p:txBody>
+      </p:sp>
+      <p:sp>
+        <p:nvSpPr>
+          <p:cNvPr id="5" name="TextBox 4"/>
+          <p:cNvSpPr txBox="1"/>
+          <p:nvPr/>
+        </p:nvSpPr>
+        <p:spPr>
+          <a:xfrm>
+            <a:off x="10728655" y="6446520"/>
+            <a:ext cx="914400" cy="274320"/>
+          </a:xfrm>
+          <a:prstGeom prst="rect">
+            <a:avLst/>
+          </a:prstGeom>
+          <a:noFill/>
+        </p:spPr>
+        <p:txBody>
+          <a:bodyPr wrap="square" anchor="t" lIns="0" rIns="0" tIns="0" bIns="0"/>
+          <a:lstStyle/>
+          <a:p>
+            <a:pPr algn="r"/>
+            <a:r>
+              <a:rPr sz="1000" b="0" i="0">
+                <a:solidFill>
+                  <a:srgbClr val="54595D"/>
+                </a:solidFill>
+                <a:latin typeface="Calibri"/>
+              </a:rPr>
+              <a:t>12</a:t>
+            </a:r>
+          </a:p>
+        </p:txBody>
+      </p:sp>
+      <p:sp>
+        <p:nvSpPr>
+          <p:cNvPr id="6" name="Rounded Rectangle 5"/>
+          <p:cNvSpPr/>
+          <p:nvPr/>
+        </p:nvSpPr>
+        <p:spPr>
+          <a:xfrm>
+            <a:off x="548640" y="1508760"/>
+            <a:ext cx="2011680" cy="457200"/>
+          </a:xfrm>
+          <a:prstGeom prst="roundRect">
+            <a:avLst>
+              <a:gd name="adj" fmla="val 50000"/>
+            </a:avLst>
+          </a:prstGeom>
+          <a:solidFill>
+            <a:srgbClr val="F2B705"/>
+          </a:solidFill>
+          <a:ln>
+            <a:noFill/>
+          </a:ln>
+          <a:effectLst/>
+        </p:spPr>
+        <p:style>
+          <a:lnRef idx="1">
+            <a:schemeClr val="accent1"/>
+          </a:lnRef>
+          <a:fillRef idx="3">
+            <a:schemeClr val="accent1"/>
+          </a:fillRef>
+          <a:effectRef idx="2">
+            <a:schemeClr val="accent1"/>
+          </a:effectRef>
+          <a:fontRef idx="minor">
+            <a:schemeClr val="lt1"/>
+          </a:fontRef>
+        </p:style>
+        <p:txBody>
+          <a:bodyPr rtlCol="0" anchor="ctr"/>
+          <a:lstStyle/>
+          <a:p/>
+        </p:txBody>
+      </p:sp>
+      <p:sp>
+        <p:nvSpPr>
+          <p:cNvPr id="7" name="TextBox 6"/>
+          <p:cNvSpPr txBox="1"/>
+          <p:nvPr/>
+        </p:nvSpPr>
+        <p:spPr>
+          <a:xfrm>
+            <a:off x="548640" y="1508760"/>
+            <a:ext cx="2011680" cy="457200"/>
+          </a:xfrm>
+          <a:prstGeom prst="rect">
+            <a:avLst/>
+          </a:prstGeom>
+          <a:noFill/>
+        </p:spPr>
+        <p:txBody>
+          <a:bodyPr wrap="square" anchor="ctr" lIns="0" rIns="0" tIns="0" bIns="0"/>
+          <a:lstStyle/>
+          <a:p>
+            <a:pPr algn="ctr"/>
+            <a:r>
+              <a:rPr sz="1400" b="1" i="0">
+                <a:solidFill>
+                  <a:srgbClr val="202122"/>
+                </a:solidFill>
+                <a:latin typeface="Calibri"/>
+              </a:rPr>
+              <a:t>25 minutes</a:t>
+            </a:r>
+          </a:p>
+        </p:txBody>
+      </p:sp>
+      <p:sp>
+        <p:nvSpPr>
+          <p:cNvPr id="8" name="TextBox 7"/>
+          <p:cNvSpPr txBox="1"/>
+          <p:nvPr/>
+        </p:nvSpPr>
+        <p:spPr>
+          <a:xfrm>
+            <a:off x="2743200" y="1508760"/>
+            <a:ext cx="4754880" cy="457200"/>
+          </a:xfrm>
+          <a:prstGeom prst="rect">
+            <a:avLst/>
+          </a:prstGeom>
+          <a:noFill/>
+        </p:spPr>
+        <p:txBody>
+          <a:bodyPr wrap="square" anchor="ctr" lIns="0" rIns="0" tIns="0" bIns="0"/>
+          <a:lstStyle/>
+          <a:p>
+            <a:pPr algn="l"/>
+            <a:r>
+              <a:rPr sz="1400" b="0" i="1">
+                <a:solidFill>
+                  <a:srgbClr val="54595D"/>
+                </a:solidFill>
+                <a:latin typeface="Calibri"/>
+              </a:rPr>
+              <a:t>Small groups</a:t>
+            </a:r>
+          </a:p>
+        </p:txBody>
+      </p:sp>
+      <p:sp>
+        <p:nvSpPr>
+          <p:cNvPr id="9" name="Oval 8"/>
+          <p:cNvSpPr/>
+          <p:nvPr/>
+        </p:nvSpPr>
+        <p:spPr>
+          <a:xfrm>
+            <a:off x="548640" y="2482596"/>
+            <a:ext cx="384048" cy="384048"/>
+          </a:xfrm>
+          <a:prstGeom prst="ellipse">
+            <a:avLst/>
+          </a:prstGeom>
+          <a:solidFill>
+            <a:srgbClr val="0645AD"/>
+          </a:solidFill>
+          <a:ln>
+            <a:noFill/>
+          </a:ln>
+          <a:effectLst/>
+        </p:spPr>
+        <p:style>
+          <a:lnRef idx="1">
+            <a:schemeClr val="accent1"/>
+          </a:lnRef>
+          <a:fillRef idx="3">
+            <a:schemeClr val="accent1"/>
+          </a:fillRef>
+          <a:effectRef idx="2">
+            <a:schemeClr val="accent1"/>
+          </a:effectRef>
+          <a:fontRef idx="minor">
+            <a:schemeClr val="lt1"/>
+          </a:fontRef>
+        </p:style>
+        <p:txBody>
+          <a:bodyPr rtlCol="0" anchor="ctr" lIns="0" rIns="0" tIns="0" bIns="0"/>
+          <a:lstStyle/>
+          <a:p>
+            <a:pPr algn="ctr"/>
+            <a:r>
+              <a:rPr sz="1300" b="1">
+                <a:solidFill>
+                  <a:srgbClr val="FFFFFF"/>
+                </a:solidFill>
+                <a:latin typeface="Calibri"/>
+              </a:rPr>
+              <a:t>1</a:t>
+            </a:r>
+          </a:p>
+        </p:txBody>
+      </p:sp>
+      <p:sp>
+        <p:nvSpPr>
+          <p:cNvPr id="10" name="TextBox 9"/>
+          <p:cNvSpPr txBox="1"/>
+          <p:nvPr/>
+        </p:nvSpPr>
+        <p:spPr>
+          <a:xfrm>
+            <a:off x="1143000" y="2240280"/>
+            <a:ext cx="5943600" cy="868680"/>
+          </a:xfrm>
+          <a:prstGeom prst="rect">
+            <a:avLst/>
+          </a:prstGeom>
+          <a:noFill/>
+        </p:spPr>
+        <p:txBody>
+          <a:bodyPr wrap="square" anchor="ctr" lIns="0" rIns="0" tIns="0" bIns="0"/>
+          <a:lstStyle/>
+          <a:p>
+            <a:pPr algn="l"/>
+            <a:r>
+              <a:rPr sz="1700" b="0" i="0">
+                <a:solidFill>
+                  <a:srgbClr val="202122"/>
+                </a:solidFill>
+                <a:latin typeface="Calibri"/>
+              </a:rPr>
+              <a:t>Read the incident report from your teacher.</a:t>
+            </a:r>
+          </a:p>
+        </p:txBody>
+      </p:sp>
+      <p:sp>
+        <p:nvSpPr>
+          <p:cNvPr id="11" name="Oval 10"/>
+          <p:cNvSpPr/>
+          <p:nvPr/>
+        </p:nvSpPr>
+        <p:spPr>
+          <a:xfrm>
+            <a:off x="548640" y="3461004"/>
+            <a:ext cx="384048" cy="384048"/>
+          </a:xfrm>
+          <a:prstGeom prst="ellipse">
+            <a:avLst/>
+          </a:prstGeom>
+          <a:solidFill>
+            <a:srgbClr val="0645AD"/>
+          </a:solidFill>
+          <a:ln>
+            <a:noFill/>
+          </a:ln>
+          <a:effectLst/>
+        </p:spPr>
+        <p:style>
+          <a:lnRef idx="1">
+            <a:schemeClr val="accent1"/>
+          </a:lnRef>
+          <a:fillRef idx="3">
+            <a:schemeClr val="accent1"/>
+          </a:fillRef>
+          <a:effectRef idx="2">
+            <a:schemeClr val="accent1"/>
+          </a:effectRef>
+          <a:fontRef idx="minor">
+            <a:schemeClr val="lt1"/>
+          </a:fontRef>
+        </p:style>
+        <p:txBody>
+          <a:bodyPr rtlCol="0" anchor="ctr" lIns="0" rIns="0" tIns="0" bIns="0"/>
+          <a:lstStyle/>
+          <a:p>
+            <a:pPr algn="ctr"/>
+            <a:r>
+              <a:rPr sz="1300" b="1">
+                <a:solidFill>
+                  <a:srgbClr val="FFFFFF"/>
+                </a:solidFill>
+                <a:latin typeface="Calibri"/>
+              </a:rPr>
+              <a:t>2</a:t>
+            </a:r>
+          </a:p>
+        </p:txBody>
+      </p:sp>
+      <p:sp>
+        <p:nvSpPr>
+          <p:cNvPr id="12" name="TextBox 11"/>
+          <p:cNvSpPr txBox="1"/>
+          <p:nvPr/>
+        </p:nvSpPr>
+        <p:spPr>
+          <a:xfrm>
+            <a:off x="1143000" y="3218688"/>
+            <a:ext cx="5943600" cy="868680"/>
+          </a:xfrm>
+          <a:prstGeom prst="rect">
+            <a:avLst/>
+          </a:prstGeom>
+          <a:noFill/>
+        </p:spPr>
+        <p:txBody>
+          <a:bodyPr wrap="square" anchor="ctr" lIns="0" rIns="0" tIns="0" bIns="0"/>
+          <a:lstStyle/>
+          <a:p>
+            <a:pPr algn="l"/>
+            <a:r>
+              <a:rPr sz="1700" b="0" i="0">
+                <a:solidFill>
+                  <a:srgbClr val="202122"/>
+                </a:solidFill>
+                <a:latin typeface="Calibri"/>
+              </a:rPr>
+              <a:t>Identify the human factors involved.</a:t>
+            </a:r>
+          </a:p>
+        </p:txBody>
+      </p:sp>
+      <p:sp>
+        <p:nvSpPr>
+          <p:cNvPr id="13" name="Oval 12"/>
+          <p:cNvSpPr/>
+          <p:nvPr/>
+        </p:nvSpPr>
+        <p:spPr>
+          <a:xfrm>
+            <a:off x="548640" y="4439412"/>
+            <a:ext cx="384048" cy="384048"/>
+          </a:xfrm>
+          <a:prstGeom prst="ellipse">
+            <a:avLst/>
+          </a:prstGeom>
+          <a:solidFill>
+            <a:srgbClr val="0645AD"/>
+          </a:solidFill>
+          <a:ln>
+            <a:noFill/>
+          </a:ln>
+          <a:effectLst/>
+        </p:spPr>
+        <p:style>
+          <a:lnRef idx="1">
+            <a:schemeClr val="accent1"/>
+          </a:lnRef>
+          <a:fillRef idx="3">
+            <a:schemeClr val="accent1"/>
+          </a:fillRef>
+          <a:effectRef idx="2">
+            <a:schemeClr val="accent1"/>
+          </a:effectRef>
+          <a:fontRef idx="minor">
+            <a:schemeClr val="lt1"/>
+          </a:fontRef>
+        </p:style>
+        <p:txBody>
+          <a:bodyPr rtlCol="0" anchor="ctr" lIns="0" rIns="0" tIns="0" bIns="0"/>
+          <a:lstStyle/>
+          <a:p>
+            <a:pPr algn="ctr"/>
+            <a:r>
+              <a:rPr sz="1300" b="1">
+                <a:solidFill>
+                  <a:srgbClr val="FFFFFF"/>
+                </a:solidFill>
+                <a:latin typeface="Calibri"/>
+              </a:rPr>
+              <a:t>3</a:t>
+            </a:r>
+          </a:p>
+        </p:txBody>
+      </p:sp>
+      <p:sp>
+        <p:nvSpPr>
+          <p:cNvPr id="14" name="TextBox 13"/>
+          <p:cNvSpPr txBox="1"/>
+          <p:nvPr/>
+        </p:nvSpPr>
+        <p:spPr>
+          <a:xfrm>
+            <a:off x="1143000" y="4197096"/>
+            <a:ext cx="5943600" cy="868680"/>
+          </a:xfrm>
+          <a:prstGeom prst="rect">
+            <a:avLst/>
+          </a:prstGeom>
+          <a:noFill/>
+        </p:spPr>
+        <p:txBody>
+          <a:bodyPr wrap="square" anchor="ctr" lIns="0" rIns="0" tIns="0" bIns="0"/>
+          <a:lstStyle/>
+          <a:p>
+            <a:pPr algn="l"/>
+            <a:r>
+              <a:rPr sz="1700" b="0" i="0">
+                <a:solidFill>
+                  <a:srgbClr val="202122"/>
+                </a:solidFill>
+                <a:latin typeface="Calibri"/>
+              </a:rPr>
+              <a:t>Suggest changes to design, training and procedures.</a:t>
+            </a:r>
+          </a:p>
+        </p:txBody>
+      </p:sp>
+      <p:sp>
+        <p:nvSpPr>
+          <p:cNvPr id="15" name="Oval 14"/>
+          <p:cNvSpPr/>
+          <p:nvPr/>
+        </p:nvSpPr>
+        <p:spPr>
+          <a:xfrm>
+            <a:off x="548640" y="5417820"/>
+            <a:ext cx="384048" cy="384048"/>
+          </a:xfrm>
+          <a:prstGeom prst="ellipse">
+            <a:avLst/>
+          </a:prstGeom>
+          <a:solidFill>
+            <a:srgbClr val="0645AD"/>
+          </a:solidFill>
+          <a:ln>
+            <a:noFill/>
+          </a:ln>
+          <a:effectLst/>
+        </p:spPr>
+        <p:style>
+          <a:lnRef idx="1">
+            <a:schemeClr val="accent1"/>
+          </a:lnRef>
+          <a:fillRef idx="3">
+            <a:schemeClr val="accent1"/>
+          </a:fillRef>
+          <a:effectRef idx="2">
+            <a:schemeClr val="accent1"/>
+          </a:effectRef>
+          <a:fontRef idx="minor">
+            <a:schemeClr val="lt1"/>
+          </a:fontRef>
+        </p:style>
+        <p:txBody>
+          <a:bodyPr rtlCol="0" anchor="ctr" lIns="0" rIns="0" tIns="0" bIns="0"/>
+          <a:lstStyle/>
+          <a:p>
+            <a:pPr algn="ctr"/>
+            <a:r>
+              <a:rPr sz="1300" b="1">
+                <a:solidFill>
+                  <a:srgbClr val="FFFFFF"/>
+                </a:solidFill>
+                <a:latin typeface="Calibri"/>
+              </a:rPr>
+              <a:t>4</a:t>
+            </a:r>
+          </a:p>
+        </p:txBody>
+      </p:sp>
+      <p:sp>
+        <p:nvSpPr>
+          <p:cNvPr id="16" name="TextBox 15"/>
+          <p:cNvSpPr txBox="1"/>
+          <p:nvPr/>
+        </p:nvSpPr>
+        <p:spPr>
+          <a:xfrm>
+            <a:off x="1143000" y="5175504"/>
+            <a:ext cx="5943600" cy="868680"/>
+          </a:xfrm>
+          <a:prstGeom prst="rect">
+            <a:avLst/>
+          </a:prstGeom>
+          <a:noFill/>
+        </p:spPr>
+        <p:txBody>
+          <a:bodyPr wrap="square" anchor="ctr" lIns="0" rIns="0" tIns="0" bIns="0"/>
+          <a:lstStyle/>
+          <a:p>
+            <a:pPr algn="l"/>
+            <a:r>
+              <a:rPr sz="1700" b="0" i="0">
+                <a:solidFill>
+                  <a:srgbClr val="202122"/>
+                </a:solidFill>
+                <a:latin typeface="Calibri"/>
+              </a:rPr>
+              <a:t>Rank them by how well they prevent a repeat.</a:t>
+            </a:r>
+          </a:p>
+        </p:txBody>
+      </p:sp>
+      <p:sp>
+        <p:nvSpPr>
+          <p:cNvPr id="17" name="Rounded Rectangle 16"/>
+          <p:cNvSpPr/>
+          <p:nvPr/>
+        </p:nvSpPr>
+        <p:spPr>
+          <a:xfrm>
+            <a:off x="7772400" y="1508760"/>
+            <a:ext cx="3867912" cy="4572000"/>
+          </a:xfrm>
+          <a:prstGeom prst="roundRect">
+            <a:avLst>
+              <a:gd name="adj" fmla="val 8000"/>
+            </a:avLst>
+          </a:prstGeom>
+          <a:solidFill>
+            <a:srgbClr val="EAF3FF"/>
+          </a:solidFill>
+          <a:ln>
+            <a:noFill/>
+          </a:ln>
+          <a:effectLst/>
+        </p:spPr>
+        <p:style>
+          <a:lnRef idx="1">
+            <a:schemeClr val="accent1"/>
+          </a:lnRef>
+          <a:fillRef idx="3">
+            <a:schemeClr val="accent1"/>
+          </a:fillRef>
+          <a:effectRef idx="2">
+            <a:schemeClr val="accent1"/>
+          </a:effectRef>
+          <a:fontRef idx="minor">
+            <a:schemeClr val="lt1"/>
+          </a:fontRef>
+        </p:style>
+        <p:txBody>
+          <a:bodyPr rtlCol="0" anchor="ctr"/>
+          <a:lstStyle/>
+          <a:p/>
+        </p:txBody>
+      </p:sp>
+      <p:sp>
+        <p:nvSpPr>
+          <p:cNvPr id="18" name="TextBox 17"/>
+          <p:cNvSpPr txBox="1"/>
+          <p:nvPr/>
+        </p:nvSpPr>
+        <p:spPr>
+          <a:xfrm>
+            <a:off x="8046720" y="1737360"/>
+            <a:ext cx="3291840" cy="365760"/>
+          </a:xfrm>
+          <a:prstGeom prst="rect">
+            <a:avLst/>
+          </a:prstGeom>
+          <a:noFill/>
+        </p:spPr>
+        <p:txBody>
+          <a:bodyPr wrap="square" anchor="t" lIns="0" rIns="0" tIns="0" bIns="0"/>
+          <a:lstStyle/>
+          <a:p>
+            <a:pPr algn="l"/>
+            <a:r>
+              <a:rPr sz="1300" b="1" i="0">
+                <a:solidFill>
+                  <a:srgbClr val="0645AD"/>
+                </a:solidFill>
+                <a:latin typeface="Calibri"/>
+              </a:rPr>
+              <a:t>SUCCESS CRITERIA</a:t>
+            </a:r>
+          </a:p>
+        </p:txBody>
+      </p:sp>
+      <p:sp>
+        <p:nvSpPr>
+          <p:cNvPr id="19" name="TextBox 18"/>
+          <p:cNvSpPr txBox="1"/>
+          <p:nvPr/>
+        </p:nvSpPr>
+        <p:spPr>
+          <a:xfrm>
+            <a:off x="8046720" y="2240280"/>
+            <a:ext cx="3337560" cy="3657600"/>
+          </a:xfrm>
+          <a:prstGeom prst="rect">
+            <a:avLst/>
+          </a:prstGeom>
+          <a:noFill/>
+        </p:spPr>
+        <p:txBody>
+          <a:bodyPr wrap="square" lIns="0" rIns="0" tIns="0" bIns="0">
+            <a:spAutoFit/>
+          </a:bodyPr>
+          <a:lstStyle/>
+          <a:p>
+            <a:pPr marL="274320" indent="-274320">
+              <a:spcAft>
+                <a:spcPts val="810"/>
+              </a:spcAft>
+              <a:buClr>
+                <a:srgbClr val="0645AD"/>
+              </a:buClr>
+              <a:buFont typeface="Arial"/>
+              <a:buChar char="•"/>
+            </a:pPr>
+            <a:r>
+              <a:rPr sz="1800" b="0">
+                <a:solidFill>
+                  <a:srgbClr val="202122"/>
+                </a:solidFill>
+                <a:latin typeface="Calibri"/>
+              </a:rPr>
+              <a:t>Human factors named correctly</a:t>
+            </a:r>
+          </a:p>
+          <a:p>
+            <a:pPr marL="274320" indent="-274320">
+              <a:spcAft>
+                <a:spcPts val="810"/>
+              </a:spcAft>
+              <a:buClr>
+                <a:srgbClr val="0645AD"/>
+              </a:buClr>
+              <a:buFont typeface="Arial"/>
+              <a:buChar char="•"/>
+            </a:pPr>
+            <a:r>
+              <a:rPr sz="1800" b="0">
+                <a:solidFill>
+                  <a:srgbClr val="202122"/>
+                </a:solidFill>
+                <a:latin typeface="Calibri"/>
+              </a:rPr>
+              <a:t>Solutions go beyond blaming the worker</a:t>
+            </a:r>
+          </a:p>
+          <a:p>
+            <a:pPr marL="274320" indent="-274320">
+              <a:spcAft>
+                <a:spcPts val="810"/>
+              </a:spcAft>
+              <a:buClr>
+                <a:srgbClr val="0645AD"/>
+              </a:buClr>
+              <a:buFont typeface="Arial"/>
+              <a:buChar char="•"/>
+            </a:pPr>
+            <a:r>
+              <a:rPr sz="1800" b="0">
+                <a:solidFill>
+                  <a:srgbClr val="202122"/>
+                </a:solidFill>
+                <a:latin typeface="Calibri"/>
+              </a:rPr>
+              <a:t>Ranking justified</a:t>
+            </a:r>
+          </a:p>
+        </p:txBody>
+      </p:sp>
+    </p:spTree>
+  </p:cSld>
+  <p:clrMapOvr>
+    <a:masterClrMapping/>
+  </p:clrMapOvr>
+</p:sld>
+</file>
+
+<file path=ppt/slides/slide13.xml><?xml version="1.0" encoding="utf-8"?>
+<p:sld xmlns:a="http://schemas.openxmlformats.org/drawingml/2006/main" xmlns:p="http://schemas.openxmlformats.org/presentationml/2006/main" xmlns:r="http://schemas.openxmlformats.org/officeDocument/2006/relationships">
+  <p:cSld>
+    <p:bg>
+      <p:bgPr>
+        <a:solidFill>
+          <a:srgbClr val="03306E"/>
+        </a:solidFill>
+        <a:effectLst/>
+      </p:bgPr>
+    </p:bg>
+    <p:spTree>
+      <p:nvGrpSpPr>
+        <p:cNvPr id="1" name=""/>
+        <p:cNvGrpSpPr/>
+        <p:nvPr/>
+      </p:nvGrpSpPr>
+      <p:grpSpPr/>
+      <p:sp>
+        <p:nvSpPr>
+          <p:cNvPr id="2" name="TextBox 1"/>
+          <p:cNvSpPr txBox="1"/>
+          <p:nvPr/>
+        </p:nvSpPr>
+        <p:spPr>
+          <a:xfrm>
+            <a:off x="548640" y="320040"/>
+            <a:ext cx="11094415" cy="274320"/>
+          </a:xfrm>
+          <a:prstGeom prst="rect">
+            <a:avLst/>
+          </a:prstGeom>
+          <a:noFill/>
+        </p:spPr>
+        <p:txBody>
+          <a:bodyPr wrap="square" anchor="t" lIns="0" rIns="0" tIns="0" bIns="0"/>
+          <a:lstStyle/>
+          <a:p>
+            <a:pPr algn="l"/>
+            <a:r>
+              <a:rPr sz="1100" b="1" i="0">
+                <a:solidFill>
+                  <a:srgbClr val="A9C8F0"/>
+                </a:solidFill>
+                <a:latin typeface="Calibri"/>
+              </a:rPr>
+              <a:t>ENGINEERING CORE  ·  Core topic 14</a:t>
+            </a:r>
+          </a:p>
+        </p:txBody>
+      </p:sp>
+      <p:sp>
+        <p:nvSpPr>
+          <p:cNvPr id="3" name="TextBox 2"/>
+          <p:cNvSpPr txBox="1"/>
+          <p:nvPr/>
+        </p:nvSpPr>
+        <p:spPr>
+          <a:xfrm>
+            <a:off x="548640" y="566928"/>
+            <a:ext cx="11094415" cy="822960"/>
+          </a:xfrm>
+          <a:prstGeom prst="rect">
+            <a:avLst/>
+          </a:prstGeom>
+          <a:noFill/>
+        </p:spPr>
+        <p:txBody>
+          <a:bodyPr wrap="square" anchor="ctr" lIns="0" rIns="0" tIns="0" bIns="0"/>
+          <a:lstStyle/>
+          <a:p>
+            <a:pPr algn="l"/>
+            <a:r>
+              <a:rPr sz="3200" b="1" i="0">
+                <a:solidFill>
+                  <a:srgbClr val="FFFFFF"/>
+                </a:solidFill>
+                <a:latin typeface="Cambria"/>
+              </a:rPr>
+              <a:t>Exit ticket</a:t>
+            </a:r>
+          </a:p>
+        </p:txBody>
+      </p:sp>
+      <p:sp>
+        <p:nvSpPr>
+          <p:cNvPr id="4" name="Oval 3"/>
+          <p:cNvSpPr/>
+          <p:nvPr/>
+        </p:nvSpPr>
+        <p:spPr>
+          <a:xfrm>
+            <a:off x="548640" y="1737360"/>
+            <a:ext cx="502920" cy="502920"/>
+          </a:xfrm>
+          <a:prstGeom prst="ellipse">
+            <a:avLst/>
+          </a:prstGeom>
+          <a:solidFill>
+            <a:srgbClr val="F2B705"/>
+          </a:solidFill>
+          <a:ln>
+            <a:noFill/>
+          </a:ln>
+          <a:effectLst/>
+        </p:spPr>
+        <p:style>
+          <a:lnRef idx="1">
+            <a:schemeClr val="accent1"/>
+          </a:lnRef>
+          <a:fillRef idx="3">
+            <a:schemeClr val="accent1"/>
+          </a:fillRef>
+          <a:effectRef idx="2">
+            <a:schemeClr val="accent1"/>
+          </a:effectRef>
+          <a:fontRef idx="minor">
+            <a:schemeClr val="lt1"/>
+          </a:fontRef>
+        </p:style>
+        <p:txBody>
+          <a:bodyPr rtlCol="0" anchor="ctr" lIns="0" rIns="0" tIns="0" bIns="0"/>
+          <a:lstStyle/>
+          <a:p>
+            <a:pPr algn="ctr"/>
+            <a:r>
+              <a:rPr sz="1700" b="1">
+                <a:solidFill>
+                  <a:srgbClr val="202122"/>
+                </a:solidFill>
+                <a:latin typeface="Calibri"/>
+              </a:rPr>
+              <a:t>1</a:t>
+            </a:r>
+          </a:p>
+        </p:txBody>
+      </p:sp>
+      <p:sp>
+        <p:nvSpPr>
+          <p:cNvPr id="5" name="TextBox 4"/>
+          <p:cNvSpPr txBox="1"/>
+          <p:nvPr/>
+        </p:nvSpPr>
+        <p:spPr>
+          <a:xfrm>
+            <a:off x="1325880" y="1645920"/>
+            <a:ext cx="6583680" cy="822960"/>
+          </a:xfrm>
+          <a:prstGeom prst="rect">
+            <a:avLst/>
+          </a:prstGeom>
+          <a:noFill/>
+        </p:spPr>
+        <p:txBody>
+          <a:bodyPr wrap="square" anchor="ctr" lIns="0" rIns="0" tIns="0" bIns="0"/>
+          <a:lstStyle/>
+          <a:p>
+            <a:pPr algn="l"/>
+            <a:r>
+              <a:rPr sz="2000" b="0" i="0">
+                <a:solidFill>
+                  <a:srgbClr val="FFFFFF"/>
+                </a:solidFill>
+                <a:latin typeface="Calibri"/>
+              </a:rPr>
+              <a:t>What CPD will you do in the next year?</a:t>
+            </a:r>
+          </a:p>
+        </p:txBody>
+      </p:sp>
+      <p:sp>
+        <p:nvSpPr>
+          <p:cNvPr id="6" name="Oval 5"/>
+          <p:cNvSpPr/>
+          <p:nvPr/>
+        </p:nvSpPr>
+        <p:spPr>
+          <a:xfrm>
+            <a:off x="548640" y="2697480"/>
+            <a:ext cx="502920" cy="502920"/>
+          </a:xfrm>
+          <a:prstGeom prst="ellipse">
+            <a:avLst/>
+          </a:prstGeom>
+          <a:solidFill>
+            <a:srgbClr val="F2B705"/>
+          </a:solidFill>
+          <a:ln>
+            <a:noFill/>
+          </a:ln>
+          <a:effectLst/>
+        </p:spPr>
+        <p:style>
+          <a:lnRef idx="1">
+            <a:schemeClr val="accent1"/>
+          </a:lnRef>
+          <a:fillRef idx="3">
+            <a:schemeClr val="accent1"/>
+          </a:fillRef>
+          <a:effectRef idx="2">
+            <a:schemeClr val="accent1"/>
+          </a:effectRef>
+          <a:fontRef idx="minor">
+            <a:schemeClr val="lt1"/>
+          </a:fontRef>
+        </p:style>
+        <p:txBody>
+          <a:bodyPr rtlCol="0" anchor="ctr" lIns="0" rIns="0" tIns="0" bIns="0"/>
+          <a:lstStyle/>
+          <a:p>
+            <a:pPr algn="ctr"/>
+            <a:r>
+              <a:rPr sz="1700" b="1">
+                <a:solidFill>
+                  <a:srgbClr val="202122"/>
+                </a:solidFill>
+                <a:latin typeface="Calibri"/>
+              </a:rPr>
+              <a:t>2</a:t>
+            </a:r>
+          </a:p>
+        </p:txBody>
+      </p:sp>
+      <p:sp>
+        <p:nvSpPr>
+          <p:cNvPr id="7" name="TextBox 6"/>
+          <p:cNvSpPr txBox="1"/>
+          <p:nvPr/>
+        </p:nvSpPr>
+        <p:spPr>
+          <a:xfrm>
+            <a:off x="1325880" y="2606040"/>
+            <a:ext cx="6583680" cy="822960"/>
+          </a:xfrm>
+          <a:prstGeom prst="rect">
+            <a:avLst/>
+          </a:prstGeom>
+          <a:noFill/>
+        </p:spPr>
+        <p:txBody>
+          <a:bodyPr wrap="square" anchor="ctr" lIns="0" rIns="0" tIns="0" bIns="0"/>
+          <a:lstStyle/>
+          <a:p>
+            <a:pPr algn="l"/>
+            <a:r>
+              <a:rPr sz="2000" b="0" i="0">
+                <a:solidFill>
+                  <a:srgbClr val="FFFFFF"/>
+                </a:solidFill>
+                <a:latin typeface="Calibri"/>
+              </a:rPr>
+              <a:t>How can workplace design reduce errors?</a:t>
+            </a:r>
+          </a:p>
+        </p:txBody>
+      </p:sp>
+      <p:sp>
+        <p:nvSpPr>
+          <p:cNvPr id="8" name="Oval 7"/>
+          <p:cNvSpPr/>
+          <p:nvPr/>
+        </p:nvSpPr>
+        <p:spPr>
+          <a:xfrm>
+            <a:off x="548640" y="3657600"/>
+            <a:ext cx="502920" cy="502920"/>
+          </a:xfrm>
+          <a:prstGeom prst="ellipse">
+            <a:avLst/>
+          </a:prstGeom>
+          <a:solidFill>
+            <a:srgbClr val="F2B705"/>
+          </a:solidFill>
+          <a:ln>
+            <a:noFill/>
+          </a:ln>
+          <a:effectLst/>
+        </p:spPr>
+        <p:style>
+          <a:lnRef idx="1">
+            <a:schemeClr val="accent1"/>
+          </a:lnRef>
+          <a:fillRef idx="3">
+            <a:schemeClr val="accent1"/>
+          </a:fillRef>
+          <a:effectRef idx="2">
+            <a:schemeClr val="accent1"/>
+          </a:effectRef>
+          <a:fontRef idx="minor">
+            <a:schemeClr val="lt1"/>
+          </a:fontRef>
+        </p:style>
+        <p:txBody>
+          <a:bodyPr rtlCol="0" anchor="ctr" lIns="0" rIns="0" tIns="0" bIns="0"/>
+          <a:lstStyle/>
+          <a:p>
+            <a:pPr algn="ctr"/>
+            <a:r>
+              <a:rPr sz="1700" b="1">
+                <a:solidFill>
+                  <a:srgbClr val="202122"/>
+                </a:solidFill>
+                <a:latin typeface="Calibri"/>
+              </a:rPr>
+              <a:t>3</a:t>
+            </a:r>
+          </a:p>
+        </p:txBody>
+      </p:sp>
+      <p:sp>
+        <p:nvSpPr>
+          <p:cNvPr id="9" name="TextBox 8"/>
+          <p:cNvSpPr txBox="1"/>
+          <p:nvPr/>
+        </p:nvSpPr>
+        <p:spPr>
+          <a:xfrm>
+            <a:off x="1325880" y="3566160"/>
+            <a:ext cx="6583680" cy="822960"/>
+          </a:xfrm>
+          <a:prstGeom prst="rect">
+            <a:avLst/>
+          </a:prstGeom>
+          <a:noFill/>
+        </p:spPr>
+        <p:txBody>
+          <a:bodyPr wrap="square" anchor="ctr" lIns="0" rIns="0" tIns="0" bIns="0"/>
+          <a:lstStyle/>
+          <a:p>
+            <a:pPr algn="l"/>
+            <a:r>
+              <a:rPr sz="2000" b="0" i="0">
+                <a:solidFill>
+                  <a:srgbClr val="FFFFFF"/>
+                </a:solidFill>
+                <a:latin typeface="Calibri"/>
+              </a:rPr>
+              <a:t>Why does reputation matter for an engineer?</a:t>
+            </a:r>
+          </a:p>
+        </p:txBody>
+      </p:sp>
+      <p:sp>
+        <p:nvSpPr>
+          <p:cNvPr id="10" name="Rounded Rectangle 9"/>
+          <p:cNvSpPr/>
+          <p:nvPr/>
+        </p:nvSpPr>
+        <p:spPr>
+          <a:xfrm>
+            <a:off x="8229600" y="1645920"/>
+            <a:ext cx="3410712" cy="2926080"/>
+          </a:xfrm>
+          <a:prstGeom prst="roundRect">
+            <a:avLst>
+              <a:gd name="adj" fmla="val 8000"/>
+            </a:avLst>
+          </a:prstGeom>
+          <a:solidFill>
+            <a:srgbClr val="0645AD"/>
+          </a:solidFill>
+          <a:ln>
+            <a:noFill/>
+          </a:ln>
+          <a:effectLst/>
+        </p:spPr>
+        <p:style>
+          <a:lnRef idx="1">
+            <a:schemeClr val="accent1"/>
+          </a:lnRef>
+          <a:fillRef idx="3">
+            <a:schemeClr val="accent1"/>
+          </a:fillRef>
+          <a:effectRef idx="2">
+            <a:schemeClr val="accent1"/>
+          </a:effectRef>
+          <a:fontRef idx="minor">
+            <a:schemeClr val="lt1"/>
+          </a:fontRef>
+        </p:style>
+        <p:txBody>
+          <a:bodyPr rtlCol="0" anchor="ctr"/>
+          <a:lstStyle/>
+          <a:p/>
+        </p:txBody>
+      </p:sp>
+      <p:sp>
+        <p:nvSpPr>
+          <p:cNvPr id="11" name="TextBox 10"/>
+          <p:cNvSpPr txBox="1"/>
+          <p:nvPr/>
+        </p:nvSpPr>
+        <p:spPr>
+          <a:xfrm>
+            <a:off x="8503920" y="1874519"/>
+            <a:ext cx="2926080" cy="365760"/>
+          </a:xfrm>
+          <a:prstGeom prst="rect">
+            <a:avLst/>
+          </a:prstGeom>
+          <a:noFill/>
+        </p:spPr>
+        <p:txBody>
+          <a:bodyPr wrap="square" anchor="t" lIns="0" rIns="0" tIns="0" bIns="0"/>
+          <a:lstStyle/>
+          <a:p>
+            <a:pPr algn="l"/>
+            <a:r>
+              <a:rPr sz="1300" b="1" i="0">
+                <a:solidFill>
+                  <a:srgbClr val="A9C8F0"/>
+                </a:solidFill>
+                <a:latin typeface="Calibri"/>
+              </a:rPr>
+              <a:t>REVISE THIS TOPIC</a:t>
+            </a:r>
+          </a:p>
+        </p:txBody>
+      </p:sp>
+      <p:sp>
+        <p:nvSpPr>
+          <p:cNvPr id="12" name="TextBox 11"/>
+          <p:cNvSpPr txBox="1"/>
+          <p:nvPr/>
+        </p:nvSpPr>
+        <p:spPr>
+          <a:xfrm>
+            <a:off x="8503920" y="2286000"/>
+            <a:ext cx="2926080" cy="548640"/>
+          </a:xfrm>
+          <a:prstGeom prst="rect">
+            <a:avLst/>
+          </a:prstGeom>
+          <a:noFill/>
+        </p:spPr>
+        <p:txBody>
+          <a:bodyPr wrap="square" anchor="t" lIns="0" rIns="0" tIns="0" bIns="0"/>
+          <a:lstStyle/>
+          <a:p>
+            <a:pPr algn="l"/>
+            <a:r>
+              <a:rPr sz="1400" b="0" i="0">
+                <a:solidFill>
+                  <a:srgbClr val="FFFFFF"/>
+                </a:solidFill>
+                <a:latin typeface="Calibri"/>
+              </a:rPr>
+              <a:t>Revision notes for this lesson are on the study wiki:</a:t>
+            </a:r>
+          </a:p>
+        </p:txBody>
+      </p:sp>
+      <p:sp>
+        <p:nvSpPr>
+          <p:cNvPr id="13" name="TextBox 12"/>
+          <p:cNvSpPr txBox="1"/>
+          <p:nvPr/>
+        </p:nvSpPr>
+        <p:spPr>
+          <a:xfrm>
+            <a:off x="8503920" y="2926080"/>
+            <a:ext cx="2926080" cy="1463040"/>
+          </a:xfrm>
+          <a:prstGeom prst="rect">
+            <a:avLst/>
+          </a:prstGeom>
+          <a:noFill/>
+        </p:spPr>
+        <p:txBody>
+          <a:bodyPr wrap="square" anchor="t" lIns="0" rIns="0" tIns="0" bIns="0"/>
+          <a:lstStyle/>
+          <a:p>
+            <a:pPr algn="l"/>
+            <a:r>
+              <a:rPr sz="2000" b="1" i="0">
+                <a:solidFill>
+                  <a:srgbClr val="FFFFFF"/>
+                </a:solidFill>
+                <a:latin typeface="Cambria"/>
+              </a:rPr>
+              <a:t>Engineering Core, Part 2</a:t>
+            </a:r>
+          </a:p>
+        </p:txBody>
+      </p:sp>
+      <p:sp>
+        <p:nvSpPr>
+          <p:cNvPr id="14" name="TextBox 13"/>
+          <p:cNvSpPr txBox="1"/>
+          <p:nvPr/>
+        </p:nvSpPr>
+        <p:spPr>
+          <a:xfrm>
+            <a:off x="548640" y="5669280"/>
+            <a:ext cx="11094415" cy="548640"/>
+          </a:xfrm>
+          <a:prstGeom prst="rect">
+            <a:avLst/>
+          </a:prstGeom>
+          <a:noFill/>
+        </p:spPr>
+        <p:txBody>
+          <a:bodyPr wrap="square" anchor="t" lIns="0" rIns="0" tIns="0" bIns="0"/>
+          <a:lstStyle/>
+          <a:p>
+            <a:pPr algn="l"/>
+            <a:r>
+              <a:rPr sz="1200" b="0" i="0">
+                <a:solidFill>
+                  <a:srgbClr val="A9C8F0"/>
+                </a:solidFill>
+                <a:latin typeface="Calibri"/>
+              </a:rPr>
+              <a:t>https://lana6478.github.io/T-level-Design-Development-Engineering-Manufacturing/#/01-core-component/02-engineering-core-part2.md</a:t>
+            </a:r>
+          </a:p>
+        </p:txBody>
+      </p:sp>
+    </p:spTree>
+  </p:cSld>
+  <p:clrMapOvr>
+    <a:masterClrMapping/>
+  </p:clrMapOvr>
+</p:sld>
+</file>
+
 <file path=ppt/slides/slide2.xml><?xml version="1.0" encoding="utf-8"?>
 <p:sld xmlns:a="http://schemas.openxmlformats.org/drawingml/2006/main" xmlns:p="http://schemas.openxmlformats.org/presentationml/2006/main" xmlns:r="http://schemas.openxmlformats.org/officeDocument/2006/relationships">
   <p:cSld>
@@ -5582,18 +8105,89 @@
       </p:sp>
       <p:sp>
         <p:nvSpPr>
-          <p:cNvPr id="6" name="Rounded Rectangle 5"/>
+          <p:cNvPr id="6" name="TextBox 5"/>
+          <p:cNvSpPr txBox="1"/>
+          <p:nvPr/>
+        </p:nvSpPr>
+        <p:spPr>
+          <a:xfrm>
+            <a:off x="548640" y="1554480"/>
+            <a:ext cx="6720840" cy="4617720"/>
+          </a:xfrm>
+          <a:prstGeom prst="rect">
+            <a:avLst/>
+          </a:prstGeom>
+          <a:noFill/>
+        </p:spPr>
+        <p:txBody>
+          <a:bodyPr wrap="square" lIns="0" rIns="0" tIns="0" bIns="0">
+            <a:spAutoFit/>
+          </a:bodyPr>
+          <a:lstStyle/>
+          <a:p>
+            <a:pPr>
+              <a:spcAft>
+                <a:spcPts val="1320"/>
+              </a:spcAft>
+            </a:pPr>
+            <a:r>
+              <a:rPr sz="2200" b="0">
+                <a:solidFill>
+                  <a:srgbClr val="202122"/>
+                </a:solidFill>
+                <a:latin typeface="Calibri"/>
+              </a:rPr>
+              <a:t>Continuous professional development (CPD) is ongoing learning throughout your career: training courses, industry placements, academic study, events and seminars.</a:t>
+            </a:r>
+          </a:p>
+          <a:p>
+            <a:pPr>
+              <a:spcAft>
+                <a:spcPts val="1320"/>
+              </a:spcAft>
+            </a:pPr>
+            <a:r>
+              <a:rPr sz="2200" b="0">
+                <a:solidFill>
+                  <a:srgbClr val="202122"/>
+                </a:solidFill>
+                <a:latin typeface="Calibri"/>
+              </a:rPr>
+              <a:t>CPD keeps skills current, motivates staff and improves performance.</a:t>
+            </a:r>
+          </a:p>
+          <a:p>
+            <a:pPr>
+              <a:spcAft>
+                <a:spcPts val="1320"/>
+              </a:spcAft>
+            </a:pPr>
+            <a:r>
+              <a:rPr sz="2200" b="0">
+                <a:solidFill>
+                  <a:srgbClr val="202122"/>
+                </a:solidFill>
+                <a:latin typeface="Calibri"/>
+              </a:rPr>
+              <a:t>The Engineering Council sets the professional standards for engineers in the UK. With experience and evidence of competence, engineers can register as an Engineering Technician (EngTech), Incorporated Engineer (IEng) or Chartered Engineer (CEng), recognised by employers worldwide.</a:t>
+            </a:r>
+          </a:p>
+        </p:txBody>
+      </p:sp>
+      <p:sp>
+        <p:nvSpPr>
+          <p:cNvPr id="7" name="Rounded Rectangle 6"/>
           <p:cNvSpPr/>
           <p:nvPr/>
         </p:nvSpPr>
         <p:spPr>
           <a:xfrm>
-            <a:off x="548640" y="1600200"/>
-            <a:ext cx="5364327" cy="640080"/>
+            <a:off x="7772400" y="1554480"/>
+            <a:ext cx="3867912" cy="4526280"/>
           </a:xfrm>
           <a:prstGeom prst="roundRect">
             <a:avLst>
-              <a:gd name="adj" fmla="val 15000"/>
+              <a:gd name="adj" fmla="val 8000"/>
             </a:avLst>
           </a:prstGeom>
           <a:solidFill>
@@ -5626,55 +8220,20 @@
       </p:sp>
       <p:sp>
         <p:nvSpPr>
-          <p:cNvPr id="7" name="TextBox 6"/>
-          <p:cNvSpPr txBox="1"/>
-          <p:nvPr/>
-        </p:nvSpPr>
-        <p:spPr>
-          <a:xfrm>
-            <a:off x="777240" y="1600200"/>
-            <a:ext cx="4907127" cy="640080"/>
-          </a:xfrm>
-          <a:prstGeom prst="rect">
-            <a:avLst/>
-          </a:prstGeom>
-          <a:noFill/>
-        </p:spPr>
-        <p:txBody>
-          <a:bodyPr wrap="square" anchor="ctr" lIns="0" rIns="0" tIns="0" bIns="0"/>
-          <a:lstStyle/>
-          <a:p>
-            <a:pPr algn="l"/>
-            <a:r>
-              <a:rPr sz="2000" b="1" i="0">
-                <a:solidFill>
-                  <a:srgbClr val="FFFFFF"/>
-                </a:solidFill>
-                <a:latin typeface="Calibri"/>
-              </a:rPr>
-              <a:t>CPD routes</a:t>
-            </a:r>
-          </a:p>
-        </p:txBody>
-      </p:sp>
-      <p:sp>
-        <p:nvSpPr>
-          <p:cNvPr id="8" name="Rounded Rectangle 7"/>
+          <p:cNvPr id="8" name="Oval 7"/>
           <p:cNvSpPr/>
           <p:nvPr/>
         </p:nvSpPr>
         <p:spPr>
           <a:xfrm>
-            <a:off x="548640" y="2377440"/>
-            <a:ext cx="5364327" cy="3794760"/>
-          </a:xfrm>
-          <a:prstGeom prst="roundRect">
-            <a:avLst>
-              <a:gd name="adj" fmla="val 4000"/>
-            </a:avLst>
+            <a:off x="8046720" y="1828800"/>
+            <a:ext cx="548640" cy="548640"/>
+          </a:xfrm>
+          <a:prstGeom prst="ellipse">
+            <a:avLst/>
           </a:prstGeom>
           <a:solidFill>
-            <a:srgbClr val="EAF3FF"/>
+            <a:srgbClr val="F2B705"/>
           </a:solidFill>
           <a:ln>
             <a:noFill/>
@@ -5696,9 +8255,20 @@
           </a:fontRef>
         </p:style>
         <p:txBody>
-          <a:bodyPr rtlCol="0" anchor="ctr"/>
-          <a:lstStyle/>
-          <a:p/>
+          <a:bodyPr rtlCol="0" anchor="ctr" lIns="0" rIns="0" tIns="0" bIns="0"/>
+          <a:lstStyle/>
+          <a:p>
+            <a:pPr algn="ctr"/>
+            <a:r>
+              <a:rPr sz="1300" b="1">
+                <a:solidFill>
+                  <a:srgbClr val="202122"/>
+                </a:solidFill>
+                <a:latin typeface="Calibri"/>
+              </a:rPr>
+              <a:t>e.g.</a:t>
+            </a:r>
+          </a:p>
         </p:txBody>
       </p:sp>
       <p:sp>
@@ -5709,8 +8279,8 @@
         </p:nvSpPr>
         <p:spPr>
           <a:xfrm>
-            <a:off x="822959" y="2606040"/>
-            <a:ext cx="4815687" cy="3337560"/>
+            <a:off x="8046720" y="2560320"/>
+            <a:ext cx="3291840" cy="365760"/>
           </a:xfrm>
           <a:prstGeom prst="rect">
             <a:avLst/>
@@ -5718,150 +8288,32 @@
           <a:noFill/>
         </p:spPr>
         <p:txBody>
-          <a:bodyPr wrap="square" lIns="0" rIns="0" tIns="0" bIns="0">
-            <a:spAutoFit/>
-          </a:bodyPr>
-          <a:lstStyle/>
-          <a:p>
-            <a:pPr marL="274320" indent="-274320">
-              <a:spcAft>
-                <a:spcPts val="990"/>
-              </a:spcAft>
-              <a:buClr>
-                <a:srgbClr val="0645AD"/>
-              </a:buClr>
-              <a:buFont typeface="Arial"/>
-              <a:buChar char="•"/>
-            </a:pPr>
-            <a:r>
-              <a:rPr sz="2200" b="0">
-                <a:solidFill>
-                  <a:srgbClr val="202122"/>
-                </a:solidFill>
-                <a:latin typeface="Calibri"/>
-              </a:rPr>
-              <a:t>Training courses</a:t>
-            </a:r>
-          </a:p>
-          <a:p>
-            <a:pPr marL="274320" indent="-274320">
-              <a:spcAft>
-                <a:spcPts val="990"/>
-              </a:spcAft>
-              <a:buClr>
-                <a:srgbClr val="0645AD"/>
-              </a:buClr>
-              <a:buFont typeface="Arial"/>
-              <a:buChar char="•"/>
-            </a:pPr>
-            <a:r>
-              <a:rPr sz="2200" b="0">
-                <a:solidFill>
-                  <a:srgbClr val="202122"/>
-                </a:solidFill>
-                <a:latin typeface="Calibri"/>
-              </a:rPr>
-              <a:t>Industry placement</a:t>
-            </a:r>
-          </a:p>
-          <a:p>
-            <a:pPr marL="274320" indent="-274320">
-              <a:spcAft>
-                <a:spcPts val="990"/>
-              </a:spcAft>
-              <a:buClr>
-                <a:srgbClr val="0645AD"/>
-              </a:buClr>
-              <a:buFont typeface="Arial"/>
-              <a:buChar char="•"/>
-            </a:pPr>
-            <a:r>
-              <a:rPr sz="2200" b="0">
-                <a:solidFill>
-                  <a:srgbClr val="202122"/>
-                </a:solidFill>
-                <a:latin typeface="Calibri"/>
-              </a:rPr>
-              <a:t>Academic study</a:t>
-            </a:r>
-          </a:p>
-          <a:p>
-            <a:pPr marL="274320" indent="-274320">
-              <a:spcAft>
-                <a:spcPts val="990"/>
-              </a:spcAft>
-              <a:buClr>
-                <a:srgbClr val="0645AD"/>
-              </a:buClr>
-              <a:buFont typeface="Arial"/>
-              <a:buChar char="•"/>
-            </a:pPr>
-            <a:r>
-              <a:rPr sz="2200" b="0">
-                <a:solidFill>
-                  <a:srgbClr val="202122"/>
-                </a:solidFill>
-                <a:latin typeface="Calibri"/>
-              </a:rPr>
-              <a:t>Events and seminars</a:t>
-            </a:r>
-          </a:p>
-        </p:txBody>
-      </p:sp>
-      <p:sp>
-        <p:nvSpPr>
-          <p:cNvPr id="10" name="Rounded Rectangle 9"/>
-          <p:cNvSpPr/>
-          <p:nvPr/>
-        </p:nvSpPr>
-        <p:spPr>
-          <a:xfrm>
-            <a:off x="6278727" y="1600200"/>
-            <a:ext cx="5364327" cy="640080"/>
-          </a:xfrm>
-          <a:prstGeom prst="roundRect">
-            <a:avLst>
-              <a:gd name="adj" fmla="val 15000"/>
-            </a:avLst>
-          </a:prstGeom>
-          <a:solidFill>
-            <a:srgbClr val="0645AD"/>
-          </a:solidFill>
-          <a:ln>
-            <a:noFill/>
-          </a:ln>
-          <a:effectLst/>
-        </p:spPr>
-        <p:style>
-          <a:lnRef idx="1">
-            <a:schemeClr val="accent1"/>
-          </a:lnRef>
-          <a:fillRef idx="3">
-            <a:schemeClr val="accent1"/>
-          </a:fillRef>
-          <a:effectRef idx="2">
-            <a:schemeClr val="accent1"/>
-          </a:effectRef>
-          <a:fontRef idx="minor">
-            <a:schemeClr val="lt1"/>
-          </a:fontRef>
-        </p:style>
-        <p:txBody>
-          <a:bodyPr rtlCol="0" anchor="ctr"/>
-          <a:lstStyle/>
-          <a:p/>
-        </p:txBody>
-      </p:sp>
-      <p:sp>
-        <p:nvSpPr>
-          <p:cNvPr id="11" name="TextBox 10"/>
+          <a:bodyPr wrap="square" anchor="t" lIns="0" rIns="0" tIns="0" bIns="0"/>
+          <a:lstStyle/>
+          <a:p>
+            <a:pPr algn="l"/>
+            <a:r>
+              <a:rPr sz="1300" b="1" i="0">
+                <a:solidFill>
+                  <a:srgbClr val="A9C8F0"/>
+                </a:solidFill>
+                <a:latin typeface="Calibri"/>
+              </a:rPr>
+              <a:t>EXAMPLE</a:t>
+            </a:r>
+          </a:p>
+        </p:txBody>
+      </p:sp>
+      <p:sp>
+        <p:nvSpPr>
+          <p:cNvPr id="10" name="TextBox 9"/>
           <p:cNvSpPr txBox="1"/>
           <p:nvPr/>
         </p:nvSpPr>
         <p:spPr>
           <a:xfrm>
-            <a:off x="6507327" y="1600200"/>
-            <a:ext cx="4907127" cy="640080"/>
+            <a:off x="8046720" y="2971800"/>
+            <a:ext cx="3291840" cy="2971800"/>
           </a:xfrm>
           <a:prstGeom prst="rect">
             <a:avLst/>
@@ -5869,169 +8321,18 @@
           <a:noFill/>
         </p:spPr>
         <p:txBody>
-          <a:bodyPr wrap="square" anchor="ctr" lIns="0" rIns="0" tIns="0" bIns="0"/>
+          <a:bodyPr wrap="square" anchor="t" lIns="0" rIns="0" tIns="0" bIns="0"/>
           <a:lstStyle/>
           <a:p>
             <a:pPr algn="l"/>
             <a:r>
-              <a:rPr sz="2000" b="1" i="0">
+              <a:rPr sz="1900" b="0" i="0">
                 <a:solidFill>
                   <a:srgbClr val="FFFFFF"/>
                 </a:solidFill>
-                <a:latin typeface="Calibri"/>
-              </a:rPr>
-              <a:t>Why it matters</a:t>
-            </a:r>
-          </a:p>
-        </p:txBody>
-      </p:sp>
-      <p:sp>
-        <p:nvSpPr>
-          <p:cNvPr id="12" name="Rounded Rectangle 11"/>
-          <p:cNvSpPr/>
-          <p:nvPr/>
-        </p:nvSpPr>
-        <p:spPr>
-          <a:xfrm>
-            <a:off x="6278727" y="2377440"/>
-            <a:ext cx="5364327" cy="3794760"/>
-          </a:xfrm>
-          <a:prstGeom prst="roundRect">
-            <a:avLst>
-              <a:gd name="adj" fmla="val 4000"/>
-            </a:avLst>
-          </a:prstGeom>
-          <a:solidFill>
-            <a:srgbClr val="EAF3FF"/>
-          </a:solidFill>
-          <a:ln>
-            <a:noFill/>
-          </a:ln>
-          <a:effectLst/>
-        </p:spPr>
-        <p:style>
-          <a:lnRef idx="1">
-            <a:schemeClr val="accent1"/>
-          </a:lnRef>
-          <a:fillRef idx="3">
-            <a:schemeClr val="accent1"/>
-          </a:fillRef>
-          <a:effectRef idx="2">
-            <a:schemeClr val="accent1"/>
-          </a:effectRef>
-          <a:fontRef idx="minor">
-            <a:schemeClr val="lt1"/>
-          </a:fontRef>
-        </p:style>
-        <p:txBody>
-          <a:bodyPr rtlCol="0" anchor="ctr"/>
-          <a:lstStyle/>
-          <a:p/>
-        </p:txBody>
-      </p:sp>
-      <p:sp>
-        <p:nvSpPr>
-          <p:cNvPr id="13" name="TextBox 12"/>
-          <p:cNvSpPr txBox="1"/>
-          <p:nvPr/>
-        </p:nvSpPr>
-        <p:spPr>
-          <a:xfrm>
-            <a:off x="6553047" y="2606040"/>
-            <a:ext cx="4815687" cy="3337560"/>
-          </a:xfrm>
-          <a:prstGeom prst="rect">
-            <a:avLst/>
-          </a:prstGeom>
-          <a:noFill/>
-        </p:spPr>
-        <p:txBody>
-          <a:bodyPr wrap="square" lIns="0" rIns="0" tIns="0" bIns="0">
-            <a:spAutoFit/>
-          </a:bodyPr>
-          <a:lstStyle/>
-          <a:p>
-            <a:pPr marL="274320" indent="-274320">
-              <a:spcAft>
-                <a:spcPts val="990"/>
-              </a:spcAft>
-              <a:buClr>
-                <a:srgbClr val="0645AD"/>
-              </a:buClr>
-              <a:buFont typeface="Arial"/>
-              <a:buChar char="•"/>
-            </a:pPr>
-            <a:r>
-              <a:rPr sz="2200" b="0">
-                <a:solidFill>
-                  <a:srgbClr val="202122"/>
-                </a:solidFill>
-                <a:latin typeface="Calibri"/>
-              </a:rPr>
-              <a:t>Motivates staff</a:t>
-            </a:r>
-          </a:p>
-          <a:p>
-            <a:pPr marL="274320" indent="-274320">
-              <a:spcAft>
-                <a:spcPts val="990"/>
-              </a:spcAft>
-              <a:buClr>
-                <a:srgbClr val="0645AD"/>
-              </a:buClr>
-              <a:buFont typeface="Arial"/>
-              <a:buChar char="•"/>
-            </a:pPr>
-            <a:r>
-              <a:rPr sz="2200" b="0">
-                <a:solidFill>
-                  <a:srgbClr val="202122"/>
-                </a:solidFill>
-                <a:latin typeface="Calibri"/>
-              </a:rPr>
-              <a:t>Improves performance</a:t>
-            </a:r>
-          </a:p>
-          <a:p>
-            <a:pPr marL="274320" indent="-274320">
-              <a:spcAft>
-                <a:spcPts val="990"/>
-              </a:spcAft>
-              <a:buClr>
-                <a:srgbClr val="0645AD"/>
-              </a:buClr>
-              <a:buFont typeface="Arial"/>
-              <a:buChar char="•"/>
-            </a:pPr>
-            <a:r>
-              <a:rPr sz="2200" b="0">
-                <a:solidFill>
-                  <a:srgbClr val="202122"/>
-                </a:solidFill>
-                <a:latin typeface="Calibri"/>
-              </a:rPr>
-              <a:t>Keeps skills current</a:t>
-            </a:r>
-          </a:p>
-          <a:p>
-            <a:pPr marL="274320" indent="-274320">
-              <a:spcAft>
-                <a:spcPts val="990"/>
-              </a:spcAft>
-              <a:buClr>
-                <a:srgbClr val="0645AD"/>
-              </a:buClr>
-              <a:buFont typeface="Arial"/>
-              <a:buChar char="•"/>
-            </a:pPr>
-            <a:r>
-              <a:rPr sz="2200" b="0">
-                <a:solidFill>
-                  <a:srgbClr val="202122"/>
-                </a:solidFill>
-                <a:latin typeface="Calibri"/>
-              </a:rPr>
-              <a:t>Leads to Engineering Council registration (EngTech, IEng, CEng)</a:t>
+                <a:latin typeface="Cambria"/>
+              </a:rPr>
+              <a:t>A T Level student might become an apprentice, gain EngTech registration, then study part-time towards IEng or CEng.</a:t>
             </a:r>
           </a:p>
         </p:txBody>
@@ -6123,7 +8424,7 @@
                 </a:solidFill>
                 <a:latin typeface="Cambria"/>
               </a:rPr>
-              <a:t>Human factors</a:t>
+              <a:t>CPD and professional recognition</a:t>
             </a:r>
           </a:p>
         </p:txBody>
@@ -6203,11 +8504,88 @@
         <p:spPr>
           <a:xfrm>
             <a:off x="548640" y="1600200"/>
-            <a:ext cx="5410047" cy="2148840"/>
+            <a:ext cx="5364327" cy="640080"/>
           </a:xfrm>
           <a:prstGeom prst="roundRect">
             <a:avLst>
-              <a:gd name="adj" fmla="val 6000"/>
+              <a:gd name="adj" fmla="val 15000"/>
+            </a:avLst>
+          </a:prstGeom>
+          <a:solidFill>
+            <a:srgbClr val="03306E"/>
+          </a:solidFill>
+          <a:ln>
+            <a:noFill/>
+          </a:ln>
+          <a:effectLst/>
+        </p:spPr>
+        <p:style>
+          <a:lnRef idx="1">
+            <a:schemeClr val="accent1"/>
+          </a:lnRef>
+          <a:fillRef idx="3">
+            <a:schemeClr val="accent1"/>
+          </a:fillRef>
+          <a:effectRef idx="2">
+            <a:schemeClr val="accent1"/>
+          </a:effectRef>
+          <a:fontRef idx="minor">
+            <a:schemeClr val="lt1"/>
+          </a:fontRef>
+        </p:style>
+        <p:txBody>
+          <a:bodyPr rtlCol="0" anchor="ctr"/>
+          <a:lstStyle/>
+          <a:p/>
+        </p:txBody>
+      </p:sp>
+      <p:sp>
+        <p:nvSpPr>
+          <p:cNvPr id="7" name="TextBox 6"/>
+          <p:cNvSpPr txBox="1"/>
+          <p:nvPr/>
+        </p:nvSpPr>
+        <p:spPr>
+          <a:xfrm>
+            <a:off x="777240" y="1600200"/>
+            <a:ext cx="4907127" cy="640080"/>
+          </a:xfrm>
+          <a:prstGeom prst="rect">
+            <a:avLst/>
+          </a:prstGeom>
+          <a:noFill/>
+        </p:spPr>
+        <p:txBody>
+          <a:bodyPr wrap="square" anchor="ctr" lIns="0" rIns="0" tIns="0" bIns="0"/>
+          <a:lstStyle/>
+          <a:p>
+            <a:pPr algn="l"/>
+            <a:r>
+              <a:rPr sz="2000" b="1" i="0">
+                <a:solidFill>
+                  <a:srgbClr val="FFFFFF"/>
+                </a:solidFill>
+                <a:latin typeface="Calibri"/>
+              </a:rPr>
+              <a:t>CPD routes</a:t>
+            </a:r>
+          </a:p>
+        </p:txBody>
+      </p:sp>
+      <p:sp>
+        <p:nvSpPr>
+          <p:cNvPr id="8" name="Rounded Rectangle 7"/>
+          <p:cNvSpPr/>
+          <p:nvPr/>
+        </p:nvSpPr>
+        <p:spPr>
+          <a:xfrm>
+            <a:off x="548640" y="2377440"/>
+            <a:ext cx="5364327" cy="3794760"/>
+          </a:xfrm>
+          <a:prstGeom prst="roundRect">
+            <a:avLst>
+              <a:gd name="adj" fmla="val 4000"/>
             </a:avLst>
           </a:prstGeom>
           <a:solidFill>
@@ -6240,20 +8618,129 @@
       </p:sp>
       <p:sp>
         <p:nvSpPr>
-          <p:cNvPr id="7" name="Oval 6"/>
+          <p:cNvPr id="9" name="TextBox 8"/>
+          <p:cNvSpPr txBox="1"/>
+          <p:nvPr/>
+        </p:nvSpPr>
+        <p:spPr>
+          <a:xfrm>
+            <a:off x="822959" y="2606040"/>
+            <a:ext cx="4815687" cy="3337560"/>
+          </a:xfrm>
+          <a:prstGeom prst="rect">
+            <a:avLst/>
+          </a:prstGeom>
+          <a:noFill/>
+        </p:spPr>
+        <p:txBody>
+          <a:bodyPr wrap="square" lIns="0" rIns="0" tIns="0" bIns="0">
+            <a:spAutoFit/>
+          </a:bodyPr>
+          <a:lstStyle/>
+          <a:p>
+            <a:pPr marL="274320" indent="-274320">
+              <a:spcAft>
+                <a:spcPts val="990"/>
+              </a:spcAft>
+              <a:buClr>
+                <a:srgbClr val="0645AD"/>
+              </a:buClr>
+              <a:buFont typeface="Arial"/>
+              <a:buChar char="•"/>
+            </a:pPr>
+            <a:r>
+              <a:rPr sz="2200" b="0">
+                <a:solidFill>
+                  <a:srgbClr val="202122"/>
+                </a:solidFill>
+                <a:latin typeface="Calibri"/>
+              </a:rPr>
+              <a:t>Training courses</a:t>
+            </a:r>
+          </a:p>
+          <a:p>
+            <a:pPr marL="274320" indent="-274320">
+              <a:spcAft>
+                <a:spcPts val="990"/>
+              </a:spcAft>
+              <a:buClr>
+                <a:srgbClr val="0645AD"/>
+              </a:buClr>
+              <a:buFont typeface="Arial"/>
+              <a:buChar char="•"/>
+            </a:pPr>
+            <a:r>
+              <a:rPr sz="2200" b="0">
+                <a:solidFill>
+                  <a:srgbClr val="202122"/>
+                </a:solidFill>
+                <a:latin typeface="Calibri"/>
+              </a:rPr>
+              <a:t>Industry placement</a:t>
+            </a:r>
+          </a:p>
+          <a:p>
+            <a:pPr marL="274320" indent="-274320">
+              <a:spcAft>
+                <a:spcPts val="990"/>
+              </a:spcAft>
+              <a:buClr>
+                <a:srgbClr val="0645AD"/>
+              </a:buClr>
+              <a:buFont typeface="Arial"/>
+              <a:buChar char="•"/>
+            </a:pPr>
+            <a:r>
+              <a:rPr sz="2200" b="0">
+                <a:solidFill>
+                  <a:srgbClr val="202122"/>
+                </a:solidFill>
+                <a:latin typeface="Calibri"/>
+              </a:rPr>
+              <a:t>Academic study</a:t>
+            </a:r>
+          </a:p>
+          <a:p>
+            <a:pPr marL="274320" indent="-274320">
+              <a:spcAft>
+                <a:spcPts val="990"/>
+              </a:spcAft>
+              <a:buClr>
+                <a:srgbClr val="0645AD"/>
+              </a:buClr>
+              <a:buFont typeface="Arial"/>
+              <a:buChar char="•"/>
+            </a:pPr>
+            <a:r>
+              <a:rPr sz="2200" b="0">
+                <a:solidFill>
+                  <a:srgbClr val="202122"/>
+                </a:solidFill>
+                <a:latin typeface="Calibri"/>
+              </a:rPr>
+              <a:t>Events and seminars</a:t>
+            </a:r>
+          </a:p>
+        </p:txBody>
+      </p:sp>
+      <p:sp>
+        <p:nvSpPr>
+          <p:cNvPr id="10" name="Rounded Rectangle 9"/>
           <p:cNvSpPr/>
           <p:nvPr/>
         </p:nvSpPr>
         <p:spPr>
           <a:xfrm>
-            <a:off x="777240" y="1828800"/>
-            <a:ext cx="457200" cy="457200"/>
-          </a:xfrm>
-          <a:prstGeom prst="ellipse">
-            <a:avLst/>
+            <a:off x="6278727" y="1600200"/>
+            <a:ext cx="5364327" cy="640080"/>
+          </a:xfrm>
+          <a:prstGeom prst="roundRect">
+            <a:avLst>
+              <a:gd name="adj" fmla="val 15000"/>
+            </a:avLst>
           </a:prstGeom>
           <a:solidFill>
-            <a:srgbClr val="F2B705"/>
+            <a:srgbClr val="0645AD"/>
           </a:solidFill>
           <a:ln>
             <a:noFill/>
@@ -6275,32 +8762,21 @@
           </a:fontRef>
         </p:style>
         <p:txBody>
-          <a:bodyPr rtlCol="0" anchor="ctr" lIns="0" rIns="0" tIns="0" bIns="0"/>
-          <a:lstStyle/>
-          <a:p>
-            <a:pPr algn="ctr"/>
-            <a:r>
-              <a:rPr sz="1500" b="1">
-                <a:solidFill>
-                  <a:srgbClr val="202122"/>
-                </a:solidFill>
-                <a:latin typeface="Calibri"/>
-              </a:rPr>
-              <a:t>1</a:t>
-            </a:r>
-          </a:p>
-        </p:txBody>
-      </p:sp>
-      <p:sp>
-        <p:nvSpPr>
-          <p:cNvPr id="8" name="TextBox 7"/>
+          <a:bodyPr rtlCol="0" anchor="ctr"/>
+          <a:lstStyle/>
+          <a:p/>
+        </p:txBody>
+      </p:sp>
+      <p:sp>
+        <p:nvSpPr>
+          <p:cNvPr id="11" name="TextBox 10"/>
           <p:cNvSpPr txBox="1"/>
           <p:nvPr/>
         </p:nvSpPr>
         <p:spPr>
           <a:xfrm>
-            <a:off x="1371600" y="1801368"/>
-            <a:ext cx="4404207" cy="512064"/>
+            <a:off x="6507327" y="1600200"/>
+            <a:ext cx="4907127" cy="640080"/>
           </a:xfrm>
           <a:prstGeom prst="rect">
             <a:avLst/>
@@ -6313,64 +8789,31 @@
           <a:p>
             <a:pPr algn="l"/>
             <a:r>
-              <a:rPr sz="1900" b="1" i="0">
-                <a:solidFill>
-                  <a:srgbClr val="03306E"/>
-                </a:solidFill>
-                <a:latin typeface="Calibri"/>
-              </a:rPr>
-              <a:t>Human characteristics</a:t>
-            </a:r>
-          </a:p>
-        </p:txBody>
-      </p:sp>
-      <p:sp>
-        <p:nvSpPr>
-          <p:cNvPr id="9" name="TextBox 8"/>
-          <p:cNvSpPr txBox="1"/>
-          <p:nvPr/>
-        </p:nvSpPr>
-        <p:spPr>
-          <a:xfrm>
-            <a:off x="777240" y="2468880"/>
-            <a:ext cx="4952847" cy="1143000"/>
-          </a:xfrm>
-          <a:prstGeom prst="rect">
-            <a:avLst/>
-          </a:prstGeom>
-          <a:noFill/>
-        </p:spPr>
-        <p:txBody>
-          <a:bodyPr wrap="square" anchor="t" lIns="0" rIns="0" tIns="0" bIns="0"/>
-          <a:lstStyle/>
-          <a:p>
-            <a:pPr algn="l"/>
-            <a:r>
-              <a:rPr sz="2000" b="0" i="0">
-                <a:solidFill>
-                  <a:srgbClr val="202122"/>
-                </a:solidFill>
-                <a:latin typeface="Calibri"/>
-              </a:rPr>
-              <a:t>Physical and mental capabilities and limits.</a:t>
-            </a:r>
-          </a:p>
-        </p:txBody>
-      </p:sp>
-      <p:sp>
-        <p:nvSpPr>
-          <p:cNvPr id="10" name="Rounded Rectangle 9"/>
+              <a:rPr sz="2000" b="1" i="0">
+                <a:solidFill>
+                  <a:srgbClr val="FFFFFF"/>
+                </a:solidFill>
+                <a:latin typeface="Calibri"/>
+              </a:rPr>
+              <a:t>Why it matters</a:t>
+            </a:r>
+          </a:p>
+        </p:txBody>
+      </p:sp>
+      <p:sp>
+        <p:nvSpPr>
+          <p:cNvPr id="12" name="Rounded Rectangle 11"/>
           <p:cNvSpPr/>
           <p:nvPr/>
         </p:nvSpPr>
         <p:spPr>
           <a:xfrm>
-            <a:off x="6233007" y="1600200"/>
-            <a:ext cx="5410047" cy="2148840"/>
+            <a:off x="6278727" y="2377440"/>
+            <a:ext cx="5364327" cy="3794760"/>
           </a:xfrm>
           <a:prstGeom prst="roundRect">
             <a:avLst>
-              <a:gd name="adj" fmla="val 6000"/>
+              <a:gd name="adj" fmla="val 4000"/>
             </a:avLst>
           </a:prstGeom>
           <a:solidFill>
@@ -6403,100 +8846,14 @@
       </p:sp>
       <p:sp>
         <p:nvSpPr>
-          <p:cNvPr id="11" name="Oval 10"/>
-          <p:cNvSpPr/>
-          <p:nvPr/>
-        </p:nvSpPr>
-        <p:spPr>
-          <a:xfrm>
-            <a:off x="6461607" y="1828800"/>
-            <a:ext cx="457200" cy="457200"/>
-          </a:xfrm>
-          <a:prstGeom prst="ellipse">
-            <a:avLst/>
-          </a:prstGeom>
-          <a:solidFill>
-            <a:srgbClr val="F2B705"/>
-          </a:solidFill>
-          <a:ln>
-            <a:noFill/>
-          </a:ln>
-          <a:effectLst/>
-        </p:spPr>
-        <p:style>
-          <a:lnRef idx="1">
-            <a:schemeClr val="accent1"/>
-          </a:lnRef>
-          <a:fillRef idx="3">
-            <a:schemeClr val="accent1"/>
-          </a:fillRef>
-          <a:effectRef idx="2">
-            <a:schemeClr val="accent1"/>
-          </a:effectRef>
-          <a:fontRef idx="minor">
-            <a:schemeClr val="lt1"/>
-          </a:fontRef>
-        </p:style>
-        <p:txBody>
-          <a:bodyPr rtlCol="0" anchor="ctr" lIns="0" rIns="0" tIns="0" bIns="0"/>
-          <a:lstStyle/>
-          <a:p>
-            <a:pPr algn="ctr"/>
-            <a:r>
-              <a:rPr sz="1500" b="1">
-                <a:solidFill>
-                  <a:srgbClr val="202122"/>
-                </a:solidFill>
-                <a:latin typeface="Calibri"/>
-              </a:rPr>
-              <a:t>2</a:t>
-            </a:r>
-          </a:p>
-        </p:txBody>
-      </p:sp>
-      <p:sp>
-        <p:nvSpPr>
-          <p:cNvPr id="12" name="TextBox 11"/>
-          <p:cNvSpPr txBox="1"/>
-          <p:nvPr/>
-        </p:nvSpPr>
-        <p:spPr>
-          <a:xfrm>
-            <a:off x="7055967" y="1801368"/>
-            <a:ext cx="4404207" cy="512064"/>
-          </a:xfrm>
-          <a:prstGeom prst="rect">
-            <a:avLst/>
-          </a:prstGeom>
-          <a:noFill/>
-        </p:spPr>
-        <p:txBody>
-          <a:bodyPr wrap="square" anchor="ctr" lIns="0" rIns="0" tIns="0" bIns="0"/>
-          <a:lstStyle/>
-          <a:p>
-            <a:pPr algn="l"/>
-            <a:r>
-              <a:rPr sz="1900" b="1" i="0">
-                <a:solidFill>
-                  <a:srgbClr val="03306E"/>
-                </a:solidFill>
-                <a:latin typeface="Calibri"/>
-              </a:rPr>
-              <a:t>Workplace design</a:t>
-            </a:r>
-          </a:p>
-        </p:txBody>
-      </p:sp>
-      <p:sp>
-        <p:nvSpPr>
           <p:cNvPr id="13" name="TextBox 12"/>
           <p:cNvSpPr txBox="1"/>
           <p:nvPr/>
         </p:nvSpPr>
         <p:spPr>
           <a:xfrm>
-            <a:off x="6461607" y="2468880"/>
-            <a:ext cx="4952847" cy="1143000"/>
+            <a:off x="6553047" y="2606040"/>
+            <a:ext cx="4815687" cy="3337560"/>
           </a:xfrm>
           <a:prstGeom prst="rect">
             <a:avLst/>
@@ -6504,344 +8861,92 @@
           <a:noFill/>
         </p:spPr>
         <p:txBody>
-          <a:bodyPr wrap="square" anchor="t" lIns="0" rIns="0" tIns="0" bIns="0"/>
-          <a:lstStyle/>
-          <a:p>
-            <a:pPr algn="l"/>
-            <a:r>
-              <a:rPr sz="2000" b="0" i="0">
+          <a:bodyPr wrap="square" lIns="0" rIns="0" tIns="0" bIns="0">
+            <a:spAutoFit/>
+          </a:bodyPr>
+          <a:lstStyle/>
+          <a:p>
+            <a:pPr marL="274320" indent="-274320">
+              <a:spcAft>
+                <a:spcPts val="990"/>
+              </a:spcAft>
+              <a:buClr>
+                <a:srgbClr val="0645AD"/>
+              </a:buClr>
+              <a:buFont typeface="Arial"/>
+              <a:buChar char="•"/>
+            </a:pPr>
+            <a:r>
+              <a:rPr sz="2200" b="0">
                 <a:solidFill>
                   <a:srgbClr val="202122"/>
                 </a:solidFill>
                 <a:latin typeface="Calibri"/>
               </a:rPr>
-              <a:t>Affects safety, comfort and productivity.</a:t>
-            </a:r>
-          </a:p>
-        </p:txBody>
-      </p:sp>
-      <p:sp>
-        <p:nvSpPr>
-          <p:cNvPr id="14" name="Rounded Rectangle 13"/>
-          <p:cNvSpPr/>
-          <p:nvPr/>
-        </p:nvSpPr>
-        <p:spPr>
-          <a:xfrm>
-            <a:off x="548640" y="4023360"/>
-            <a:ext cx="5410047" cy="2148840"/>
-          </a:xfrm>
-          <a:prstGeom prst="roundRect">
-            <a:avLst>
-              <a:gd name="adj" fmla="val 6000"/>
-            </a:avLst>
-          </a:prstGeom>
-          <a:solidFill>
-            <a:srgbClr val="EAF3FF"/>
-          </a:solidFill>
-          <a:ln>
-            <a:noFill/>
-          </a:ln>
-          <a:effectLst/>
-        </p:spPr>
-        <p:style>
-          <a:lnRef idx="1">
-            <a:schemeClr val="accent1"/>
-          </a:lnRef>
-          <a:fillRef idx="3">
-            <a:schemeClr val="accent1"/>
-          </a:fillRef>
-          <a:effectRef idx="2">
-            <a:schemeClr val="accent1"/>
-          </a:effectRef>
-          <a:fontRef idx="minor">
-            <a:schemeClr val="lt1"/>
-          </a:fontRef>
-        </p:style>
-        <p:txBody>
-          <a:bodyPr rtlCol="0" anchor="ctr"/>
-          <a:lstStyle/>
-          <a:p/>
-        </p:txBody>
-      </p:sp>
-      <p:sp>
-        <p:nvSpPr>
-          <p:cNvPr id="15" name="Oval 14"/>
-          <p:cNvSpPr/>
-          <p:nvPr/>
-        </p:nvSpPr>
-        <p:spPr>
-          <a:xfrm>
-            <a:off x="777240" y="4251960"/>
-            <a:ext cx="457200" cy="457200"/>
-          </a:xfrm>
-          <a:prstGeom prst="ellipse">
-            <a:avLst/>
-          </a:prstGeom>
-          <a:solidFill>
-            <a:srgbClr val="F2B705"/>
-          </a:solidFill>
-          <a:ln>
-            <a:noFill/>
-          </a:ln>
-          <a:effectLst/>
-        </p:spPr>
-        <p:style>
-          <a:lnRef idx="1">
-            <a:schemeClr val="accent1"/>
-          </a:lnRef>
-          <a:fillRef idx="3">
-            <a:schemeClr val="accent1"/>
-          </a:fillRef>
-          <a:effectRef idx="2">
-            <a:schemeClr val="accent1"/>
-          </a:effectRef>
-          <a:fontRef idx="minor">
-            <a:schemeClr val="lt1"/>
-          </a:fontRef>
-        </p:style>
-        <p:txBody>
-          <a:bodyPr rtlCol="0" anchor="ctr" lIns="0" rIns="0" tIns="0" bIns="0"/>
-          <a:lstStyle/>
-          <a:p>
-            <a:pPr algn="ctr"/>
-            <a:r>
-              <a:rPr sz="1500" b="1">
+              <a:t>Motivates staff</a:t>
+            </a:r>
+          </a:p>
+          <a:p>
+            <a:pPr marL="274320" indent="-274320">
+              <a:spcAft>
+                <a:spcPts val="990"/>
+              </a:spcAft>
+              <a:buClr>
+                <a:srgbClr val="0645AD"/>
+              </a:buClr>
+              <a:buFont typeface="Arial"/>
+              <a:buChar char="•"/>
+            </a:pPr>
+            <a:r>
+              <a:rPr sz="2200" b="0">
                 <a:solidFill>
                   <a:srgbClr val="202122"/>
                 </a:solidFill>
                 <a:latin typeface="Calibri"/>
               </a:rPr>
-              <a:t>3</a:t>
-            </a:r>
-          </a:p>
-        </p:txBody>
-      </p:sp>
-      <p:sp>
-        <p:nvSpPr>
-          <p:cNvPr id="16" name="TextBox 15"/>
-          <p:cNvSpPr txBox="1"/>
-          <p:nvPr/>
-        </p:nvSpPr>
-        <p:spPr>
-          <a:xfrm>
-            <a:off x="1371600" y="4224528"/>
-            <a:ext cx="4404207" cy="512064"/>
-          </a:xfrm>
-          <a:prstGeom prst="rect">
-            <a:avLst/>
-          </a:prstGeom>
-          <a:noFill/>
-        </p:spPr>
-        <p:txBody>
-          <a:bodyPr wrap="square" anchor="ctr" lIns="0" rIns="0" tIns="0" bIns="0"/>
-          <a:lstStyle/>
-          <a:p>
-            <a:pPr algn="l"/>
-            <a:r>
-              <a:rPr sz="1900" b="1" i="0">
-                <a:solidFill>
-                  <a:srgbClr val="03306E"/>
-                </a:solidFill>
-                <a:latin typeface="Calibri"/>
-              </a:rPr>
-              <a:t>Causes of error</a:t>
-            </a:r>
-          </a:p>
-        </p:txBody>
-      </p:sp>
-      <p:sp>
-        <p:nvSpPr>
-          <p:cNvPr id="17" name="TextBox 16"/>
-          <p:cNvSpPr txBox="1"/>
-          <p:nvPr/>
-        </p:nvSpPr>
-        <p:spPr>
-          <a:xfrm>
-            <a:off x="777240" y="4892040"/>
-            <a:ext cx="4952847" cy="1143000"/>
-          </a:xfrm>
-          <a:prstGeom prst="rect">
-            <a:avLst/>
-          </a:prstGeom>
-          <a:noFill/>
-        </p:spPr>
-        <p:txBody>
-          <a:bodyPr wrap="square" anchor="t" lIns="0" rIns="0" tIns="0" bIns="0"/>
-          <a:lstStyle/>
-          <a:p>
-            <a:pPr algn="l"/>
-            <a:r>
-              <a:rPr sz="2000" b="0" i="0">
+              <a:t>Improves performance</a:t>
+            </a:r>
+          </a:p>
+          <a:p>
+            <a:pPr marL="274320" indent="-274320">
+              <a:spcAft>
+                <a:spcPts val="990"/>
+              </a:spcAft>
+              <a:buClr>
+                <a:srgbClr val="0645AD"/>
+              </a:buClr>
+              <a:buFont typeface="Arial"/>
+              <a:buChar char="•"/>
+            </a:pPr>
+            <a:r>
+              <a:rPr sz="2200" b="0">
                 <a:solidFill>
                   <a:srgbClr val="202122"/>
                 </a:solidFill>
                 <a:latin typeface="Calibri"/>
               </a:rPr>
-              <a:t>Insufficient training, fatigue, workload, stress.</a:t>
-            </a:r>
-          </a:p>
-        </p:txBody>
-      </p:sp>
-      <p:sp>
-        <p:nvSpPr>
-          <p:cNvPr id="18" name="Rounded Rectangle 17"/>
-          <p:cNvSpPr/>
-          <p:nvPr/>
-        </p:nvSpPr>
-        <p:spPr>
-          <a:xfrm>
-            <a:off x="6233007" y="4023360"/>
-            <a:ext cx="5410047" cy="2148840"/>
-          </a:xfrm>
-          <a:prstGeom prst="roundRect">
-            <a:avLst>
-              <a:gd name="adj" fmla="val 6000"/>
-            </a:avLst>
-          </a:prstGeom>
-          <a:solidFill>
-            <a:srgbClr val="EAF3FF"/>
-          </a:solidFill>
-          <a:ln>
-            <a:noFill/>
-          </a:ln>
-          <a:effectLst/>
-        </p:spPr>
-        <p:style>
-          <a:lnRef idx="1">
-            <a:schemeClr val="accent1"/>
-          </a:lnRef>
-          <a:fillRef idx="3">
-            <a:schemeClr val="accent1"/>
-          </a:fillRef>
-          <a:effectRef idx="2">
-            <a:schemeClr val="accent1"/>
-          </a:effectRef>
-          <a:fontRef idx="minor">
-            <a:schemeClr val="lt1"/>
-          </a:fontRef>
-        </p:style>
-        <p:txBody>
-          <a:bodyPr rtlCol="0" anchor="ctr"/>
-          <a:lstStyle/>
-          <a:p/>
-        </p:txBody>
-      </p:sp>
-      <p:sp>
-        <p:nvSpPr>
-          <p:cNvPr id="19" name="Oval 18"/>
-          <p:cNvSpPr/>
-          <p:nvPr/>
-        </p:nvSpPr>
-        <p:spPr>
-          <a:xfrm>
-            <a:off x="6461607" y="4251960"/>
-            <a:ext cx="457200" cy="457200"/>
-          </a:xfrm>
-          <a:prstGeom prst="ellipse">
-            <a:avLst/>
-          </a:prstGeom>
-          <a:solidFill>
-            <a:srgbClr val="F2B705"/>
-          </a:solidFill>
-          <a:ln>
-            <a:noFill/>
-          </a:ln>
-          <a:effectLst/>
-        </p:spPr>
-        <p:style>
-          <a:lnRef idx="1">
-            <a:schemeClr val="accent1"/>
-          </a:lnRef>
-          <a:fillRef idx="3">
-            <a:schemeClr val="accent1"/>
-          </a:fillRef>
-          <a:effectRef idx="2">
-            <a:schemeClr val="accent1"/>
-          </a:effectRef>
-          <a:fontRef idx="minor">
-            <a:schemeClr val="lt1"/>
-          </a:fontRef>
-        </p:style>
-        <p:txBody>
-          <a:bodyPr rtlCol="0" anchor="ctr" lIns="0" rIns="0" tIns="0" bIns="0"/>
-          <a:lstStyle/>
-          <a:p>
-            <a:pPr algn="ctr"/>
-            <a:r>
-              <a:rPr sz="1500" b="1">
+              <a:t>Keeps skills current</a:t>
+            </a:r>
+          </a:p>
+          <a:p>
+            <a:pPr marL="274320" indent="-274320">
+              <a:spcAft>
+                <a:spcPts val="990"/>
+              </a:spcAft>
+              <a:buClr>
+                <a:srgbClr val="0645AD"/>
+              </a:buClr>
+              <a:buFont typeface="Arial"/>
+              <a:buChar char="•"/>
+            </a:pPr>
+            <a:r>
+              <a:rPr sz="2200" b="0">
                 <a:solidFill>
                   <a:srgbClr val="202122"/>
                 </a:solidFill>
                 <a:latin typeface="Calibri"/>
               </a:rPr>
-              <a:t>4</a:t>
-            </a:r>
-          </a:p>
-        </p:txBody>
-      </p:sp>
-      <p:sp>
-        <p:nvSpPr>
-          <p:cNvPr id="20" name="TextBox 19"/>
-          <p:cNvSpPr txBox="1"/>
-          <p:nvPr/>
-        </p:nvSpPr>
-        <p:spPr>
-          <a:xfrm>
-            <a:off x="7055967" y="4224528"/>
-            <a:ext cx="4404207" cy="512064"/>
-          </a:xfrm>
-          <a:prstGeom prst="rect">
-            <a:avLst/>
-          </a:prstGeom>
-          <a:noFill/>
-        </p:spPr>
-        <p:txBody>
-          <a:bodyPr wrap="square" anchor="ctr" lIns="0" rIns="0" tIns="0" bIns="0"/>
-          <a:lstStyle/>
-          <a:p>
-            <a:pPr algn="l"/>
-            <a:r>
-              <a:rPr sz="1900" b="1" i="0">
-                <a:solidFill>
-                  <a:srgbClr val="03306E"/>
-                </a:solidFill>
-                <a:latin typeface="Calibri"/>
-              </a:rPr>
-              <a:t>Reducing error</a:t>
-            </a:r>
-          </a:p>
-        </p:txBody>
-      </p:sp>
-      <p:sp>
-        <p:nvSpPr>
-          <p:cNvPr id="21" name="TextBox 20"/>
-          <p:cNvSpPr txBox="1"/>
-          <p:nvPr/>
-        </p:nvSpPr>
-        <p:spPr>
-          <a:xfrm>
-            <a:off x="6461607" y="4892040"/>
-            <a:ext cx="4952847" cy="1143000"/>
-          </a:xfrm>
-          <a:prstGeom prst="rect">
-            <a:avLst/>
-          </a:prstGeom>
-          <a:noFill/>
-        </p:spPr>
-        <p:txBody>
-          <a:bodyPr wrap="square" anchor="t" lIns="0" rIns="0" tIns="0" bIns="0"/>
-          <a:lstStyle/>
-          <a:p>
-            <a:pPr algn="l"/>
-            <a:r>
-              <a:rPr sz="2000" b="0" i="0">
-                <a:solidFill>
-                  <a:srgbClr val="202122"/>
-                </a:solidFill>
-                <a:latin typeface="Calibri"/>
-              </a:rPr>
-              <a:t>Training, rest breaks, clear procedures, good design, error-proofing.</a:t>
+              <a:t>Leads to Engineering Council registration (EngTech, IEng, CEng)</a:t>
             </a:r>
           </a:p>
         </p:txBody>
@@ -6933,7 +9038,7 @@
                 </a:solidFill>
                 <a:latin typeface="Cambria"/>
               </a:rPr>
-              <a:t>Check your understanding</a:t>
+              <a:t>Quick check: CPD and professional recognition</a:t>
             </a:r>
           </a:p>
         </p:txBody>
@@ -7012,8 +9117,8 @@
         </p:nvSpPr>
         <p:spPr>
           <a:xfrm>
-            <a:off x="548640" y="1618488"/>
-            <a:ext cx="411480" cy="411480"/>
+            <a:off x="548640" y="1691640"/>
+            <a:ext cx="502920" cy="502920"/>
           </a:xfrm>
           <a:prstGeom prst="ellipse">
             <a:avLst/>
@@ -7046,7 +9151,7 @@
           <a:p>
             <a:pPr algn="ctr"/>
             <a:r>
-              <a:rPr sz="1400" b="1">
+              <a:rPr sz="1600" b="1">
                 <a:solidFill>
                   <a:srgbClr val="202122"/>
                 </a:solidFill>
@@ -7065,8 +9170,8 @@
         </p:nvSpPr>
         <p:spPr>
           <a:xfrm>
-            <a:off x="1234440" y="1600200"/>
-            <a:ext cx="10408615" cy="1030986"/>
+            <a:off x="1371600" y="1645920"/>
+            <a:ext cx="10271455" cy="1188720"/>
           </a:xfrm>
           <a:prstGeom prst="rect">
             <a:avLst/>
@@ -7079,7 +9184,7 @@
           <a:p>
             <a:pPr algn="l"/>
             <a:r>
-              <a:rPr sz="2200" b="0" i="0">
+              <a:rPr sz="2400" b="0" i="0">
                 <a:solidFill>
                   <a:srgbClr val="202122"/>
                 </a:solidFill>
@@ -7098,8 +9203,8 @@
         </p:nvSpPr>
         <p:spPr>
           <a:xfrm>
-            <a:off x="548640" y="2814066"/>
-            <a:ext cx="411480" cy="411480"/>
+            <a:off x="548640" y="3108960"/>
+            <a:ext cx="502920" cy="502920"/>
           </a:xfrm>
           <a:prstGeom prst="ellipse">
             <a:avLst/>
@@ -7132,7 +9237,7 @@
           <a:p>
             <a:pPr algn="ctr"/>
             <a:r>
-              <a:rPr sz="1400" b="1">
+              <a:rPr sz="1600" b="1">
                 <a:solidFill>
                   <a:srgbClr val="202122"/>
                 </a:solidFill>
@@ -7151,8 +9256,8 @@
         </p:nvSpPr>
         <p:spPr>
           <a:xfrm>
-            <a:off x="1234440" y="2795778"/>
-            <a:ext cx="10408615" cy="1030986"/>
+            <a:off x="1371600" y="3063240"/>
+            <a:ext cx="10271455" cy="1188720"/>
           </a:xfrm>
           <a:prstGeom prst="rect">
             <a:avLst/>
@@ -7165,13 +9270,13 @@
           <a:p>
             <a:pPr algn="l"/>
             <a:r>
-              <a:rPr sz="2200" b="0" i="0">
+              <a:rPr sz="2400" b="0" i="0">
                 <a:solidFill>
                   <a:srgbClr val="202122"/>
                 </a:solidFill>
                 <a:latin typeface="Calibri"/>
               </a:rPr>
-              <a:t>Who sets professional standards for engineers in the UK?</a:t>
+              <a:t>Who sets professional standards for UK engineers?</a:t>
             </a:r>
           </a:p>
         </p:txBody>
@@ -7184,8 +9289,8 @@
         </p:nvSpPr>
         <p:spPr>
           <a:xfrm>
-            <a:off x="548640" y="4009644"/>
-            <a:ext cx="411480" cy="411480"/>
+            <a:off x="548640" y="4526280"/>
+            <a:ext cx="502920" cy="502920"/>
           </a:xfrm>
           <a:prstGeom prst="ellipse">
             <a:avLst/>
@@ -7218,7 +9323,7 @@
           <a:p>
             <a:pPr algn="ctr"/>
             <a:r>
-              <a:rPr sz="1400" b="1">
+              <a:rPr sz="1600" b="1">
                 <a:solidFill>
                   <a:srgbClr val="202122"/>
                 </a:solidFill>
@@ -7237,8 +9342,8 @@
         </p:nvSpPr>
         <p:spPr>
           <a:xfrm>
-            <a:off x="1234440" y="3991356"/>
-            <a:ext cx="10408615" cy="1030986"/>
+            <a:off x="1371600" y="4480560"/>
+            <a:ext cx="10271455" cy="1188720"/>
           </a:xfrm>
           <a:prstGeom prst="rect">
             <a:avLst/>
@@ -7251,80 +9356,27 @@
           <a:p>
             <a:pPr algn="l"/>
             <a:r>
-              <a:rPr sz="2200" b="0" i="0">
+              <a:rPr sz="2400" b="0" i="0">
                 <a:solidFill>
                   <a:srgbClr val="202122"/>
                 </a:solidFill>
                 <a:latin typeface="Calibri"/>
               </a:rPr>
-              <a:t>Name two causes of human error.</a:t>
-            </a:r>
-          </a:p>
-        </p:txBody>
-      </p:sp>
-      <p:sp>
-        <p:nvSpPr>
-          <p:cNvPr id="12" name="Oval 11"/>
-          <p:cNvSpPr/>
-          <p:nvPr/>
-        </p:nvSpPr>
-        <p:spPr>
-          <a:xfrm>
-            <a:off x="548640" y="5205221"/>
-            <a:ext cx="411480" cy="411480"/>
-          </a:xfrm>
-          <a:prstGeom prst="ellipse">
-            <a:avLst/>
-          </a:prstGeom>
-          <a:solidFill>
-            <a:srgbClr val="F2B705"/>
-          </a:solidFill>
-          <a:ln>
-            <a:noFill/>
-          </a:ln>
-          <a:effectLst/>
-        </p:spPr>
-        <p:style>
-          <a:lnRef idx="1">
-            <a:schemeClr val="accent1"/>
-          </a:lnRef>
-          <a:fillRef idx="3">
-            <a:schemeClr val="accent1"/>
-          </a:fillRef>
-          <a:effectRef idx="2">
-            <a:schemeClr val="accent1"/>
-          </a:effectRef>
-          <a:fontRef idx="minor">
-            <a:schemeClr val="lt1"/>
-          </a:fontRef>
-        </p:style>
-        <p:txBody>
-          <a:bodyPr rtlCol="0" anchor="ctr" lIns="0" rIns="0" tIns="0" bIns="0"/>
-          <a:lstStyle/>
-          <a:p>
-            <a:pPr algn="ctr"/>
-            <a:r>
-              <a:rPr sz="1400" b="1">
-                <a:solidFill>
-                  <a:srgbClr val="202122"/>
-                </a:solidFill>
-                <a:latin typeface="Calibri"/>
-              </a:rPr>
-              <a:t>4</a:t>
-            </a:r>
-          </a:p>
-        </p:txBody>
-      </p:sp>
-      <p:sp>
-        <p:nvSpPr>
-          <p:cNvPr id="13" name="TextBox 12"/>
+              <a:t>Name one professional registration level.</a:t>
+            </a:r>
+          </a:p>
+        </p:txBody>
+      </p:sp>
+      <p:sp>
+        <p:nvSpPr>
+          <p:cNvPr id="12" name="TextBox 11"/>
           <p:cNvSpPr txBox="1"/>
           <p:nvPr/>
         </p:nvSpPr>
         <p:spPr>
           <a:xfrm>
-            <a:off x="1234440" y="5186933"/>
-            <a:ext cx="10408615" cy="1030986"/>
+            <a:off x="548640" y="5852160"/>
+            <a:ext cx="11094415" cy="365760"/>
           </a:xfrm>
           <a:prstGeom prst="rect">
             <a:avLst/>
@@ -7337,13 +9389,13 @@
           <a:p>
             <a:pPr algn="l"/>
             <a:r>
-              <a:rPr sz="2200" b="0" i="0">
-                <a:solidFill>
-                  <a:srgbClr val="202122"/>
-                </a:solidFill>
-                <a:latin typeface="Calibri"/>
-              </a:rPr>
-              <a:t>What is the purpose of a job description?</a:t>
+              <a:rPr sz="1300" b="0" i="1">
+                <a:solidFill>
+                  <a:srgbClr val="54595D"/>
+                </a:solidFill>
+                <a:latin typeface="Calibri"/>
+              </a:rPr>
+              <a:t>Answer on mini whiteboards or in your book. Answers are in the speaker notes.</a:t>
             </a:r>
           </a:p>
         </p:txBody>
@@ -7435,7 +9487,7 @@
                 </a:solidFill>
                 <a:latin typeface="Cambria"/>
               </a:rPr>
-              <a:t>Answers</a:t>
+              <a:t>Human factors</a:t>
             </a:r>
           </a:p>
         </p:txBody>
@@ -7508,14 +9560,129 @@
       </p:sp>
       <p:sp>
         <p:nvSpPr>
-          <p:cNvPr id="6" name="Oval 5"/>
+          <p:cNvPr id="6" name="TextBox 5"/>
+          <p:cNvSpPr txBox="1"/>
+          <p:nvPr/>
+        </p:nvSpPr>
+        <p:spPr>
+          <a:xfrm>
+            <a:off x="548640" y="1554480"/>
+            <a:ext cx="6720840" cy="4617720"/>
+          </a:xfrm>
+          <a:prstGeom prst="rect">
+            <a:avLst/>
+          </a:prstGeom>
+          <a:noFill/>
+        </p:spPr>
+        <p:txBody>
+          <a:bodyPr wrap="square" lIns="0" rIns="0" tIns="0" bIns="0">
+            <a:spAutoFit/>
+          </a:bodyPr>
+          <a:lstStyle/>
+          <a:p>
+            <a:pPr>
+              <a:spcAft>
+                <a:spcPts val="1320"/>
+              </a:spcAft>
+            </a:pPr>
+            <a:r>
+              <a:rPr sz="2200" b="0">
+                <a:solidFill>
+                  <a:srgbClr val="202122"/>
+                </a:solidFill>
+                <a:latin typeface="Calibri"/>
+              </a:rPr>
+              <a:t>Human factors are the ways people's physical and mental abilities and limits affect work.</a:t>
+            </a:r>
+          </a:p>
+          <a:p>
+            <a:pPr>
+              <a:spcAft>
+                <a:spcPts val="1320"/>
+              </a:spcAft>
+            </a:pPr>
+            <a:r>
+              <a:rPr sz="2200" b="0">
+                <a:solidFill>
+                  <a:srgbClr val="202122"/>
+                </a:solidFill>
+                <a:latin typeface="Calibri"/>
+              </a:rPr>
+              <a:t>Workplace design affects safety, comfort and productivity: badly placed controls, poor lighting or awkward postures cause mistakes and injuries.</a:t>
+            </a:r>
+          </a:p>
+          <a:p>
+            <a:pPr>
+              <a:spcAft>
+                <a:spcPts val="1320"/>
+              </a:spcAft>
+            </a:pPr>
+            <a:r>
+              <a:rPr sz="2200" b="0">
+                <a:solidFill>
+                  <a:srgbClr val="202122"/>
+                </a:solidFill>
+                <a:latin typeface="Calibri"/>
+              </a:rPr>
+              <a:t>Human error is often caused by insufficient training, fatigue, heavy workload and stress. It's reduced by good training, sensible shift patterns, clear procedures, well-designed workplaces and error-proofing (designs that make mistakes impossible).</a:t>
+            </a:r>
+          </a:p>
+        </p:txBody>
+      </p:sp>
+      <p:sp>
+        <p:nvSpPr>
+          <p:cNvPr id="7" name="Rounded Rectangle 6"/>
           <p:cNvSpPr/>
           <p:nvPr/>
         </p:nvSpPr>
         <p:spPr>
           <a:xfrm>
-            <a:off x="548640" y="1618488"/>
-            <a:ext cx="411480" cy="411480"/>
+            <a:off x="7772400" y="1554480"/>
+            <a:ext cx="3867912" cy="4526280"/>
+          </a:xfrm>
+          <a:prstGeom prst="roundRect">
+            <a:avLst>
+              <a:gd name="adj" fmla="val 8000"/>
+            </a:avLst>
+          </a:prstGeom>
+          <a:solidFill>
+            <a:srgbClr val="03306E"/>
+          </a:solidFill>
+          <a:ln>
+            <a:noFill/>
+          </a:ln>
+          <a:effectLst/>
+        </p:spPr>
+        <p:style>
+          <a:lnRef idx="1">
+            <a:schemeClr val="accent1"/>
+          </a:lnRef>
+          <a:fillRef idx="3">
+            <a:schemeClr val="accent1"/>
+          </a:fillRef>
+          <a:effectRef idx="2">
+            <a:schemeClr val="accent1"/>
+          </a:effectRef>
+          <a:fontRef idx="minor">
+            <a:schemeClr val="lt1"/>
+          </a:fontRef>
+        </p:style>
+        <p:txBody>
+          <a:bodyPr rtlCol="0" anchor="ctr"/>
+          <a:lstStyle/>
+          <a:p/>
+        </p:txBody>
+      </p:sp>
+      <p:sp>
+        <p:nvSpPr>
+          <p:cNvPr id="8" name="Oval 7"/>
+          <p:cNvSpPr/>
+          <p:nvPr/>
+        </p:nvSpPr>
+        <p:spPr>
+          <a:xfrm>
+            <a:off x="8046720" y="1828800"/>
+            <a:ext cx="548640" cy="548640"/>
           </a:xfrm>
           <a:prstGeom prst="ellipse">
             <a:avLst/>
@@ -7548,110 +9715,13 @@
           <a:p>
             <a:pPr algn="ctr"/>
             <a:r>
-              <a:rPr sz="1400" b="1">
+              <a:rPr sz="1300" b="1">
                 <a:solidFill>
                   <a:srgbClr val="202122"/>
                 </a:solidFill>
                 <a:latin typeface="Calibri"/>
               </a:rPr>
-              <a:t>1</a:t>
-            </a:r>
-          </a:p>
-        </p:txBody>
-      </p:sp>
-      <p:sp>
-        <p:nvSpPr>
-          <p:cNvPr id="7" name="TextBox 6"/>
-          <p:cNvSpPr txBox="1"/>
-          <p:nvPr/>
-        </p:nvSpPr>
-        <p:spPr>
-          <a:xfrm>
-            <a:off x="1234440" y="1600200"/>
-            <a:ext cx="10408615" cy="1030986"/>
-          </a:xfrm>
-          <a:prstGeom prst="rect">
-            <a:avLst/>
-          </a:prstGeom>
-          <a:noFill/>
-        </p:spPr>
-        <p:txBody>
-          <a:bodyPr wrap="square" anchor="t" lIns="0" rIns="0" tIns="0" bIns="0"/>
-          <a:lstStyle/>
-          <a:p>
-            <a:pPr algn="l"/>
-            <a:r>
-              <a:rPr sz="1800" b="0" i="0">
-                <a:solidFill>
-                  <a:srgbClr val="54595D"/>
-                </a:solidFill>
-                <a:latin typeface="Calibri"/>
-              </a:rPr>
-              <a:t>What is CPD?</a:t>
-            </a:r>
-          </a:p>
-          <a:p>
-            <a:r>
-              <a:rPr sz="1800" b="1">
-                <a:solidFill>
-                  <a:srgbClr val="03306E"/>
-                </a:solidFill>
-                <a:latin typeface="Calibri"/>
-              </a:rPr>
-              <a:t>Continuous professional development: ongoing learning throughout a career.</a:t>
-            </a:r>
-          </a:p>
-        </p:txBody>
-      </p:sp>
-      <p:sp>
-        <p:nvSpPr>
-          <p:cNvPr id="8" name="Oval 7"/>
-          <p:cNvSpPr/>
-          <p:nvPr/>
-        </p:nvSpPr>
-        <p:spPr>
-          <a:xfrm>
-            <a:off x="548640" y="2814066"/>
-            <a:ext cx="411480" cy="411480"/>
-          </a:xfrm>
-          <a:prstGeom prst="ellipse">
-            <a:avLst/>
-          </a:prstGeom>
-          <a:solidFill>
-            <a:srgbClr val="F2B705"/>
-          </a:solidFill>
-          <a:ln>
-            <a:noFill/>
-          </a:ln>
-          <a:effectLst/>
-        </p:spPr>
-        <p:style>
-          <a:lnRef idx="1">
-            <a:schemeClr val="accent1"/>
-          </a:lnRef>
-          <a:fillRef idx="3">
-            <a:schemeClr val="accent1"/>
-          </a:fillRef>
-          <a:effectRef idx="2">
-            <a:schemeClr val="accent1"/>
-          </a:effectRef>
-          <a:fontRef idx="minor">
-            <a:schemeClr val="lt1"/>
-          </a:fontRef>
-        </p:style>
-        <p:txBody>
-          <a:bodyPr rtlCol="0" anchor="ctr" lIns="0" rIns="0" tIns="0" bIns="0"/>
-          <a:lstStyle/>
-          <a:p>
-            <a:pPr algn="ctr"/>
-            <a:r>
-              <a:rPr sz="1400" b="1">
-                <a:solidFill>
-                  <a:srgbClr val="202122"/>
-                </a:solidFill>
-                <a:latin typeface="Calibri"/>
-              </a:rPr>
-              <a:t>2</a:t>
+              <a:t>e.g.</a:t>
             </a:r>
           </a:p>
         </p:txBody>
@@ -7664,8 +9734,8 @@
         </p:nvSpPr>
         <p:spPr>
           <a:xfrm>
-            <a:off x="1234440" y="2795778"/>
-            <a:ext cx="10408615" cy="1030986"/>
+            <a:off x="8046720" y="2560320"/>
+            <a:ext cx="3291840" cy="365760"/>
           </a:xfrm>
           <a:prstGeom prst="rect">
             <a:avLst/>
@@ -7678,91 +9748,27 @@
           <a:p>
             <a:pPr algn="l"/>
             <a:r>
-              <a:rPr sz="1800" b="0" i="0">
-                <a:solidFill>
-                  <a:srgbClr val="54595D"/>
-                </a:solidFill>
-                <a:latin typeface="Calibri"/>
-              </a:rPr>
-              <a:t>Who sets professional standards for engineers in the UK?</a:t>
-            </a:r>
-          </a:p>
-          <a:p>
-            <a:r>
-              <a:rPr sz="1800" b="1">
-                <a:solidFill>
-                  <a:srgbClr val="03306E"/>
-                </a:solidFill>
-                <a:latin typeface="Calibri"/>
-              </a:rPr>
-              <a:t>The Engineering Council.</a:t>
-            </a:r>
-          </a:p>
-        </p:txBody>
-      </p:sp>
-      <p:sp>
-        <p:nvSpPr>
-          <p:cNvPr id="10" name="Oval 9"/>
-          <p:cNvSpPr/>
-          <p:nvPr/>
-        </p:nvSpPr>
-        <p:spPr>
-          <a:xfrm>
-            <a:off x="548640" y="4009644"/>
-            <a:ext cx="411480" cy="411480"/>
-          </a:xfrm>
-          <a:prstGeom prst="ellipse">
-            <a:avLst/>
-          </a:prstGeom>
-          <a:solidFill>
-            <a:srgbClr val="F2B705"/>
-          </a:solidFill>
-          <a:ln>
-            <a:noFill/>
-          </a:ln>
-          <a:effectLst/>
-        </p:spPr>
-        <p:style>
-          <a:lnRef idx="1">
-            <a:schemeClr val="accent1"/>
-          </a:lnRef>
-          <a:fillRef idx="3">
-            <a:schemeClr val="accent1"/>
-          </a:fillRef>
-          <a:effectRef idx="2">
-            <a:schemeClr val="accent1"/>
-          </a:effectRef>
-          <a:fontRef idx="minor">
-            <a:schemeClr val="lt1"/>
-          </a:fontRef>
-        </p:style>
-        <p:txBody>
-          <a:bodyPr rtlCol="0" anchor="ctr" lIns="0" rIns="0" tIns="0" bIns="0"/>
-          <a:lstStyle/>
-          <a:p>
-            <a:pPr algn="ctr"/>
-            <a:r>
-              <a:rPr sz="1400" b="1">
-                <a:solidFill>
-                  <a:srgbClr val="202122"/>
-                </a:solidFill>
-                <a:latin typeface="Calibri"/>
-              </a:rPr>
-              <a:t>3</a:t>
-            </a:r>
-          </a:p>
-        </p:txBody>
-      </p:sp>
-      <p:sp>
-        <p:nvSpPr>
-          <p:cNvPr id="11" name="TextBox 10"/>
+              <a:rPr sz="1300" b="1" i="0">
+                <a:solidFill>
+                  <a:srgbClr val="A9C8F0"/>
+                </a:solidFill>
+                <a:latin typeface="Calibri"/>
+              </a:rPr>
+              <a:t>EXAMPLE</a:t>
+            </a:r>
+          </a:p>
+        </p:txBody>
+      </p:sp>
+      <p:sp>
+        <p:nvSpPr>
+          <p:cNvPr id="10" name="TextBox 9"/>
           <p:cNvSpPr txBox="1"/>
           <p:nvPr/>
         </p:nvSpPr>
         <p:spPr>
           <a:xfrm>
-            <a:off x="1234440" y="3991356"/>
-            <a:ext cx="10408615" cy="1030986"/>
+            <a:off x="8046720" y="2971800"/>
+            <a:ext cx="3291840" cy="2971800"/>
           </a:xfrm>
           <a:prstGeom prst="rect">
             <a:avLst/>
@@ -7775,121 +9781,13 @@
           <a:p>
             <a:pPr algn="l"/>
             <a:r>
-              <a:rPr sz="1800" b="0" i="0">
-                <a:solidFill>
-                  <a:srgbClr val="54595D"/>
-                </a:solidFill>
-                <a:latin typeface="Calibri"/>
-              </a:rPr>
-              <a:t>Name two causes of human error.</a:t>
-            </a:r>
-          </a:p>
-          <a:p>
-            <a:r>
-              <a:rPr sz="1800" b="1">
-                <a:solidFill>
-                  <a:srgbClr val="03306E"/>
-                </a:solidFill>
-                <a:latin typeface="Calibri"/>
-              </a:rPr>
-              <a:t>Any two of: insufficient training, fatigue, workload, stress.</a:t>
-            </a:r>
-          </a:p>
-        </p:txBody>
-      </p:sp>
-      <p:sp>
-        <p:nvSpPr>
-          <p:cNvPr id="12" name="Oval 11"/>
-          <p:cNvSpPr/>
-          <p:nvPr/>
-        </p:nvSpPr>
-        <p:spPr>
-          <a:xfrm>
-            <a:off x="548640" y="5205221"/>
-            <a:ext cx="411480" cy="411480"/>
-          </a:xfrm>
-          <a:prstGeom prst="ellipse">
-            <a:avLst/>
-          </a:prstGeom>
-          <a:solidFill>
-            <a:srgbClr val="F2B705"/>
-          </a:solidFill>
-          <a:ln>
-            <a:noFill/>
-          </a:ln>
-          <a:effectLst/>
-        </p:spPr>
-        <p:style>
-          <a:lnRef idx="1">
-            <a:schemeClr val="accent1"/>
-          </a:lnRef>
-          <a:fillRef idx="3">
-            <a:schemeClr val="accent1"/>
-          </a:fillRef>
-          <a:effectRef idx="2">
-            <a:schemeClr val="accent1"/>
-          </a:effectRef>
-          <a:fontRef idx="minor">
-            <a:schemeClr val="lt1"/>
-          </a:fontRef>
-        </p:style>
-        <p:txBody>
-          <a:bodyPr rtlCol="0" anchor="ctr" lIns="0" rIns="0" tIns="0" bIns="0"/>
-          <a:lstStyle/>
-          <a:p>
-            <a:pPr algn="ctr"/>
-            <a:r>
-              <a:rPr sz="1400" b="1">
-                <a:solidFill>
-                  <a:srgbClr val="202122"/>
-                </a:solidFill>
-                <a:latin typeface="Calibri"/>
-              </a:rPr>
-              <a:t>4</a:t>
-            </a:r>
-          </a:p>
-        </p:txBody>
-      </p:sp>
-      <p:sp>
-        <p:nvSpPr>
-          <p:cNvPr id="13" name="TextBox 12"/>
-          <p:cNvSpPr txBox="1"/>
-          <p:nvPr/>
-        </p:nvSpPr>
-        <p:spPr>
-          <a:xfrm>
-            <a:off x="1234440" y="5186933"/>
-            <a:ext cx="10408615" cy="1030986"/>
-          </a:xfrm>
-          <a:prstGeom prst="rect">
-            <a:avLst/>
-          </a:prstGeom>
-          <a:noFill/>
-        </p:spPr>
-        <p:txBody>
-          <a:bodyPr wrap="square" anchor="t" lIns="0" rIns="0" tIns="0" bIns="0"/>
-          <a:lstStyle/>
-          <a:p>
-            <a:pPr algn="l"/>
-            <a:r>
-              <a:rPr sz="1800" b="0" i="0">
-                <a:solidFill>
-                  <a:srgbClr val="54595D"/>
-                </a:solidFill>
-                <a:latin typeface="Calibri"/>
-              </a:rPr>
-              <a:t>What is the purpose of a job description?</a:t>
-            </a:r>
-          </a:p>
-          <a:p>
-            <a:r>
-              <a:rPr sz="1800" b="1">
-                <a:solidFill>
-                  <a:srgbClr val="03306E"/>
-                </a:solidFill>
-                <a:latin typeface="Calibri"/>
-              </a:rPr>
-              <a:t>To set out the role's duties and responsibilities.</a:t>
+              <a:rPr sz="1900" b="0" i="0">
+                <a:solidFill>
+                  <a:srgbClr val="FFFFFF"/>
+                </a:solidFill>
+                <a:latin typeface="Cambria"/>
+              </a:rPr>
+              <a:t>A connector that only fits one way round (error-proofing) prevents the mistake entirely, which is better than a warning in the manual.</a:t>
             </a:r>
           </a:p>
         </p:txBody>
@@ -7981,7 +9879,7 @@
                 </a:solidFill>
                 <a:latin typeface="Cambria"/>
               </a:rPr>
-              <a:t>Activity: Error-proof the job</a:t>
+              <a:t>Human factors</a:t>
             </a:r>
           </a:p>
         </p:txBody>
@@ -8060,13 +9958,55 @@
         </p:nvSpPr>
         <p:spPr>
           <a:xfrm>
-            <a:off x="548640" y="1508760"/>
-            <a:ext cx="2011680" cy="457200"/>
+            <a:off x="548640" y="1600200"/>
+            <a:ext cx="5410047" cy="2148840"/>
           </a:xfrm>
           <a:prstGeom prst="roundRect">
             <a:avLst>
-              <a:gd name="adj" fmla="val 50000"/>
+              <a:gd name="adj" fmla="val 6000"/>
             </a:avLst>
+          </a:prstGeom>
+          <a:solidFill>
+            <a:srgbClr val="EAF3FF"/>
+          </a:solidFill>
+          <a:ln>
+            <a:noFill/>
+          </a:ln>
+          <a:effectLst/>
+        </p:spPr>
+        <p:style>
+          <a:lnRef idx="1">
+            <a:schemeClr val="accent1"/>
+          </a:lnRef>
+          <a:fillRef idx="3">
+            <a:schemeClr val="accent1"/>
+          </a:fillRef>
+          <a:effectRef idx="2">
+            <a:schemeClr val="accent1"/>
+          </a:effectRef>
+          <a:fontRef idx="minor">
+            <a:schemeClr val="lt1"/>
+          </a:fontRef>
+        </p:style>
+        <p:txBody>
+          <a:bodyPr rtlCol="0" anchor="ctr"/>
+          <a:lstStyle/>
+          <a:p/>
+        </p:txBody>
+      </p:sp>
+      <p:sp>
+        <p:nvSpPr>
+          <p:cNvPr id="7" name="Oval 6"/>
+          <p:cNvSpPr/>
+          <p:nvPr/>
+        </p:nvSpPr>
+        <p:spPr>
+          <a:xfrm>
+            <a:off x="777240" y="1828800"/>
+            <a:ext cx="457200" cy="457200"/>
+          </a:xfrm>
+          <a:prstGeom prst="ellipse">
+            <a:avLst/>
           </a:prstGeom>
           <a:solidFill>
             <a:srgbClr val="F2B705"/>
@@ -8091,40 +10031,18 @@
           </a:fontRef>
         </p:style>
         <p:txBody>
-          <a:bodyPr rtlCol="0" anchor="ctr"/>
-          <a:lstStyle/>
-          <a:p/>
-        </p:txBody>
-      </p:sp>
-      <p:sp>
-        <p:nvSpPr>
-          <p:cNvPr id="7" name="TextBox 6"/>
-          <p:cNvSpPr txBox="1"/>
-          <p:nvPr/>
-        </p:nvSpPr>
-        <p:spPr>
-          <a:xfrm>
-            <a:off x="548640" y="1508760"/>
-            <a:ext cx="2011680" cy="457200"/>
-          </a:xfrm>
-          <a:prstGeom prst="rect">
-            <a:avLst/>
-          </a:prstGeom>
-          <a:noFill/>
-        </p:spPr>
-        <p:txBody>
-          <a:bodyPr wrap="square" anchor="ctr" lIns="0" rIns="0" tIns="0" bIns="0"/>
+          <a:bodyPr rtlCol="0" anchor="ctr" lIns="0" rIns="0" tIns="0" bIns="0"/>
           <a:lstStyle/>
           <a:p>
             <a:pPr algn="ctr"/>
             <a:r>
-              <a:rPr sz="1400" b="1" i="0">
+              <a:rPr sz="1500" b="1">
                 <a:solidFill>
                   <a:srgbClr val="202122"/>
                 </a:solidFill>
                 <a:latin typeface="Calibri"/>
               </a:rPr>
-              <a:t>25 minutes</a:t>
+              <a:t>1</a:t>
             </a:r>
           </a:p>
         </p:txBody>
@@ -8137,8 +10055,8 @@
         </p:nvSpPr>
         <p:spPr>
           <a:xfrm>
-            <a:off x="2743200" y="1508760"/>
-            <a:ext cx="4754880" cy="457200"/>
+            <a:off x="1371600" y="1801368"/>
+            <a:ext cx="4404207" cy="512064"/>
           </a:xfrm>
           <a:prstGeom prst="rect">
             <a:avLst/>
@@ -8151,375 +10069,64 @@
           <a:p>
             <a:pPr algn="l"/>
             <a:r>
-              <a:rPr sz="1400" b="0" i="1">
-                <a:solidFill>
-                  <a:srgbClr val="54595D"/>
-                </a:solidFill>
-                <a:latin typeface="Calibri"/>
-              </a:rPr>
-              <a:t>Small groups</a:t>
-            </a:r>
-          </a:p>
-        </p:txBody>
-      </p:sp>
-      <p:sp>
-        <p:nvSpPr>
-          <p:cNvPr id="9" name="Oval 8"/>
+              <a:rPr sz="1900" b="1" i="0">
+                <a:solidFill>
+                  <a:srgbClr val="03306E"/>
+                </a:solidFill>
+                <a:latin typeface="Calibri"/>
+              </a:rPr>
+              <a:t>Human characteristics</a:t>
+            </a:r>
+          </a:p>
+        </p:txBody>
+      </p:sp>
+      <p:sp>
+        <p:nvSpPr>
+          <p:cNvPr id="9" name="TextBox 8"/>
+          <p:cNvSpPr txBox="1"/>
+          <p:nvPr/>
+        </p:nvSpPr>
+        <p:spPr>
+          <a:xfrm>
+            <a:off x="777240" y="2468880"/>
+            <a:ext cx="4952847" cy="1143000"/>
+          </a:xfrm>
+          <a:prstGeom prst="rect">
+            <a:avLst/>
+          </a:prstGeom>
+          <a:noFill/>
+        </p:spPr>
+        <p:txBody>
+          <a:bodyPr wrap="square" anchor="t" lIns="0" rIns="0" tIns="0" bIns="0"/>
+          <a:lstStyle/>
+          <a:p>
+            <a:pPr algn="l"/>
+            <a:r>
+              <a:rPr sz="2000" b="0" i="0">
+                <a:solidFill>
+                  <a:srgbClr val="202122"/>
+                </a:solidFill>
+                <a:latin typeface="Calibri"/>
+              </a:rPr>
+              <a:t>Physical and mental capabilities and limits.</a:t>
+            </a:r>
+          </a:p>
+        </p:txBody>
+      </p:sp>
+      <p:sp>
+        <p:nvSpPr>
+          <p:cNvPr id="10" name="Rounded Rectangle 9"/>
           <p:cNvSpPr/>
           <p:nvPr/>
         </p:nvSpPr>
         <p:spPr>
           <a:xfrm>
-            <a:off x="548640" y="2482596"/>
-            <a:ext cx="384048" cy="384048"/>
-          </a:xfrm>
-          <a:prstGeom prst="ellipse">
-            <a:avLst/>
-          </a:prstGeom>
-          <a:solidFill>
-            <a:srgbClr val="0645AD"/>
-          </a:solidFill>
-          <a:ln>
-            <a:noFill/>
-          </a:ln>
-          <a:effectLst/>
-        </p:spPr>
-        <p:style>
-          <a:lnRef idx="1">
-            <a:schemeClr val="accent1"/>
-          </a:lnRef>
-          <a:fillRef idx="3">
-            <a:schemeClr val="accent1"/>
-          </a:fillRef>
-          <a:effectRef idx="2">
-            <a:schemeClr val="accent1"/>
-          </a:effectRef>
-          <a:fontRef idx="minor">
-            <a:schemeClr val="lt1"/>
-          </a:fontRef>
-        </p:style>
-        <p:txBody>
-          <a:bodyPr rtlCol="0" anchor="ctr" lIns="0" rIns="0" tIns="0" bIns="0"/>
-          <a:lstStyle/>
-          <a:p>
-            <a:pPr algn="ctr"/>
-            <a:r>
-              <a:rPr sz="1300" b="1">
-                <a:solidFill>
-                  <a:srgbClr val="FFFFFF"/>
-                </a:solidFill>
-                <a:latin typeface="Calibri"/>
-              </a:rPr>
-              <a:t>1</a:t>
-            </a:r>
-          </a:p>
-        </p:txBody>
-      </p:sp>
-      <p:sp>
-        <p:nvSpPr>
-          <p:cNvPr id="10" name="TextBox 9"/>
-          <p:cNvSpPr txBox="1"/>
-          <p:nvPr/>
-        </p:nvSpPr>
-        <p:spPr>
-          <a:xfrm>
-            <a:off x="1143000" y="2240280"/>
-            <a:ext cx="5943600" cy="868680"/>
-          </a:xfrm>
-          <a:prstGeom prst="rect">
-            <a:avLst/>
-          </a:prstGeom>
-          <a:noFill/>
-        </p:spPr>
-        <p:txBody>
-          <a:bodyPr wrap="square" anchor="ctr" lIns="0" rIns="0" tIns="0" bIns="0"/>
-          <a:lstStyle/>
-          <a:p>
-            <a:pPr algn="l"/>
-            <a:r>
-              <a:rPr sz="1700" b="0" i="0">
-                <a:solidFill>
-                  <a:srgbClr val="202122"/>
-                </a:solidFill>
-                <a:latin typeface="Calibri"/>
-              </a:rPr>
-              <a:t>Read the incident report from your teacher.</a:t>
-            </a:r>
-          </a:p>
-        </p:txBody>
-      </p:sp>
-      <p:sp>
-        <p:nvSpPr>
-          <p:cNvPr id="11" name="Oval 10"/>
-          <p:cNvSpPr/>
-          <p:nvPr/>
-        </p:nvSpPr>
-        <p:spPr>
-          <a:xfrm>
-            <a:off x="548640" y="3461004"/>
-            <a:ext cx="384048" cy="384048"/>
-          </a:xfrm>
-          <a:prstGeom prst="ellipse">
-            <a:avLst/>
-          </a:prstGeom>
-          <a:solidFill>
-            <a:srgbClr val="0645AD"/>
-          </a:solidFill>
-          <a:ln>
-            <a:noFill/>
-          </a:ln>
-          <a:effectLst/>
-        </p:spPr>
-        <p:style>
-          <a:lnRef idx="1">
-            <a:schemeClr val="accent1"/>
-          </a:lnRef>
-          <a:fillRef idx="3">
-            <a:schemeClr val="accent1"/>
-          </a:fillRef>
-          <a:effectRef idx="2">
-            <a:schemeClr val="accent1"/>
-          </a:effectRef>
-          <a:fontRef idx="minor">
-            <a:schemeClr val="lt1"/>
-          </a:fontRef>
-        </p:style>
-        <p:txBody>
-          <a:bodyPr rtlCol="0" anchor="ctr" lIns="0" rIns="0" tIns="0" bIns="0"/>
-          <a:lstStyle/>
-          <a:p>
-            <a:pPr algn="ctr"/>
-            <a:r>
-              <a:rPr sz="1300" b="1">
-                <a:solidFill>
-                  <a:srgbClr val="FFFFFF"/>
-                </a:solidFill>
-                <a:latin typeface="Calibri"/>
-              </a:rPr>
-              <a:t>2</a:t>
-            </a:r>
-          </a:p>
-        </p:txBody>
-      </p:sp>
-      <p:sp>
-        <p:nvSpPr>
-          <p:cNvPr id="12" name="TextBox 11"/>
-          <p:cNvSpPr txBox="1"/>
-          <p:nvPr/>
-        </p:nvSpPr>
-        <p:spPr>
-          <a:xfrm>
-            <a:off x="1143000" y="3218688"/>
-            <a:ext cx="5943600" cy="868680"/>
-          </a:xfrm>
-          <a:prstGeom prst="rect">
-            <a:avLst/>
-          </a:prstGeom>
-          <a:noFill/>
-        </p:spPr>
-        <p:txBody>
-          <a:bodyPr wrap="square" anchor="ctr" lIns="0" rIns="0" tIns="0" bIns="0"/>
-          <a:lstStyle/>
-          <a:p>
-            <a:pPr algn="l"/>
-            <a:r>
-              <a:rPr sz="1700" b="0" i="0">
-                <a:solidFill>
-                  <a:srgbClr val="202122"/>
-                </a:solidFill>
-                <a:latin typeface="Calibri"/>
-              </a:rPr>
-              <a:t>Identify the human factors involved.</a:t>
-            </a:r>
-          </a:p>
-        </p:txBody>
-      </p:sp>
-      <p:sp>
-        <p:nvSpPr>
-          <p:cNvPr id="13" name="Oval 12"/>
-          <p:cNvSpPr/>
-          <p:nvPr/>
-        </p:nvSpPr>
-        <p:spPr>
-          <a:xfrm>
-            <a:off x="548640" y="4439412"/>
-            <a:ext cx="384048" cy="384048"/>
-          </a:xfrm>
-          <a:prstGeom prst="ellipse">
-            <a:avLst/>
-          </a:prstGeom>
-          <a:solidFill>
-            <a:srgbClr val="0645AD"/>
-          </a:solidFill>
-          <a:ln>
-            <a:noFill/>
-          </a:ln>
-          <a:effectLst/>
-        </p:spPr>
-        <p:style>
-          <a:lnRef idx="1">
-            <a:schemeClr val="accent1"/>
-          </a:lnRef>
-          <a:fillRef idx="3">
-            <a:schemeClr val="accent1"/>
-          </a:fillRef>
-          <a:effectRef idx="2">
-            <a:schemeClr val="accent1"/>
-          </a:effectRef>
-          <a:fontRef idx="minor">
-            <a:schemeClr val="lt1"/>
-          </a:fontRef>
-        </p:style>
-        <p:txBody>
-          <a:bodyPr rtlCol="0" anchor="ctr" lIns="0" rIns="0" tIns="0" bIns="0"/>
-          <a:lstStyle/>
-          <a:p>
-            <a:pPr algn="ctr"/>
-            <a:r>
-              <a:rPr sz="1300" b="1">
-                <a:solidFill>
-                  <a:srgbClr val="FFFFFF"/>
-                </a:solidFill>
-                <a:latin typeface="Calibri"/>
-              </a:rPr>
-              <a:t>3</a:t>
-            </a:r>
-          </a:p>
-        </p:txBody>
-      </p:sp>
-      <p:sp>
-        <p:nvSpPr>
-          <p:cNvPr id="14" name="TextBox 13"/>
-          <p:cNvSpPr txBox="1"/>
-          <p:nvPr/>
-        </p:nvSpPr>
-        <p:spPr>
-          <a:xfrm>
-            <a:off x="1143000" y="4197096"/>
-            <a:ext cx="5943600" cy="868680"/>
-          </a:xfrm>
-          <a:prstGeom prst="rect">
-            <a:avLst/>
-          </a:prstGeom>
-          <a:noFill/>
-        </p:spPr>
-        <p:txBody>
-          <a:bodyPr wrap="square" anchor="ctr" lIns="0" rIns="0" tIns="0" bIns="0"/>
-          <a:lstStyle/>
-          <a:p>
-            <a:pPr algn="l"/>
-            <a:r>
-              <a:rPr sz="1700" b="0" i="0">
-                <a:solidFill>
-                  <a:srgbClr val="202122"/>
-                </a:solidFill>
-                <a:latin typeface="Calibri"/>
-              </a:rPr>
-              <a:t>Suggest changes to design, training and procedures.</a:t>
-            </a:r>
-          </a:p>
-        </p:txBody>
-      </p:sp>
-      <p:sp>
-        <p:nvSpPr>
-          <p:cNvPr id="15" name="Oval 14"/>
-          <p:cNvSpPr/>
-          <p:nvPr/>
-        </p:nvSpPr>
-        <p:spPr>
-          <a:xfrm>
-            <a:off x="548640" y="5417820"/>
-            <a:ext cx="384048" cy="384048"/>
-          </a:xfrm>
-          <a:prstGeom prst="ellipse">
-            <a:avLst/>
-          </a:prstGeom>
-          <a:solidFill>
-            <a:srgbClr val="0645AD"/>
-          </a:solidFill>
-          <a:ln>
-            <a:noFill/>
-          </a:ln>
-          <a:effectLst/>
-        </p:spPr>
-        <p:style>
-          <a:lnRef idx="1">
-            <a:schemeClr val="accent1"/>
-          </a:lnRef>
-          <a:fillRef idx="3">
-            <a:schemeClr val="accent1"/>
-          </a:fillRef>
-          <a:effectRef idx="2">
-            <a:schemeClr val="accent1"/>
-          </a:effectRef>
-          <a:fontRef idx="minor">
-            <a:schemeClr val="lt1"/>
-          </a:fontRef>
-        </p:style>
-        <p:txBody>
-          <a:bodyPr rtlCol="0" anchor="ctr" lIns="0" rIns="0" tIns="0" bIns="0"/>
-          <a:lstStyle/>
-          <a:p>
-            <a:pPr algn="ctr"/>
-            <a:r>
-              <a:rPr sz="1300" b="1">
-                <a:solidFill>
-                  <a:srgbClr val="FFFFFF"/>
-                </a:solidFill>
-                <a:latin typeface="Calibri"/>
-              </a:rPr>
-              <a:t>4</a:t>
-            </a:r>
-          </a:p>
-        </p:txBody>
-      </p:sp>
-      <p:sp>
-        <p:nvSpPr>
-          <p:cNvPr id="16" name="TextBox 15"/>
-          <p:cNvSpPr txBox="1"/>
-          <p:nvPr/>
-        </p:nvSpPr>
-        <p:spPr>
-          <a:xfrm>
-            <a:off x="1143000" y="5175504"/>
-            <a:ext cx="5943600" cy="868680"/>
-          </a:xfrm>
-          <a:prstGeom prst="rect">
-            <a:avLst/>
-          </a:prstGeom>
-          <a:noFill/>
-        </p:spPr>
-        <p:txBody>
-          <a:bodyPr wrap="square" anchor="ctr" lIns="0" rIns="0" tIns="0" bIns="0"/>
-          <a:lstStyle/>
-          <a:p>
-            <a:pPr algn="l"/>
-            <a:r>
-              <a:rPr sz="1700" b="0" i="0">
-                <a:solidFill>
-                  <a:srgbClr val="202122"/>
-                </a:solidFill>
-                <a:latin typeface="Calibri"/>
-              </a:rPr>
-              <a:t>Rank them by how well they prevent a repeat.</a:t>
-            </a:r>
-          </a:p>
-        </p:txBody>
-      </p:sp>
-      <p:sp>
-        <p:nvSpPr>
-          <p:cNvPr id="17" name="Rounded Rectangle 16"/>
-          <p:cNvSpPr/>
-          <p:nvPr/>
-        </p:nvSpPr>
-        <p:spPr>
-          <a:xfrm>
-            <a:off x="7772400" y="1508760"/>
-            <a:ext cx="3867912" cy="4572000"/>
+            <a:off x="6233007" y="1600200"/>
+            <a:ext cx="5410047" cy="2148840"/>
           </a:xfrm>
           <a:prstGeom prst="roundRect">
             <a:avLst>
-              <a:gd name="adj" fmla="val 8000"/>
+              <a:gd name="adj" fmla="val 6000"/>
             </a:avLst>
           </a:prstGeom>
           <a:solidFill>
@@ -8552,14 +10159,67 @@
       </p:sp>
       <p:sp>
         <p:nvSpPr>
-          <p:cNvPr id="18" name="TextBox 17"/>
+          <p:cNvPr id="11" name="Oval 10"/>
+          <p:cNvSpPr/>
+          <p:nvPr/>
+        </p:nvSpPr>
+        <p:spPr>
+          <a:xfrm>
+            <a:off x="6461607" y="1828800"/>
+            <a:ext cx="457200" cy="457200"/>
+          </a:xfrm>
+          <a:prstGeom prst="ellipse">
+            <a:avLst/>
+          </a:prstGeom>
+          <a:solidFill>
+            <a:srgbClr val="F2B705"/>
+          </a:solidFill>
+          <a:ln>
+            <a:noFill/>
+          </a:ln>
+          <a:effectLst/>
+        </p:spPr>
+        <p:style>
+          <a:lnRef idx="1">
+            <a:schemeClr val="accent1"/>
+          </a:lnRef>
+          <a:fillRef idx="3">
+            <a:schemeClr val="accent1"/>
+          </a:fillRef>
+          <a:effectRef idx="2">
+            <a:schemeClr val="accent1"/>
+          </a:effectRef>
+          <a:fontRef idx="minor">
+            <a:schemeClr val="lt1"/>
+          </a:fontRef>
+        </p:style>
+        <p:txBody>
+          <a:bodyPr rtlCol="0" anchor="ctr" lIns="0" rIns="0" tIns="0" bIns="0"/>
+          <a:lstStyle/>
+          <a:p>
+            <a:pPr algn="ctr"/>
+            <a:r>
+              <a:rPr sz="1500" b="1">
+                <a:solidFill>
+                  <a:srgbClr val="202122"/>
+                </a:solidFill>
+                <a:latin typeface="Calibri"/>
+              </a:rPr>
+              <a:t>2</a:t>
+            </a:r>
+          </a:p>
+        </p:txBody>
+      </p:sp>
+      <p:sp>
+        <p:nvSpPr>
+          <p:cNvPr id="12" name="TextBox 11"/>
           <p:cNvSpPr txBox="1"/>
           <p:nvPr/>
         </p:nvSpPr>
         <p:spPr>
           <a:xfrm>
-            <a:off x="8046720" y="1737360"/>
-            <a:ext cx="3291840" cy="365760"/>
+            <a:off x="7055967" y="1801368"/>
+            <a:ext cx="4404207" cy="512064"/>
           </a:xfrm>
           <a:prstGeom prst="rect">
             <a:avLst/>
@@ -8567,32 +10227,162 @@
           <a:noFill/>
         </p:spPr>
         <p:txBody>
+          <a:bodyPr wrap="square" anchor="ctr" lIns="0" rIns="0" tIns="0" bIns="0"/>
+          <a:lstStyle/>
+          <a:p>
+            <a:pPr algn="l"/>
+            <a:r>
+              <a:rPr sz="1900" b="1" i="0">
+                <a:solidFill>
+                  <a:srgbClr val="03306E"/>
+                </a:solidFill>
+                <a:latin typeface="Calibri"/>
+              </a:rPr>
+              <a:t>Workplace design</a:t>
+            </a:r>
+          </a:p>
+        </p:txBody>
+      </p:sp>
+      <p:sp>
+        <p:nvSpPr>
+          <p:cNvPr id="13" name="TextBox 12"/>
+          <p:cNvSpPr txBox="1"/>
+          <p:nvPr/>
+        </p:nvSpPr>
+        <p:spPr>
+          <a:xfrm>
+            <a:off x="6461607" y="2468880"/>
+            <a:ext cx="4952847" cy="1143000"/>
+          </a:xfrm>
+          <a:prstGeom prst="rect">
+            <a:avLst/>
+          </a:prstGeom>
+          <a:noFill/>
+        </p:spPr>
+        <p:txBody>
           <a:bodyPr wrap="square" anchor="t" lIns="0" rIns="0" tIns="0" bIns="0"/>
           <a:lstStyle/>
           <a:p>
             <a:pPr algn="l"/>
             <a:r>
-              <a:rPr sz="1300" b="1" i="0">
-                <a:solidFill>
-                  <a:srgbClr val="0645AD"/>
-                </a:solidFill>
-                <a:latin typeface="Calibri"/>
-              </a:rPr>
-              <a:t>SUCCESS CRITERIA</a:t>
-            </a:r>
-          </a:p>
-        </p:txBody>
-      </p:sp>
-      <p:sp>
-        <p:nvSpPr>
-          <p:cNvPr id="19" name="TextBox 18"/>
+              <a:rPr sz="2000" b="0" i="0">
+                <a:solidFill>
+                  <a:srgbClr val="202122"/>
+                </a:solidFill>
+                <a:latin typeface="Calibri"/>
+              </a:rPr>
+              <a:t>Affects safety, comfort and productivity.</a:t>
+            </a:r>
+          </a:p>
+        </p:txBody>
+      </p:sp>
+      <p:sp>
+        <p:nvSpPr>
+          <p:cNvPr id="14" name="Rounded Rectangle 13"/>
+          <p:cNvSpPr/>
+          <p:nvPr/>
+        </p:nvSpPr>
+        <p:spPr>
+          <a:xfrm>
+            <a:off x="548640" y="4023360"/>
+            <a:ext cx="5410047" cy="2148840"/>
+          </a:xfrm>
+          <a:prstGeom prst="roundRect">
+            <a:avLst>
+              <a:gd name="adj" fmla="val 6000"/>
+            </a:avLst>
+          </a:prstGeom>
+          <a:solidFill>
+            <a:srgbClr val="EAF3FF"/>
+          </a:solidFill>
+          <a:ln>
+            <a:noFill/>
+          </a:ln>
+          <a:effectLst/>
+        </p:spPr>
+        <p:style>
+          <a:lnRef idx="1">
+            <a:schemeClr val="accent1"/>
+          </a:lnRef>
+          <a:fillRef idx="3">
+            <a:schemeClr val="accent1"/>
+          </a:fillRef>
+          <a:effectRef idx="2">
+            <a:schemeClr val="accent1"/>
+          </a:effectRef>
+          <a:fontRef idx="minor">
+            <a:schemeClr val="lt1"/>
+          </a:fontRef>
+        </p:style>
+        <p:txBody>
+          <a:bodyPr rtlCol="0" anchor="ctr"/>
+          <a:lstStyle/>
+          <a:p/>
+        </p:txBody>
+      </p:sp>
+      <p:sp>
+        <p:nvSpPr>
+          <p:cNvPr id="15" name="Oval 14"/>
+          <p:cNvSpPr/>
+          <p:nvPr/>
+        </p:nvSpPr>
+        <p:spPr>
+          <a:xfrm>
+            <a:off x="777240" y="4251960"/>
+            <a:ext cx="457200" cy="457200"/>
+          </a:xfrm>
+          <a:prstGeom prst="ellipse">
+            <a:avLst/>
+          </a:prstGeom>
+          <a:solidFill>
+            <a:srgbClr val="F2B705"/>
+          </a:solidFill>
+          <a:ln>
+            <a:noFill/>
+          </a:ln>
+          <a:effectLst/>
+        </p:spPr>
+        <p:style>
+          <a:lnRef idx="1">
+            <a:schemeClr val="accent1"/>
+          </a:lnRef>
+          <a:fillRef idx="3">
+            <a:schemeClr val="accent1"/>
+          </a:fillRef>
+          <a:effectRef idx="2">
+            <a:schemeClr val="accent1"/>
+          </a:effectRef>
+          <a:fontRef idx="minor">
+            <a:schemeClr val="lt1"/>
+          </a:fontRef>
+        </p:style>
+        <p:txBody>
+          <a:bodyPr rtlCol="0" anchor="ctr" lIns="0" rIns="0" tIns="0" bIns="0"/>
+          <a:lstStyle/>
+          <a:p>
+            <a:pPr algn="ctr"/>
+            <a:r>
+              <a:rPr sz="1500" b="1">
+                <a:solidFill>
+                  <a:srgbClr val="202122"/>
+                </a:solidFill>
+                <a:latin typeface="Calibri"/>
+              </a:rPr>
+              <a:t>3</a:t>
+            </a:r>
+          </a:p>
+        </p:txBody>
+      </p:sp>
+      <p:sp>
+        <p:nvSpPr>
+          <p:cNvPr id="16" name="TextBox 15"/>
           <p:cNvSpPr txBox="1"/>
           <p:nvPr/>
         </p:nvSpPr>
         <p:spPr>
           <a:xfrm>
-            <a:off x="8046720" y="2240280"/>
-            <a:ext cx="3337560" cy="3657600"/>
+            <a:off x="1371600" y="4224528"/>
+            <a:ext cx="4404207" cy="512064"/>
           </a:xfrm>
           <a:prstGeom prst="rect">
             <a:avLst/>
@@ -8600,71 +10390,214 @@
           <a:noFill/>
         </p:spPr>
         <p:txBody>
-          <a:bodyPr wrap="square" lIns="0" rIns="0" tIns="0" bIns="0">
-            <a:spAutoFit/>
-          </a:bodyPr>
-          <a:lstStyle/>
-          <a:p>
-            <a:pPr marL="274320" indent="-274320">
-              <a:spcAft>
-                <a:spcPts val="810"/>
-              </a:spcAft>
-              <a:buClr>
-                <a:srgbClr val="0645AD"/>
-              </a:buClr>
-              <a:buFont typeface="Arial"/>
-              <a:buChar char="•"/>
-            </a:pPr>
-            <a:r>
-              <a:rPr sz="1800" b="0">
+          <a:bodyPr wrap="square" anchor="ctr" lIns="0" rIns="0" tIns="0" bIns="0"/>
+          <a:lstStyle/>
+          <a:p>
+            <a:pPr algn="l"/>
+            <a:r>
+              <a:rPr sz="1900" b="1" i="0">
+                <a:solidFill>
+                  <a:srgbClr val="03306E"/>
+                </a:solidFill>
+                <a:latin typeface="Calibri"/>
+              </a:rPr>
+              <a:t>Causes of error</a:t>
+            </a:r>
+          </a:p>
+        </p:txBody>
+      </p:sp>
+      <p:sp>
+        <p:nvSpPr>
+          <p:cNvPr id="17" name="TextBox 16"/>
+          <p:cNvSpPr txBox="1"/>
+          <p:nvPr/>
+        </p:nvSpPr>
+        <p:spPr>
+          <a:xfrm>
+            <a:off x="777240" y="4892040"/>
+            <a:ext cx="4952847" cy="1143000"/>
+          </a:xfrm>
+          <a:prstGeom prst="rect">
+            <a:avLst/>
+          </a:prstGeom>
+          <a:noFill/>
+        </p:spPr>
+        <p:txBody>
+          <a:bodyPr wrap="square" anchor="t" lIns="0" rIns="0" tIns="0" bIns="0"/>
+          <a:lstStyle/>
+          <a:p>
+            <a:pPr algn="l"/>
+            <a:r>
+              <a:rPr sz="2000" b="0" i="0">
                 <a:solidFill>
                   <a:srgbClr val="202122"/>
                 </a:solidFill>
                 <a:latin typeface="Calibri"/>
               </a:rPr>
-              <a:t>Human factors named correctly</a:t>
-            </a:r>
-          </a:p>
-          <a:p>
-            <a:pPr marL="274320" indent="-274320">
-              <a:spcAft>
-                <a:spcPts val="810"/>
-              </a:spcAft>
-              <a:buClr>
-                <a:srgbClr val="0645AD"/>
-              </a:buClr>
-              <a:buFont typeface="Arial"/>
-              <a:buChar char="•"/>
-            </a:pPr>
-            <a:r>
-              <a:rPr sz="1800" b="0">
+              <a:t>Insufficient training, fatigue, workload, stress.</a:t>
+            </a:r>
+          </a:p>
+        </p:txBody>
+      </p:sp>
+      <p:sp>
+        <p:nvSpPr>
+          <p:cNvPr id="18" name="Rounded Rectangle 17"/>
+          <p:cNvSpPr/>
+          <p:nvPr/>
+        </p:nvSpPr>
+        <p:spPr>
+          <a:xfrm>
+            <a:off x="6233007" y="4023360"/>
+            <a:ext cx="5410047" cy="2148840"/>
+          </a:xfrm>
+          <a:prstGeom prst="roundRect">
+            <a:avLst>
+              <a:gd name="adj" fmla="val 6000"/>
+            </a:avLst>
+          </a:prstGeom>
+          <a:solidFill>
+            <a:srgbClr val="EAF3FF"/>
+          </a:solidFill>
+          <a:ln>
+            <a:noFill/>
+          </a:ln>
+          <a:effectLst/>
+        </p:spPr>
+        <p:style>
+          <a:lnRef idx="1">
+            <a:schemeClr val="accent1"/>
+          </a:lnRef>
+          <a:fillRef idx="3">
+            <a:schemeClr val="accent1"/>
+          </a:fillRef>
+          <a:effectRef idx="2">
+            <a:schemeClr val="accent1"/>
+          </a:effectRef>
+          <a:fontRef idx="minor">
+            <a:schemeClr val="lt1"/>
+          </a:fontRef>
+        </p:style>
+        <p:txBody>
+          <a:bodyPr rtlCol="0" anchor="ctr"/>
+          <a:lstStyle/>
+          <a:p/>
+        </p:txBody>
+      </p:sp>
+      <p:sp>
+        <p:nvSpPr>
+          <p:cNvPr id="19" name="Oval 18"/>
+          <p:cNvSpPr/>
+          <p:nvPr/>
+        </p:nvSpPr>
+        <p:spPr>
+          <a:xfrm>
+            <a:off x="6461607" y="4251960"/>
+            <a:ext cx="457200" cy="457200"/>
+          </a:xfrm>
+          <a:prstGeom prst="ellipse">
+            <a:avLst/>
+          </a:prstGeom>
+          <a:solidFill>
+            <a:srgbClr val="F2B705"/>
+          </a:solidFill>
+          <a:ln>
+            <a:noFill/>
+          </a:ln>
+          <a:effectLst/>
+        </p:spPr>
+        <p:style>
+          <a:lnRef idx="1">
+            <a:schemeClr val="accent1"/>
+          </a:lnRef>
+          <a:fillRef idx="3">
+            <a:schemeClr val="accent1"/>
+          </a:fillRef>
+          <a:effectRef idx="2">
+            <a:schemeClr val="accent1"/>
+          </a:effectRef>
+          <a:fontRef idx="minor">
+            <a:schemeClr val="lt1"/>
+          </a:fontRef>
+        </p:style>
+        <p:txBody>
+          <a:bodyPr rtlCol="0" anchor="ctr" lIns="0" rIns="0" tIns="0" bIns="0"/>
+          <a:lstStyle/>
+          <a:p>
+            <a:pPr algn="ctr"/>
+            <a:r>
+              <a:rPr sz="1500" b="1">
                 <a:solidFill>
                   <a:srgbClr val="202122"/>
                 </a:solidFill>
                 <a:latin typeface="Calibri"/>
               </a:rPr>
-              <a:t>Solutions go beyond blaming the worker</a:t>
-            </a:r>
-          </a:p>
-          <a:p>
-            <a:pPr marL="274320" indent="-274320">
-              <a:spcAft>
-                <a:spcPts val="810"/>
-              </a:spcAft>
-              <a:buClr>
-                <a:srgbClr val="0645AD"/>
-              </a:buClr>
-              <a:buFont typeface="Arial"/>
-              <a:buChar char="•"/>
-            </a:pPr>
-            <a:r>
-              <a:rPr sz="1800" b="0">
+              <a:t>4</a:t>
+            </a:r>
+          </a:p>
+        </p:txBody>
+      </p:sp>
+      <p:sp>
+        <p:nvSpPr>
+          <p:cNvPr id="20" name="TextBox 19"/>
+          <p:cNvSpPr txBox="1"/>
+          <p:nvPr/>
+        </p:nvSpPr>
+        <p:spPr>
+          <a:xfrm>
+            <a:off x="7055967" y="4224528"/>
+            <a:ext cx="4404207" cy="512064"/>
+          </a:xfrm>
+          <a:prstGeom prst="rect">
+            <a:avLst/>
+          </a:prstGeom>
+          <a:noFill/>
+        </p:spPr>
+        <p:txBody>
+          <a:bodyPr wrap="square" anchor="ctr" lIns="0" rIns="0" tIns="0" bIns="0"/>
+          <a:lstStyle/>
+          <a:p>
+            <a:pPr algn="l"/>
+            <a:r>
+              <a:rPr sz="1900" b="1" i="0">
+                <a:solidFill>
+                  <a:srgbClr val="03306E"/>
+                </a:solidFill>
+                <a:latin typeface="Calibri"/>
+              </a:rPr>
+              <a:t>Reducing error</a:t>
+            </a:r>
+          </a:p>
+        </p:txBody>
+      </p:sp>
+      <p:sp>
+        <p:nvSpPr>
+          <p:cNvPr id="21" name="TextBox 20"/>
+          <p:cNvSpPr txBox="1"/>
+          <p:nvPr/>
+        </p:nvSpPr>
+        <p:spPr>
+          <a:xfrm>
+            <a:off x="6461607" y="4892040"/>
+            <a:ext cx="4952847" cy="1143000"/>
+          </a:xfrm>
+          <a:prstGeom prst="rect">
+            <a:avLst/>
+          </a:prstGeom>
+          <a:noFill/>
+        </p:spPr>
+        <p:txBody>
+          <a:bodyPr wrap="square" anchor="t" lIns="0" rIns="0" tIns="0" bIns="0"/>
+          <a:lstStyle/>
+          <a:p>
+            <a:pPr algn="l"/>
+            <a:r>
+              <a:rPr sz="2000" b="0" i="0">
                 <a:solidFill>
                   <a:srgbClr val="202122"/>
                 </a:solidFill>
                 <a:latin typeface="Calibri"/>
               </a:rPr>
-              <a:t>Ranking justified</a:t>
+              <a:t>Training, rest breaks, clear procedures, good design, error-proofing.</a:t>
             </a:r>
           </a:p>
         </p:txBody>
@@ -8683,7 +10616,7 @@
     <p:bg>
       <p:bgPr>
         <a:solidFill>
-          <a:srgbClr val="03306E"/>
+          <a:srgbClr val="FFFFFF"/>
         </a:solidFill>
         <a:effectLst/>
       </p:bgPr>
@@ -8719,7 +10652,7 @@
             <a:r>
               <a:rPr sz="1100" b="1" i="0">
                 <a:solidFill>
-                  <a:srgbClr val="A9C8F0"/>
+                  <a:srgbClr val="54595D"/>
                 </a:solidFill>
                 <a:latin typeface="Calibri"/>
               </a:rPr>
@@ -8752,24 +10685,90 @@
             <a:r>
               <a:rPr sz="3200" b="1" i="0">
                 <a:solidFill>
-                  <a:srgbClr val="FFFFFF"/>
+                  <a:srgbClr val="03306E"/>
                 </a:solidFill>
                 <a:latin typeface="Cambria"/>
               </a:rPr>
-              <a:t>Exit ticket</a:t>
-            </a:r>
-          </a:p>
-        </p:txBody>
-      </p:sp>
-      <p:sp>
-        <p:nvSpPr>
-          <p:cNvPr id="4" name="Oval 3"/>
+              <a:t>Quick check: Human factors</a:t>
+            </a:r>
+          </a:p>
+        </p:txBody>
+      </p:sp>
+      <p:sp>
+        <p:nvSpPr>
+          <p:cNvPr id="4" name="TextBox 3"/>
+          <p:cNvSpPr txBox="1"/>
+          <p:nvPr/>
+        </p:nvSpPr>
+        <p:spPr>
+          <a:xfrm>
+            <a:off x="548640" y="6446520"/>
+            <a:ext cx="8229600" cy="274320"/>
+          </a:xfrm>
+          <a:prstGeom prst="rect">
+            <a:avLst/>
+          </a:prstGeom>
+          <a:noFill/>
+        </p:spPr>
+        <p:txBody>
+          <a:bodyPr wrap="square" anchor="t" lIns="0" rIns="0" tIns="0" bIns="0"/>
+          <a:lstStyle/>
+          <a:p>
+            <a:pPr algn="l"/>
+            <a:r>
+              <a:rPr sz="1000" b="0" i="0">
+                <a:solidFill>
+                  <a:srgbClr val="54595D"/>
+                </a:solidFill>
+                <a:latin typeface="Calibri"/>
+              </a:rPr>
+              <a:t>Design and Development for Engineering and Manufacturing T Level  ·  Professional Conduct, CPD and Human Factors</a:t>
+            </a:r>
+          </a:p>
+        </p:txBody>
+      </p:sp>
+      <p:sp>
+        <p:nvSpPr>
+          <p:cNvPr id="5" name="TextBox 4"/>
+          <p:cNvSpPr txBox="1"/>
+          <p:nvPr/>
+        </p:nvSpPr>
+        <p:spPr>
+          <a:xfrm>
+            <a:off x="10728655" y="6446520"/>
+            <a:ext cx="914400" cy="274320"/>
+          </a:xfrm>
+          <a:prstGeom prst="rect">
+            <a:avLst/>
+          </a:prstGeom>
+          <a:noFill/>
+        </p:spPr>
+        <p:txBody>
+          <a:bodyPr wrap="square" anchor="t" lIns="0" rIns="0" tIns="0" bIns="0"/>
+          <a:lstStyle/>
+          <a:p>
+            <a:pPr algn="r"/>
+            <a:r>
+              <a:rPr sz="1000" b="0" i="0">
+                <a:solidFill>
+                  <a:srgbClr val="54595D"/>
+                </a:solidFill>
+                <a:latin typeface="Calibri"/>
+              </a:rPr>
+              <a:t>9</a:t>
+            </a:r>
+          </a:p>
+        </p:txBody>
+      </p:sp>
+      <p:sp>
+        <p:nvSpPr>
+          <p:cNvPr id="6" name="Oval 5"/>
           <p:cNvSpPr/>
           <p:nvPr/>
         </p:nvSpPr>
         <p:spPr>
           <a:xfrm>
-            <a:off x="548640" y="1737360"/>
+            <a:off x="548640" y="1691640"/>
             <a:ext cx="502920" cy="502920"/>
           </a:xfrm>
           <a:prstGeom prst="ellipse">
@@ -8803,7 +10802,7 @@
           <a:p>
             <a:pPr algn="ctr"/>
             <a:r>
-              <a:rPr sz="1700" b="1">
+              <a:rPr sz="1600" b="1">
                 <a:solidFill>
                   <a:srgbClr val="202122"/>
                 </a:solidFill>
@@ -8816,14 +10815,14 @@
       </p:sp>
       <p:sp>
         <p:nvSpPr>
-          <p:cNvPr id="5" name="TextBox 4"/>
+          <p:cNvPr id="7" name="TextBox 6"/>
           <p:cNvSpPr txBox="1"/>
           <p:nvPr/>
         </p:nvSpPr>
         <p:spPr>
           <a:xfrm>
-            <a:off x="1325880" y="1645920"/>
-            <a:ext cx="6583680" cy="822960"/>
+            <a:off x="1371600" y="1645920"/>
+            <a:ext cx="10271455" cy="1188720"/>
           </a:xfrm>
           <a:prstGeom prst="rect">
             <a:avLst/>
@@ -8831,31 +10830,31 @@
           <a:noFill/>
         </p:spPr>
         <p:txBody>
-          <a:bodyPr wrap="square" anchor="ctr" lIns="0" rIns="0" tIns="0" bIns="0"/>
+          <a:bodyPr wrap="square" anchor="t" lIns="0" rIns="0" tIns="0" bIns="0"/>
           <a:lstStyle/>
           <a:p>
             <a:pPr algn="l"/>
             <a:r>
-              <a:rPr sz="2000" b="0" i="0">
-                <a:solidFill>
-                  <a:srgbClr val="FFFFFF"/>
-                </a:solidFill>
-                <a:latin typeface="Calibri"/>
-              </a:rPr>
-              <a:t>What CPD will you do in the next year?</a:t>
-            </a:r>
-          </a:p>
-        </p:txBody>
-      </p:sp>
-      <p:sp>
-        <p:nvSpPr>
-          <p:cNvPr id="6" name="Oval 5"/>
+              <a:rPr sz="2400" b="0" i="0">
+                <a:solidFill>
+                  <a:srgbClr val="202122"/>
+                </a:solidFill>
+                <a:latin typeface="Calibri"/>
+              </a:rPr>
+              <a:t>Name two causes of human error.</a:t>
+            </a:r>
+          </a:p>
+        </p:txBody>
+      </p:sp>
+      <p:sp>
+        <p:nvSpPr>
+          <p:cNvPr id="8" name="Oval 7"/>
           <p:cNvSpPr/>
           <p:nvPr/>
         </p:nvSpPr>
         <p:spPr>
           <a:xfrm>
-            <a:off x="548640" y="2697480"/>
+            <a:off x="548640" y="3108960"/>
             <a:ext cx="502920" cy="502920"/>
           </a:xfrm>
           <a:prstGeom prst="ellipse">
@@ -8889,7 +10888,7 @@
           <a:p>
             <a:pPr algn="ctr"/>
             <a:r>
-              <a:rPr sz="1700" b="1">
+              <a:rPr sz="1600" b="1">
                 <a:solidFill>
                   <a:srgbClr val="202122"/>
                 </a:solidFill>
@@ -8902,14 +10901,14 @@
       </p:sp>
       <p:sp>
         <p:nvSpPr>
-          <p:cNvPr id="7" name="TextBox 6"/>
+          <p:cNvPr id="9" name="TextBox 8"/>
           <p:cNvSpPr txBox="1"/>
           <p:nvPr/>
         </p:nvSpPr>
         <p:spPr>
           <a:xfrm>
-            <a:off x="1325880" y="2606040"/>
-            <a:ext cx="6583680" cy="822960"/>
+            <a:off x="1371600" y="3063240"/>
+            <a:ext cx="10271455" cy="1188720"/>
           </a:xfrm>
           <a:prstGeom prst="rect">
             <a:avLst/>
@@ -8917,31 +10916,31 @@
           <a:noFill/>
         </p:spPr>
         <p:txBody>
-          <a:bodyPr wrap="square" anchor="ctr" lIns="0" rIns="0" tIns="0" bIns="0"/>
+          <a:bodyPr wrap="square" anchor="t" lIns="0" rIns="0" tIns="0" bIns="0"/>
           <a:lstStyle/>
           <a:p>
             <a:pPr algn="l"/>
             <a:r>
-              <a:rPr sz="2000" b="0" i="0">
-                <a:solidFill>
-                  <a:srgbClr val="FFFFFF"/>
-                </a:solidFill>
-                <a:latin typeface="Calibri"/>
-              </a:rPr>
-              <a:t>How can workplace design reduce errors?</a:t>
-            </a:r>
-          </a:p>
-        </p:txBody>
-      </p:sp>
-      <p:sp>
-        <p:nvSpPr>
-          <p:cNvPr id="8" name="Oval 7"/>
+              <a:rPr sz="2400" b="0" i="0">
+                <a:solidFill>
+                  <a:srgbClr val="202122"/>
+                </a:solidFill>
+                <a:latin typeface="Calibri"/>
+              </a:rPr>
+              <a:t>What is error-proofing?</a:t>
+            </a:r>
+          </a:p>
+        </p:txBody>
+      </p:sp>
+      <p:sp>
+        <p:nvSpPr>
+          <p:cNvPr id="10" name="Oval 9"/>
           <p:cNvSpPr/>
           <p:nvPr/>
         </p:nvSpPr>
         <p:spPr>
           <a:xfrm>
-            <a:off x="548640" y="3657600"/>
+            <a:off x="548640" y="4526280"/>
             <a:ext cx="502920" cy="502920"/>
           </a:xfrm>
           <a:prstGeom prst="ellipse">
@@ -8975,7 +10974,7 @@
           <a:p>
             <a:pPr algn="ctr"/>
             <a:r>
-              <a:rPr sz="1700" b="1">
+              <a:rPr sz="1600" b="1">
                 <a:solidFill>
                   <a:srgbClr val="202122"/>
                 </a:solidFill>
@@ -8984,83 +10983,6 @@
               <a:t>3</a:t>
             </a:r>
           </a:p>
-        </p:txBody>
-      </p:sp>
-      <p:sp>
-        <p:nvSpPr>
-          <p:cNvPr id="9" name="TextBox 8"/>
-          <p:cNvSpPr txBox="1"/>
-          <p:nvPr/>
-        </p:nvSpPr>
-        <p:spPr>
-          <a:xfrm>
-            <a:off x="1325880" y="3566160"/>
-            <a:ext cx="6583680" cy="822960"/>
-          </a:xfrm>
-          <a:prstGeom prst="rect">
-            <a:avLst/>
-          </a:prstGeom>
-          <a:noFill/>
-        </p:spPr>
-        <p:txBody>
-          <a:bodyPr wrap="square" anchor="ctr" lIns="0" rIns="0" tIns="0" bIns="0"/>
-          <a:lstStyle/>
-          <a:p>
-            <a:pPr algn="l"/>
-            <a:r>
-              <a:rPr sz="2000" b="0" i="0">
-                <a:solidFill>
-                  <a:srgbClr val="FFFFFF"/>
-                </a:solidFill>
-                <a:latin typeface="Calibri"/>
-              </a:rPr>
-              <a:t>Why does reputation matter for an engineer?</a:t>
-            </a:r>
-          </a:p>
-        </p:txBody>
-      </p:sp>
-      <p:sp>
-        <p:nvSpPr>
-          <p:cNvPr id="10" name="Rounded Rectangle 9"/>
-          <p:cNvSpPr/>
-          <p:nvPr/>
-        </p:nvSpPr>
-        <p:spPr>
-          <a:xfrm>
-            <a:off x="8229600" y="1645920"/>
-            <a:ext cx="3410712" cy="2926080"/>
-          </a:xfrm>
-          <a:prstGeom prst="roundRect">
-            <a:avLst>
-              <a:gd name="adj" fmla="val 8000"/>
-            </a:avLst>
-          </a:prstGeom>
-          <a:solidFill>
-            <a:srgbClr val="0645AD"/>
-          </a:solidFill>
-          <a:ln>
-            <a:noFill/>
-          </a:ln>
-          <a:effectLst/>
-        </p:spPr>
-        <p:style>
-          <a:lnRef idx="1">
-            <a:schemeClr val="accent1"/>
-          </a:lnRef>
-          <a:fillRef idx="3">
-            <a:schemeClr val="accent1"/>
-          </a:fillRef>
-          <a:effectRef idx="2">
-            <a:schemeClr val="accent1"/>
-          </a:effectRef>
-          <a:fontRef idx="minor">
-            <a:schemeClr val="lt1"/>
-          </a:fontRef>
-        </p:style>
-        <p:txBody>
-          <a:bodyPr rtlCol="0" anchor="ctr"/>
-          <a:lstStyle/>
-          <a:p/>
         </p:txBody>
       </p:sp>
       <p:sp>
@@ -9071,8 +10993,8 @@
         </p:nvSpPr>
         <p:spPr>
           <a:xfrm>
-            <a:off x="8503920" y="1874519"/>
-            <a:ext cx="2926080" cy="365760"/>
+            <a:off x="1371600" y="4480560"/>
+            <a:ext cx="10271455" cy="1188720"/>
           </a:xfrm>
           <a:prstGeom prst="rect">
             <a:avLst/>
@@ -9085,13 +11007,13 @@
           <a:p>
             <a:pPr algn="l"/>
             <a:r>
-              <a:rPr sz="1300" b="1" i="0">
-                <a:solidFill>
-                  <a:srgbClr val="A9C8F0"/>
-                </a:solidFill>
-                <a:latin typeface="Calibri"/>
-              </a:rPr>
-              <a:t>REVISE THIS TOPIC</a:t>
+              <a:rPr sz="2400" b="0" i="0">
+                <a:solidFill>
+                  <a:srgbClr val="202122"/>
+                </a:solidFill>
+                <a:latin typeface="Calibri"/>
+              </a:rPr>
+              <a:t>How does workplace design affect safety?</a:t>
             </a:r>
           </a:p>
         </p:txBody>
@@ -9104,8 +11026,8 @@
         </p:nvSpPr>
         <p:spPr>
           <a:xfrm>
-            <a:off x="8503920" y="2286000"/>
-            <a:ext cx="2926080" cy="548640"/>
+            <a:off x="548640" y="5852160"/>
+            <a:ext cx="11094415" cy="365760"/>
           </a:xfrm>
           <a:prstGeom prst="rect">
             <a:avLst/>
@@ -9118,79 +11040,13 @@
           <a:p>
             <a:pPr algn="l"/>
             <a:r>
-              <a:rPr sz="1400" b="0" i="0">
-                <a:solidFill>
-                  <a:srgbClr val="FFFFFF"/>
-                </a:solidFill>
-                <a:latin typeface="Calibri"/>
-              </a:rPr>
-              <a:t>Revision notes for this lesson are on the study wiki:</a:t>
-            </a:r>
-          </a:p>
-        </p:txBody>
-      </p:sp>
-      <p:sp>
-        <p:nvSpPr>
-          <p:cNvPr id="13" name="TextBox 12"/>
-          <p:cNvSpPr txBox="1"/>
-          <p:nvPr/>
-        </p:nvSpPr>
-        <p:spPr>
-          <a:xfrm>
-            <a:off x="8503920" y="2926080"/>
-            <a:ext cx="2926080" cy="1463040"/>
-          </a:xfrm>
-          <a:prstGeom prst="rect">
-            <a:avLst/>
-          </a:prstGeom>
-          <a:noFill/>
-        </p:spPr>
-        <p:txBody>
-          <a:bodyPr wrap="square" anchor="t" lIns="0" rIns="0" tIns="0" bIns="0"/>
-          <a:lstStyle/>
-          <a:p>
-            <a:pPr algn="l"/>
-            <a:r>
-              <a:rPr sz="2000" b="1" i="0">
-                <a:solidFill>
-                  <a:srgbClr val="FFFFFF"/>
-                </a:solidFill>
-                <a:latin typeface="Cambria"/>
-              </a:rPr>
-              <a:t>Engineering Core, Part 2</a:t>
-            </a:r>
-          </a:p>
-        </p:txBody>
-      </p:sp>
-      <p:sp>
-        <p:nvSpPr>
-          <p:cNvPr id="14" name="TextBox 13"/>
-          <p:cNvSpPr txBox="1"/>
-          <p:nvPr/>
-        </p:nvSpPr>
-        <p:spPr>
-          <a:xfrm>
-            <a:off x="548640" y="5669280"/>
-            <a:ext cx="11094415" cy="548640"/>
-          </a:xfrm>
-          <a:prstGeom prst="rect">
-            <a:avLst/>
-          </a:prstGeom>
-          <a:noFill/>
-        </p:spPr>
-        <p:txBody>
-          <a:bodyPr wrap="square" anchor="t" lIns="0" rIns="0" tIns="0" bIns="0"/>
-          <a:lstStyle/>
-          <a:p>
-            <a:pPr algn="l"/>
-            <a:r>
-              <a:rPr sz="1200" b="0" i="0">
-                <a:solidFill>
-                  <a:srgbClr val="A9C8F0"/>
-                </a:solidFill>
-                <a:latin typeface="Calibri"/>
-              </a:rPr>
-              <a:t>https://lana6478.github.io/T-level-Design-Development-Engineering-Manufacturing/#/01-core-component/02-engineering-core-part2.md</a:t>
+              <a:rPr sz="1300" b="0" i="1">
+                <a:solidFill>
+                  <a:srgbClr val="54595D"/>
+                </a:solidFill>
+                <a:latin typeface="Calibri"/>
+              </a:rPr>
+              <a:t>Answer on mini whiteboards or in your book. Answers are in the speaker notes.</a:t>
             </a:r>
           </a:p>
         </p:txBody>
